--- a/02_설계/화면정의서.pptx
+++ b/02_설계/화면정의서.pptx
@@ -3113,7 +3113,7 @@
           <a:lstStyle/>
           <a:p>
             <a:r>
-              <a:t>주류 ERP 시스템 화면정의서</a:t>
+              <a:t>주류 ERP 시스템 화면정의서 (Wireframes)</a:t>
             </a:r>
           </a:p>
         </p:txBody>
@@ -3159,19 +3159,29 @@
       <p:grpSpPr/>
       <p:sp>
         <p:nvSpPr>
-          <p:cNvPr id="2" name="Title 1"/>
-          <p:cNvSpPr>
-            <a:spLocks noGrp="1"/>
-          </p:cNvSpPr>
-          <p:nvPr>
-            <p:ph type="title"/>
-          </p:nvPr>
-        </p:nvSpPr>
-        <p:spPr/>
-        <p:txBody>
-          <a:bodyPr/>
-          <a:lstStyle/>
-          <a:p>
+          <p:cNvPr id="2" name="TextBox 1"/>
+          <p:cNvSpPr txBox="1"/>
+          <p:nvPr/>
+        </p:nvSpPr>
+        <p:spPr>
+          <a:xfrm>
+            <a:off x="457200" y="182880"/>
+            <a:ext cx="8229600" cy="457200"/>
+          </a:xfrm>
+          <a:prstGeom prst="rect">
+            <a:avLst/>
+          </a:prstGeom>
+          <a:noFill/>
+        </p:spPr>
+        <p:txBody>
+          <a:bodyPr wrap="none">
+            <a:spAutoFit/>
+          </a:bodyPr>
+          <a:lstStyle/>
+          <a:p>
+            <a:pPr>
+              <a:defRPr b="1" sz="2400"/>
+            </a:pPr>
             <a:r>
               <a:t>9. 매출처 지원품 관리 (`SLS-SPRT-0300`)</a:t>
             </a:r>
@@ -3180,169 +3190,379 @@
       </p:sp>
       <p:sp>
         <p:nvSpPr>
-          <p:cNvPr id="3" name="Content Placeholder 2"/>
-          <p:cNvSpPr>
-            <a:spLocks noGrp="1"/>
-          </p:cNvSpPr>
-          <p:nvPr>
-            <p:ph idx="1"/>
-          </p:nvPr>
-        </p:nvSpPr>
-        <p:spPr/>
-        <p:txBody>
-          <a:bodyPr/>
-          <a:lstStyle/>
-          <a:p/>
+          <p:cNvPr id="3" name="Rectangle 2"/>
+          <p:cNvSpPr/>
+          <p:nvPr/>
+        </p:nvSpPr>
+        <p:spPr>
+          <a:xfrm>
+            <a:off x="457200" y="914400"/>
+            <a:ext cx="8229600" cy="1371600"/>
+          </a:xfrm>
+          <a:prstGeom prst="rect">
+            <a:avLst/>
+          </a:prstGeom>
+          <a:solidFill>
+            <a:srgbClr val="F0F0F0"/>
+          </a:solidFill>
+        </p:spPr>
+        <p:style>
+          <a:lnRef idx="1">
+            <a:schemeClr val="accent1"/>
+          </a:lnRef>
+          <a:fillRef idx="3">
+            <a:schemeClr val="accent1"/>
+          </a:fillRef>
+          <a:effectRef idx="2">
+            <a:schemeClr val="accent1"/>
+          </a:effectRef>
+          <a:fontRef idx="minor">
+            <a:schemeClr val="lt1"/>
+          </a:fontRef>
+        </p:style>
+        <p:txBody>
+          <a:bodyPr rtlCol="0" anchor="ctr"/>
+          <a:lstStyle/>
+          <a:p>
+            <a:pPr algn="ctr"/>
+            <a:r>
+              <a:rPr sz="1200">
+                <a:solidFill>
+                  <a:srgbClr val="FFFFFF"/>
+                </a:solidFill>
+              </a:rPr>
+              <a:t>상단 영역 (검색 조건 또는 마스터 폼)</a:t>
+            </a:r>
+          </a:p>
+        </p:txBody>
+      </p:sp>
+      <p:sp>
+        <p:nvSpPr>
+          <p:cNvPr id="4" name="Rounded Rectangle 3"/>
+          <p:cNvSpPr/>
+          <p:nvPr/>
+        </p:nvSpPr>
+        <p:spPr>
+          <a:xfrm>
+            <a:off x="914400" y="1371600"/>
+            <a:ext cx="1828800" cy="274320"/>
+          </a:xfrm>
+          <a:prstGeom prst="roundRect">
+            <a:avLst/>
+          </a:prstGeom>
+        </p:spPr>
+        <p:style>
+          <a:lnRef idx="1">
+            <a:schemeClr val="accent1"/>
+          </a:lnRef>
+          <a:fillRef idx="3">
+            <a:schemeClr val="accent1"/>
+          </a:fillRef>
+          <a:effectRef idx="2">
+            <a:schemeClr val="accent1"/>
+          </a:effectRef>
+          <a:fontRef idx="minor">
+            <a:schemeClr val="lt1"/>
+          </a:fontRef>
+        </p:style>
+        <p:txBody>
+          <a:bodyPr rtlCol="0" anchor="ctr"/>
+          <a:lstStyle/>
+          <a:p>
+            <a:pPr algn="ctr"/>
+            <a:r>
+              <a:rPr sz="1200">
+                <a:solidFill>
+                  <a:srgbClr val="000000"/>
+                </a:solidFill>
+              </a:rPr>
+              <a:t>검색어/입력란 1</a:t>
+            </a:r>
+          </a:p>
+        </p:txBody>
+      </p:sp>
+      <p:sp>
+        <p:nvSpPr>
+          <p:cNvPr id="5" name="Rounded Rectangle 4"/>
+          <p:cNvSpPr/>
+          <p:nvPr/>
+        </p:nvSpPr>
+        <p:spPr>
+          <a:xfrm>
+            <a:off x="3200400" y="1371600"/>
+            <a:ext cx="1828800" cy="274320"/>
+          </a:xfrm>
+          <a:prstGeom prst="roundRect">
+            <a:avLst/>
+          </a:prstGeom>
+        </p:spPr>
+        <p:style>
+          <a:lnRef idx="1">
+            <a:schemeClr val="accent1"/>
+          </a:lnRef>
+          <a:fillRef idx="3">
+            <a:schemeClr val="accent1"/>
+          </a:fillRef>
+          <a:effectRef idx="2">
+            <a:schemeClr val="accent1"/>
+          </a:effectRef>
+          <a:fontRef idx="minor">
+            <a:schemeClr val="lt1"/>
+          </a:fontRef>
+        </p:style>
+        <p:txBody>
+          <a:bodyPr rtlCol="0" anchor="ctr"/>
+          <a:lstStyle/>
+          <a:p>
+            <a:pPr algn="ctr"/>
+            <a:r>
+              <a:rPr sz="1200">
+                <a:solidFill>
+                  <a:srgbClr val="000000"/>
+                </a:solidFill>
+              </a:rPr>
+              <a:t>검색어/입력란 2</a:t>
+            </a:r>
+          </a:p>
+        </p:txBody>
+      </p:sp>
+      <p:sp>
+        <p:nvSpPr>
+          <p:cNvPr id="6" name="Rounded Rectangle 5"/>
+          <p:cNvSpPr/>
+          <p:nvPr/>
+        </p:nvSpPr>
+        <p:spPr>
+          <a:xfrm>
+            <a:off x="6858000" y="365760"/>
+            <a:ext cx="731520" cy="274320"/>
+          </a:xfrm>
+          <a:prstGeom prst="roundRect">
+            <a:avLst/>
+          </a:prstGeom>
+          <a:solidFill>
+            <a:srgbClr val="0070C0"/>
+          </a:solidFill>
+        </p:spPr>
+        <p:style>
+          <a:lnRef idx="1">
+            <a:schemeClr val="accent1"/>
+          </a:lnRef>
+          <a:fillRef idx="3">
+            <a:schemeClr val="accent1"/>
+          </a:fillRef>
+          <a:effectRef idx="2">
+            <a:schemeClr val="accent1"/>
+          </a:effectRef>
+          <a:fontRef idx="minor">
+            <a:schemeClr val="lt1"/>
+          </a:fontRef>
+        </p:style>
+        <p:txBody>
+          <a:bodyPr rtlCol="0" anchor="ctr"/>
+          <a:lstStyle/>
+          <a:p>
+            <a:pPr algn="ctr"/>
+            <a:r>
+              <a:rPr sz="1000">
+                <a:solidFill>
+                  <a:srgbClr val="FFFFFF"/>
+                </a:solidFill>
+              </a:rPr>
+              <a:t>조회/신규</a:t>
+            </a:r>
+          </a:p>
+        </p:txBody>
+      </p:sp>
+      <p:sp>
+        <p:nvSpPr>
+          <p:cNvPr id="7" name="Rounded Rectangle 6"/>
+          <p:cNvSpPr/>
+          <p:nvPr/>
+        </p:nvSpPr>
+        <p:spPr>
+          <a:xfrm>
+            <a:off x="7772400" y="365760"/>
+            <a:ext cx="731520" cy="274320"/>
+          </a:xfrm>
+          <a:prstGeom prst="roundRect">
+            <a:avLst/>
+          </a:prstGeom>
+          <a:solidFill>
+            <a:srgbClr val="00B050"/>
+          </a:solidFill>
+        </p:spPr>
+        <p:style>
+          <a:lnRef idx="1">
+            <a:schemeClr val="accent1"/>
+          </a:lnRef>
+          <a:fillRef idx="3">
+            <a:schemeClr val="accent1"/>
+          </a:fillRef>
+          <a:effectRef idx="2">
+            <a:schemeClr val="accent1"/>
+          </a:effectRef>
+          <a:fontRef idx="minor">
+            <a:schemeClr val="lt1"/>
+          </a:fontRef>
+        </p:style>
+        <p:txBody>
+          <a:bodyPr rtlCol="0" anchor="ctr"/>
+          <a:lstStyle/>
+          <a:p>
+            <a:pPr algn="ctr"/>
+            <a:r>
+              <a:rPr sz="1000">
+                <a:solidFill>
+                  <a:srgbClr val="FFFFFF"/>
+                </a:solidFill>
+              </a:rPr>
+              <a:t>저장/저장</a:t>
+            </a:r>
+          </a:p>
+        </p:txBody>
+      </p:sp>
+      <p:sp>
+        <p:nvSpPr>
+          <p:cNvPr id="8" name="Rectangle 7"/>
+          <p:cNvSpPr/>
+          <p:nvPr/>
+        </p:nvSpPr>
+        <p:spPr>
+          <a:xfrm>
+            <a:off x="457200" y="2743200"/>
+            <a:ext cx="8229600" cy="2286000"/>
+          </a:xfrm>
+          <a:prstGeom prst="rect">
+            <a:avLst/>
+          </a:prstGeom>
+          <a:solidFill>
+            <a:srgbClr val="F5F5FF"/>
+          </a:solidFill>
+        </p:spPr>
+        <p:style>
+          <a:lnRef idx="1">
+            <a:schemeClr val="accent1"/>
+          </a:lnRef>
+          <a:fillRef idx="3">
+            <a:schemeClr val="accent1"/>
+          </a:fillRef>
+          <a:effectRef idx="2">
+            <a:schemeClr val="accent1"/>
+          </a:effectRef>
+          <a:fontRef idx="minor">
+            <a:schemeClr val="lt1"/>
+          </a:fontRef>
+        </p:style>
+        <p:txBody>
+          <a:bodyPr rtlCol="0" anchor="ctr"/>
+          <a:lstStyle/>
+          <a:p>
+            <a:pPr algn="ctr"/>
+            <a:r>
+              <a:rPr sz="1200">
+                <a:solidFill>
+                  <a:srgbClr val="FFFFFF"/>
+                </a:solidFill>
+              </a:rPr>
+              <a:t>중단 영역 (목록 리스트 또는 전표 디테일 라인)</a:t>
+            </a:r>
+          </a:p>
+          <a:p>
+            <a:pPr algn="ctr"/>
+          </a:p>
+          <a:p>
+            <a:pPr algn="ctr"/>
+            <a:r>
+              <a:rPr sz="1200">
+                <a:solidFill>
+                  <a:srgbClr val="FFFFFF"/>
+                </a:solidFill>
+              </a:rPr>
+              <a:t>[ Data Grid ]</a:t>
+            </a:r>
+          </a:p>
+        </p:txBody>
+      </p:sp>
+      <p:sp>
+        <p:nvSpPr>
+          <p:cNvPr id="9" name="Rectangle 8"/>
+          <p:cNvSpPr/>
+          <p:nvPr/>
+        </p:nvSpPr>
+        <p:spPr>
+          <a:xfrm>
+            <a:off x="457200" y="5486400"/>
+            <a:ext cx="8229600" cy="1097280"/>
+          </a:xfrm>
+          <a:prstGeom prst="rect">
+            <a:avLst/>
+          </a:prstGeom>
+          <a:solidFill>
+            <a:srgbClr val="FFF5F5"/>
+          </a:solidFill>
+        </p:spPr>
+        <p:style>
+          <a:lnRef idx="1">
+            <a:schemeClr val="accent1"/>
+          </a:lnRef>
+          <a:fillRef idx="3">
+            <a:schemeClr val="accent1"/>
+          </a:fillRef>
+          <a:effectRef idx="2">
+            <a:schemeClr val="accent1"/>
+          </a:effectRef>
+          <a:fontRef idx="minor">
+            <a:schemeClr val="lt1"/>
+          </a:fontRef>
+        </p:style>
+        <p:txBody>
+          <a:bodyPr rtlCol="0" anchor="ctr"/>
+          <a:lstStyle/>
+          <a:p>
+            <a:pPr algn="ctr"/>
+            <a:r>
+              <a:rPr sz="1200">
+                <a:solidFill>
+                  <a:srgbClr val="FFFFFF"/>
+                </a:solidFill>
+              </a:rPr>
+              <a:t>하단 영역 (상세 정보 탭 또는 합계 영역)</a:t>
+            </a:r>
+          </a:p>
+        </p:txBody>
+      </p:sp>
+      <p:sp>
+        <p:nvSpPr>
+          <p:cNvPr id="10" name="TextBox 9"/>
+          <p:cNvSpPr txBox="1"/>
+          <p:nvPr/>
+        </p:nvSpPr>
+        <p:spPr>
+          <a:xfrm>
+            <a:off x="457200" y="548640"/>
+            <a:ext cx="8229600" cy="365760"/>
+          </a:xfrm>
+          <a:prstGeom prst="rect">
+            <a:avLst/>
+          </a:prstGeom>
+          <a:noFill/>
+        </p:spPr>
+        <p:txBody>
+          <a:bodyPr wrap="none">
+            <a:spAutoFit/>
+          </a:bodyPr>
+          <a:lstStyle/>
           <a:p>
             <a:pPr>
-              <a:defRPr b="1" sz="1800"/>
+              <a:defRPr sz="1200">
+                <a:solidFill>
+                  <a:srgbClr val="646464"/>
+                </a:solidFill>
+              </a:defRPr>
             </a:pPr>
             <a:r>
-              <a:t>9.1. 화면 레이아웃</a:t>
-            </a:r>
-          </a:p>
-          <a:p>
-            <a:pPr lvl="1">
-              <a:defRPr sz="1400"/>
-            </a:pPr>
-            <a:r>
-              <a:t>  상단 (검색 영역): 지원 기간, 매출처, 지원 구분(전체/물품/현금), 진행 상태(진행중/완료)</a:t>
-            </a:r>
-          </a:p>
-          <a:p>
-            <a:pPr lvl="1">
-              <a:defRPr sz="1400"/>
-            </a:pPr>
-            <a:r>
-              <a:t>  중단 (목록 영역): 등록된 지원 내역 리스트 그리드</a:t>
-            </a:r>
-          </a:p>
-          <a:p>
-            <a:pPr lvl="1">
-              <a:defRPr sz="1400"/>
-            </a:pPr>
-            <a:r>
-              <a:t>  하단 (상세 영역): 선택된 지원건의 상세 정보 및 회수 현황 입력 폼 (탭 구조: 기본 약정 정보 / 상세(물품/현금) 내역 및 이력)</a:t>
-            </a:r>
-          </a:p>
-          <a:p>
-            <a:pPr lvl="1">
-              <a:defRPr sz="1400"/>
-            </a:pPr>
-            <a:r>
-              <a:t>  우측 상단 (버튼 영역): `[신규]`, `[저장]`, `[삭제]`</a:t>
-            </a:r>
-          </a:p>
-          <a:p>
-            <a:pPr>
-              <a:defRPr b="1" sz="1800"/>
-            </a:pPr>
-            <a:r>
-              <a:t>9.2. 입력 항목 (상세 영역)</a:t>
-            </a:r>
-          </a:p>
-          <a:p>
-            <a:pPr lvl="1">
-              <a:defRPr sz="1400"/>
-            </a:pPr>
-            <a:r>
-              <a:t>  [기본 약정 정보 탭]</a:t>
-            </a:r>
-          </a:p>
-          <a:p>
-            <a:pPr lvl="2">
-              <a:defRPr sz="1200"/>
-            </a:pPr>
-            <a:r>
-              <a:t>  매출처 선택, 약정 기간(시작일~종료일), 약정 조건(특정 기간 내 목표 매출액 등), 지원 유형(물품 지원 / 현금성 지원 라디오버튼)</a:t>
-            </a:r>
-          </a:p>
-          <a:p>
-            <a:pPr lvl="2">
-              <a:defRPr sz="1200"/>
-            </a:pPr>
-            <a:r>
-              <a:t>  상태: 진행중, 완료(조건달성/회수완료), 중도해지 등</a:t>
-            </a:r>
-          </a:p>
-          <a:p>
-            <a:pPr lvl="1">
-              <a:defRPr sz="1400"/>
-            </a:pPr>
-            <a:r>
-              <a:t>  [상세 내역 및 이력 탭 - 물품 지원 시]</a:t>
-            </a:r>
-          </a:p>
-          <a:p>
-            <a:pPr lvl="2">
-              <a:defRPr sz="1200"/>
-            </a:pPr>
-            <a:r>
-              <a:t>  지원 구분 드롭다운: 지원, 회수, 망실, 소모품</a:t>
-            </a:r>
-          </a:p>
-          <a:p>
-            <a:pPr lvl="2">
-              <a:defRPr sz="1200"/>
-            </a:pPr>
-            <a:r>
-              <a:t>  지원 품목 리스트 (냉장고, 홍보물, 잔 등), 수량, 단가, 지급일.</a:t>
-            </a:r>
-          </a:p>
-          <a:p>
-            <a:pPr lvl="1">
-              <a:defRPr sz="1400"/>
-            </a:pPr>
-            <a:r>
-              <a:t>  [상세 내역 및 이력 탭 - 현금성 지원 시]</a:t>
-            </a:r>
-          </a:p>
-          <a:p>
-            <a:pPr lvl="2">
-              <a:defRPr sz="1200"/>
-            </a:pPr>
-            <a:r>
-              <a:t>  총 지원(대여) 금액, 지급일자, 상환 방식(분할 상환, 매출 연동 상계 등).</a:t>
-            </a:r>
-          </a:p>
-          <a:p>
-            <a:pPr lvl="2">
-              <a:defRPr sz="1200"/>
-            </a:pPr>
-            <a:r>
-              <a:t>  회수 스케줄 및 실제 회수(수금) 내역 리스트 등록 폼.</a:t>
-            </a:r>
-          </a:p>
-          <a:p>
-            <a:pPr>
-              <a:defRPr b="1" sz="1800"/>
-            </a:pPr>
-            <a:r>
-              <a:t>9.3. 주요 기능/처리 로직</a:t>
-            </a:r>
-          </a:p>
-          <a:p>
-            <a:pPr lvl="1">
-              <a:defRPr sz="1400"/>
-            </a:pPr>
-            <a:r>
-              <a:t>  약정 조건 트래킹: 입력된 약정 기간 및 목표 매출액과 실제 '매출전표' 데이터를 비교하여 달성률을 조회하는 기능 지원.</a:t>
-            </a:r>
-          </a:p>
-          <a:p>
-            <a:pPr lvl="1">
-              <a:defRPr sz="1400"/>
-            </a:pPr>
-            <a:r>
-              <a:t>  물품 상태 관리: '지원' 상태인 물품에 대해 추후 '회수' 또는 '망실(파손/분실)' 처리를 할 수 있도록 이력형 그리드로 구성. '소모품'의 경우 일회성 비용으로 처리.</a:t>
-            </a:r>
-          </a:p>
-          <a:p>
-            <a:pPr lvl="1">
-              <a:defRPr sz="1400"/>
-            </a:pPr>
-            <a:r>
-              <a:t>  현금 회수 로직: 현금성 지원의 경우 특정 기간 동안 분할 회수하는 내역을 기록하며, 채권(미수금) 데이터와 연동하여 관리할 수 있는 구조 제공.</a:t>
+              <a:t>주요 기능: 입력된 약정 기간 및 목표 매출액과 실제 '매출전표' 데이터를 비교하여 달성률을 조회하는 기능 지원.</a:t>
             </a:r>
           </a:p>
         </p:txBody>
@@ -3367,19 +3587,29 @@
       <p:grpSpPr/>
       <p:sp>
         <p:nvSpPr>
-          <p:cNvPr id="2" name="Title 1"/>
-          <p:cNvSpPr>
-            <a:spLocks noGrp="1"/>
-          </p:cNvSpPr>
-          <p:nvPr>
-            <p:ph type="title"/>
-          </p:nvPr>
-        </p:nvSpPr>
-        <p:spPr/>
-        <p:txBody>
-          <a:bodyPr/>
-          <a:lstStyle/>
-          <a:p>
+          <p:cNvPr id="2" name="TextBox 1"/>
+          <p:cNvSpPr txBox="1"/>
+          <p:nvPr/>
+        </p:nvSpPr>
+        <p:spPr>
+          <a:xfrm>
+            <a:off x="457200" y="182880"/>
+            <a:ext cx="8229600" cy="457200"/>
+          </a:xfrm>
+          <a:prstGeom prst="rect">
+            <a:avLst/>
+          </a:prstGeom>
+          <a:noFill/>
+        </p:spPr>
+        <p:txBody>
+          <a:bodyPr wrap="none">
+            <a:spAutoFit/>
+          </a:bodyPr>
+          <a:lstStyle/>
+          <a:p>
+            <a:pPr>
+              <a:defRPr b="1" sz="2400"/>
+            </a:pPr>
             <a:r>
               <a:t>1. 매입처 등록 및 관리 (`INFO-MNG-0200`)</a:t>
             </a:r>
@@ -3388,113 +3618,424 @@
       </p:sp>
       <p:sp>
         <p:nvSpPr>
-          <p:cNvPr id="3" name="Content Placeholder 2"/>
-          <p:cNvSpPr>
-            <a:spLocks noGrp="1"/>
-          </p:cNvSpPr>
-          <p:nvPr>
-            <p:ph idx="1"/>
-          </p:nvPr>
-        </p:nvSpPr>
-        <p:spPr/>
-        <p:txBody>
-          <a:bodyPr/>
-          <a:lstStyle/>
-          <a:p/>
+          <p:cNvPr id="3" name="Rectangle 2"/>
+          <p:cNvSpPr/>
+          <p:nvPr/>
+        </p:nvSpPr>
+        <p:spPr>
+          <a:xfrm>
+            <a:off x="457200" y="914400"/>
+            <a:ext cx="3200400" cy="5029200"/>
+          </a:xfrm>
+          <a:prstGeom prst="rect">
+            <a:avLst/>
+          </a:prstGeom>
+          <a:solidFill>
+            <a:srgbClr val="F0F0F0"/>
+          </a:solidFill>
+        </p:spPr>
+        <p:style>
+          <a:lnRef idx="1">
+            <a:schemeClr val="accent1"/>
+          </a:lnRef>
+          <a:fillRef idx="3">
+            <a:schemeClr val="accent1"/>
+          </a:fillRef>
+          <a:effectRef idx="2">
+            <a:schemeClr val="accent1"/>
+          </a:effectRef>
+          <a:fontRef idx="minor">
+            <a:schemeClr val="lt1"/>
+          </a:fontRef>
+        </p:style>
+        <p:txBody>
+          <a:bodyPr rtlCol="0" anchor="ctr"/>
+          <a:lstStyle/>
+          <a:p>
+            <a:pPr algn="ctr"/>
+            <a:r>
+              <a:rPr sz="1200">
+                <a:solidFill>
+                  <a:srgbClr val="FFFFFF"/>
+                </a:solidFill>
+              </a:rPr>
+              <a:t>검색 조건 및 결과 리스트 (목록 영역)</a:t>
+            </a:r>
+          </a:p>
+          <a:p>
+            <a:pPr algn="ctr"/>
+          </a:p>
+          <a:p>
+            <a:pPr algn="ctr"/>
+            <a:r>
+              <a:rPr sz="1200">
+                <a:solidFill>
+                  <a:srgbClr val="FFFFFF"/>
+                </a:solidFill>
+              </a:rPr>
+              <a:t>[ Data Grid ]</a:t>
+            </a:r>
+          </a:p>
+        </p:txBody>
+      </p:sp>
+      <p:sp>
+        <p:nvSpPr>
+          <p:cNvPr id="4" name="Rectangle 3"/>
+          <p:cNvSpPr/>
+          <p:nvPr/>
+        </p:nvSpPr>
+        <p:spPr>
+          <a:xfrm>
+            <a:off x="4114800" y="914400"/>
+            <a:ext cx="4572000" cy="5029200"/>
+          </a:xfrm>
+          <a:prstGeom prst="rect">
+            <a:avLst/>
+          </a:prstGeom>
+          <a:solidFill>
+            <a:srgbClr val="F5F5FF"/>
+          </a:solidFill>
+        </p:spPr>
+        <p:style>
+          <a:lnRef idx="1">
+            <a:schemeClr val="accent1"/>
+          </a:lnRef>
+          <a:fillRef idx="3">
+            <a:schemeClr val="accent1"/>
+          </a:fillRef>
+          <a:effectRef idx="2">
+            <a:schemeClr val="accent1"/>
+          </a:effectRef>
+          <a:fontRef idx="minor">
+            <a:schemeClr val="lt1"/>
+          </a:fontRef>
+        </p:style>
+        <p:txBody>
+          <a:bodyPr rtlCol="0" anchor="ctr"/>
+          <a:lstStyle/>
+          <a:p>
+            <a:pPr algn="ctr"/>
+            <a:r>
+              <a:rPr sz="1200">
+                <a:solidFill>
+                  <a:srgbClr val="FFFFFF"/>
+                </a:solidFill>
+              </a:rPr>
+              <a:t>상세 정보 입력 폼 (상세 영역)</a:t>
+            </a:r>
+          </a:p>
+        </p:txBody>
+      </p:sp>
+      <p:sp>
+        <p:nvSpPr>
+          <p:cNvPr id="5" name="Rounded Rectangle 4"/>
+          <p:cNvSpPr/>
+          <p:nvPr/>
+        </p:nvSpPr>
+        <p:spPr>
+          <a:xfrm>
+            <a:off x="4389120" y="1371600"/>
+            <a:ext cx="4023360" cy="365760"/>
+          </a:xfrm>
+          <a:prstGeom prst="roundRect">
+            <a:avLst/>
+          </a:prstGeom>
+        </p:spPr>
+        <p:style>
+          <a:lnRef idx="1">
+            <a:schemeClr val="accent1"/>
+          </a:lnRef>
+          <a:fillRef idx="3">
+            <a:schemeClr val="accent1"/>
+          </a:fillRef>
+          <a:effectRef idx="2">
+            <a:schemeClr val="accent1"/>
+          </a:effectRef>
+          <a:fontRef idx="minor">
+            <a:schemeClr val="lt1"/>
+          </a:fontRef>
+        </p:style>
+        <p:txBody>
+          <a:bodyPr rtlCol="0" anchor="ctr"/>
+          <a:lstStyle/>
+          <a:p>
+            <a:pPr algn="ctr"/>
+            <a:r>
+              <a:rPr sz="1200">
+                <a:solidFill>
+                  <a:srgbClr val="000000"/>
+                </a:solidFill>
+              </a:rPr>
+              <a:t>입력 필드 1 (예: 기본 정보)</a:t>
+            </a:r>
+          </a:p>
+        </p:txBody>
+      </p:sp>
+      <p:sp>
+        <p:nvSpPr>
+          <p:cNvPr id="6" name="Rounded Rectangle 5"/>
+          <p:cNvSpPr/>
+          <p:nvPr/>
+        </p:nvSpPr>
+        <p:spPr>
+          <a:xfrm>
+            <a:off x="4389120" y="1920240"/>
+            <a:ext cx="4023360" cy="365760"/>
+          </a:xfrm>
+          <a:prstGeom prst="roundRect">
+            <a:avLst/>
+          </a:prstGeom>
+        </p:spPr>
+        <p:style>
+          <a:lnRef idx="1">
+            <a:schemeClr val="accent1"/>
+          </a:lnRef>
+          <a:fillRef idx="3">
+            <a:schemeClr val="accent1"/>
+          </a:fillRef>
+          <a:effectRef idx="2">
+            <a:schemeClr val="accent1"/>
+          </a:effectRef>
+          <a:fontRef idx="minor">
+            <a:schemeClr val="lt1"/>
+          </a:fontRef>
+        </p:style>
+        <p:txBody>
+          <a:bodyPr rtlCol="0" anchor="ctr"/>
+          <a:lstStyle/>
+          <a:p>
+            <a:pPr algn="ctr"/>
+            <a:r>
+              <a:rPr sz="1200">
+                <a:solidFill>
+                  <a:srgbClr val="000000"/>
+                </a:solidFill>
+              </a:rPr>
+              <a:t>입력 필드 2 (예: 상세 정보)</a:t>
+            </a:r>
+          </a:p>
+        </p:txBody>
+      </p:sp>
+      <p:sp>
+        <p:nvSpPr>
+          <p:cNvPr id="7" name="Rounded Rectangle 6"/>
+          <p:cNvSpPr/>
+          <p:nvPr/>
+        </p:nvSpPr>
+        <p:spPr>
+          <a:xfrm>
+            <a:off x="4389120" y="2468880"/>
+            <a:ext cx="4023360" cy="365760"/>
+          </a:xfrm>
+          <a:prstGeom prst="roundRect">
+            <a:avLst/>
+          </a:prstGeom>
+        </p:spPr>
+        <p:style>
+          <a:lnRef idx="1">
+            <a:schemeClr val="accent1"/>
+          </a:lnRef>
+          <a:fillRef idx="3">
+            <a:schemeClr val="accent1"/>
+          </a:fillRef>
+          <a:effectRef idx="2">
+            <a:schemeClr val="accent1"/>
+          </a:effectRef>
+          <a:fontRef idx="minor">
+            <a:schemeClr val="lt1"/>
+          </a:fontRef>
+        </p:style>
+        <p:txBody>
+          <a:bodyPr rtlCol="0" anchor="ctr"/>
+          <a:lstStyle/>
+          <a:p>
+            <a:pPr algn="ctr"/>
+            <a:r>
+              <a:rPr sz="1200">
+                <a:solidFill>
+                  <a:srgbClr val="000000"/>
+                </a:solidFill>
+              </a:rPr>
+              <a:t>입력 필드 3 (예: 상태/설정)</a:t>
+            </a:r>
+          </a:p>
+        </p:txBody>
+      </p:sp>
+      <p:sp>
+        <p:nvSpPr>
+          <p:cNvPr id="8" name="Rounded Rectangle 7"/>
+          <p:cNvSpPr/>
+          <p:nvPr/>
+        </p:nvSpPr>
+        <p:spPr>
+          <a:xfrm>
+            <a:off x="5943600" y="365760"/>
+            <a:ext cx="731520" cy="274320"/>
+          </a:xfrm>
+          <a:prstGeom prst="roundRect">
+            <a:avLst/>
+          </a:prstGeom>
+          <a:solidFill>
+            <a:srgbClr val="0070C0"/>
+          </a:solidFill>
+        </p:spPr>
+        <p:style>
+          <a:lnRef idx="1">
+            <a:schemeClr val="accent1"/>
+          </a:lnRef>
+          <a:fillRef idx="3">
+            <a:schemeClr val="accent1"/>
+          </a:fillRef>
+          <a:effectRef idx="2">
+            <a:schemeClr val="accent1"/>
+          </a:effectRef>
+          <a:fontRef idx="minor">
+            <a:schemeClr val="lt1"/>
+          </a:fontRef>
+        </p:style>
+        <p:txBody>
+          <a:bodyPr rtlCol="0" anchor="ctr"/>
+          <a:lstStyle/>
+          <a:p>
+            <a:pPr algn="ctr"/>
+            <a:r>
+              <a:rPr sz="1000">
+                <a:solidFill>
+                  <a:srgbClr val="FFFFFF"/>
+                </a:solidFill>
+              </a:rPr>
+              <a:t>신규</a:t>
+            </a:r>
+          </a:p>
+        </p:txBody>
+      </p:sp>
+      <p:sp>
+        <p:nvSpPr>
+          <p:cNvPr id="9" name="Rounded Rectangle 8"/>
+          <p:cNvSpPr/>
+          <p:nvPr/>
+        </p:nvSpPr>
+        <p:spPr>
+          <a:xfrm>
+            <a:off x="6858000" y="365760"/>
+            <a:ext cx="731520" cy="274320"/>
+          </a:xfrm>
+          <a:prstGeom prst="roundRect">
+            <a:avLst/>
+          </a:prstGeom>
+          <a:solidFill>
+            <a:srgbClr val="00B050"/>
+          </a:solidFill>
+        </p:spPr>
+        <p:style>
+          <a:lnRef idx="1">
+            <a:schemeClr val="accent1"/>
+          </a:lnRef>
+          <a:fillRef idx="3">
+            <a:schemeClr val="accent1"/>
+          </a:fillRef>
+          <a:effectRef idx="2">
+            <a:schemeClr val="accent1"/>
+          </a:effectRef>
+          <a:fontRef idx="minor">
+            <a:schemeClr val="lt1"/>
+          </a:fontRef>
+        </p:style>
+        <p:txBody>
+          <a:bodyPr rtlCol="0" anchor="ctr"/>
+          <a:lstStyle/>
+          <a:p>
+            <a:pPr algn="ctr"/>
+            <a:r>
+              <a:rPr sz="1000">
+                <a:solidFill>
+                  <a:srgbClr val="FFFFFF"/>
+                </a:solidFill>
+              </a:rPr>
+              <a:t>저장</a:t>
+            </a:r>
+          </a:p>
+        </p:txBody>
+      </p:sp>
+      <p:sp>
+        <p:nvSpPr>
+          <p:cNvPr id="10" name="Rounded Rectangle 9"/>
+          <p:cNvSpPr/>
+          <p:nvPr/>
+        </p:nvSpPr>
+        <p:spPr>
+          <a:xfrm>
+            <a:off x="7772400" y="365760"/>
+            <a:ext cx="731520" cy="274320"/>
+          </a:xfrm>
+          <a:prstGeom prst="roundRect">
+            <a:avLst/>
+          </a:prstGeom>
+          <a:solidFill>
+            <a:srgbClr val="FF0000"/>
+          </a:solidFill>
+        </p:spPr>
+        <p:style>
+          <a:lnRef idx="1">
+            <a:schemeClr val="accent1"/>
+          </a:lnRef>
+          <a:fillRef idx="3">
+            <a:schemeClr val="accent1"/>
+          </a:fillRef>
+          <a:effectRef idx="2">
+            <a:schemeClr val="accent1"/>
+          </a:effectRef>
+          <a:fontRef idx="minor">
+            <a:schemeClr val="lt1"/>
+          </a:fontRef>
+        </p:style>
+        <p:txBody>
+          <a:bodyPr rtlCol="0" anchor="ctr"/>
+          <a:lstStyle/>
+          <a:p>
+            <a:pPr algn="ctr"/>
+            <a:r>
+              <a:rPr sz="1000">
+                <a:solidFill>
+                  <a:srgbClr val="FFFFFF"/>
+                </a:solidFill>
+              </a:rPr>
+              <a:t>삭제</a:t>
+            </a:r>
+          </a:p>
+        </p:txBody>
+      </p:sp>
+      <p:sp>
+        <p:nvSpPr>
+          <p:cNvPr id="11" name="TextBox 10"/>
+          <p:cNvSpPr txBox="1"/>
+          <p:nvPr/>
+        </p:nvSpPr>
+        <p:spPr>
+          <a:xfrm>
+            <a:off x="457200" y="548640"/>
+            <a:ext cx="8229600" cy="365760"/>
+          </a:xfrm>
+          <a:prstGeom prst="rect">
+            <a:avLst/>
+          </a:prstGeom>
+          <a:noFill/>
+        </p:spPr>
+        <p:txBody>
+          <a:bodyPr wrap="none">
+            <a:spAutoFit/>
+          </a:bodyPr>
+          <a:lstStyle/>
           <a:p>
             <a:pPr>
-              <a:defRPr b="1" sz="1800"/>
+              <a:defRPr sz="1200">
+                <a:solidFill>
+                  <a:srgbClr val="646464"/>
+                </a:solidFill>
+              </a:defRPr>
             </a:pPr>
             <a:r>
-              <a:t>1.1. 화면 레이아웃</a:t>
-            </a:r>
-          </a:p>
-          <a:p>
-            <a:pPr lvl="1">
-              <a:defRPr sz="1400"/>
-            </a:pPr>
-            <a:r>
-              <a:t>  좌측 (목록 영역): 매입처 검색 조건 (검색어, 사용여부) 및 검색 결과 그리드 리스트</a:t>
-            </a:r>
-          </a:p>
-          <a:p>
-            <a:pPr lvl="1">
-              <a:defRPr sz="1400"/>
-            </a:pPr>
-            <a:r>
-              <a:t>  우측 (상세 영역): 선택된 매입처의 상세 정보 입력 폼</a:t>
-            </a:r>
-          </a:p>
-          <a:p>
-            <a:pPr lvl="1">
-              <a:defRPr sz="1400"/>
-            </a:pPr>
-            <a:r>
-              <a:t>  상단 (버튼 영역): `[신규]`, `[저장]`, `[삭제]`, `[변경이력 조회]`</a:t>
-            </a:r>
-          </a:p>
-          <a:p>
-            <a:pPr>
-              <a:defRPr b="1" sz="1800"/>
-            </a:pPr>
-            <a:r>
-              <a:t>1.2. 입력 항목 (상세 영역)</a:t>
-            </a:r>
-          </a:p>
-          <a:p>
-            <a:pPr lvl="1">
-              <a:defRPr sz="1400"/>
-            </a:pPr>
-            <a:r>
-              <a:t>  기본 정보: 매입처코드(자동생성), 매입처명(필수), 사업자번호(필수, 이력대상, 중복불가, PK사용불가), 주류도매업 면허번호</a:t>
-            </a:r>
-          </a:p>
-          <a:p>
-            <a:pPr lvl="1">
-              <a:defRPr sz="1400"/>
-            </a:pPr>
-            <a:r>
-              <a:t>  연락 정보: 대표자명, 담당자명, 연락처, 이메일, 주소</a:t>
-            </a:r>
-          </a:p>
-          <a:p>
-            <a:pPr lvl="1">
-              <a:defRPr sz="1400"/>
-            </a:pPr>
-            <a:r>
-              <a:t>  계좌 정보: 은행명, 계좌번호, 예금주</a:t>
-            </a:r>
-          </a:p>
-          <a:p>
-            <a:pPr lvl="1">
-              <a:defRPr sz="1400"/>
-            </a:pPr>
-            <a:r>
-              <a:t>  상태: 사용여부 (사용/중지)</a:t>
-            </a:r>
-          </a:p>
-          <a:p>
-            <a:pPr>
-              <a:defRPr b="1" sz="1800"/>
-            </a:pPr>
-            <a:r>
-              <a:t>1.3. 주요 기능/처리 로직</a:t>
-            </a:r>
-          </a:p>
-          <a:p>
-            <a:pPr lvl="1">
-              <a:defRPr sz="1400"/>
-            </a:pPr>
-            <a:r>
-              <a:t>  저장 로직: 신규 등록 및 수정 시 데이터 검증(사업자번호 정규식 등). 수정 발생 시 기존 데이터와 비교하여 변경된 컬럼이 있을 경우 `History Log` 테이블에 자동 Insert.</a:t>
-            </a:r>
-          </a:p>
-          <a:p>
-            <a:pPr lvl="1">
-              <a:defRPr sz="1400"/>
-            </a:pPr>
-            <a:r>
-              <a:t>  변경이력 조회: `[변경이력 조회]` 버튼 클릭 시 `SYS-HSTRY-0100` 팝업을 호출하여 해당 매입처의 모든 변경 이력을 리스트업.</a:t>
+              <a:t>주요 기능: 설계서 참조</a:t>
             </a:r>
           </a:p>
         </p:txBody>
@@ -3519,19 +4060,29 @@
       <p:grpSpPr/>
       <p:sp>
         <p:nvSpPr>
-          <p:cNvPr id="2" name="Title 1"/>
-          <p:cNvSpPr>
-            <a:spLocks noGrp="1"/>
-          </p:cNvSpPr>
-          <p:nvPr>
-            <p:ph type="title"/>
-          </p:nvPr>
-        </p:nvSpPr>
-        <p:spPr/>
-        <p:txBody>
-          <a:bodyPr/>
-          <a:lstStyle/>
-          <a:p>
+          <p:cNvPr id="2" name="TextBox 1"/>
+          <p:cNvSpPr txBox="1"/>
+          <p:nvPr/>
+        </p:nvSpPr>
+        <p:spPr>
+          <a:xfrm>
+            <a:off x="457200" y="182880"/>
+            <a:ext cx="8229600" cy="457200"/>
+          </a:xfrm>
+          <a:prstGeom prst="rect">
+            <a:avLst/>
+          </a:prstGeom>
+          <a:noFill/>
+        </p:spPr>
+        <p:txBody>
+          <a:bodyPr wrap="none">
+            <a:spAutoFit/>
+          </a:bodyPr>
+          <a:lstStyle/>
+          <a:p>
+            <a:pPr>
+              <a:defRPr b="1" sz="2400"/>
+            </a:pPr>
             <a:r>
               <a:t>2. 매출처 등록 및 관리 (`INFO-MNG-0300`)</a:t>
             </a:r>
@@ -3540,105 +4091,424 @@
       </p:sp>
       <p:sp>
         <p:nvSpPr>
-          <p:cNvPr id="3" name="Content Placeholder 2"/>
-          <p:cNvSpPr>
-            <a:spLocks noGrp="1"/>
-          </p:cNvSpPr>
-          <p:nvPr>
-            <p:ph idx="1"/>
-          </p:nvPr>
-        </p:nvSpPr>
-        <p:spPr/>
-        <p:txBody>
-          <a:bodyPr/>
-          <a:lstStyle/>
-          <a:p/>
+          <p:cNvPr id="3" name="Rectangle 2"/>
+          <p:cNvSpPr/>
+          <p:nvPr/>
+        </p:nvSpPr>
+        <p:spPr>
+          <a:xfrm>
+            <a:off x="457200" y="914400"/>
+            <a:ext cx="3200400" cy="5029200"/>
+          </a:xfrm>
+          <a:prstGeom prst="rect">
+            <a:avLst/>
+          </a:prstGeom>
+          <a:solidFill>
+            <a:srgbClr val="F0F0F0"/>
+          </a:solidFill>
+        </p:spPr>
+        <p:style>
+          <a:lnRef idx="1">
+            <a:schemeClr val="accent1"/>
+          </a:lnRef>
+          <a:fillRef idx="3">
+            <a:schemeClr val="accent1"/>
+          </a:fillRef>
+          <a:effectRef idx="2">
+            <a:schemeClr val="accent1"/>
+          </a:effectRef>
+          <a:fontRef idx="minor">
+            <a:schemeClr val="lt1"/>
+          </a:fontRef>
+        </p:style>
+        <p:txBody>
+          <a:bodyPr rtlCol="0" anchor="ctr"/>
+          <a:lstStyle/>
+          <a:p>
+            <a:pPr algn="ctr"/>
+            <a:r>
+              <a:rPr sz="1200">
+                <a:solidFill>
+                  <a:srgbClr val="FFFFFF"/>
+                </a:solidFill>
+              </a:rPr>
+              <a:t>검색 조건 및 결과 리스트 (목록 영역)</a:t>
+            </a:r>
+          </a:p>
+          <a:p>
+            <a:pPr algn="ctr"/>
+          </a:p>
+          <a:p>
+            <a:pPr algn="ctr"/>
+            <a:r>
+              <a:rPr sz="1200">
+                <a:solidFill>
+                  <a:srgbClr val="FFFFFF"/>
+                </a:solidFill>
+              </a:rPr>
+              <a:t>[ Data Grid ]</a:t>
+            </a:r>
+          </a:p>
+        </p:txBody>
+      </p:sp>
+      <p:sp>
+        <p:nvSpPr>
+          <p:cNvPr id="4" name="Rectangle 3"/>
+          <p:cNvSpPr/>
+          <p:nvPr/>
+        </p:nvSpPr>
+        <p:spPr>
+          <a:xfrm>
+            <a:off x="4114800" y="914400"/>
+            <a:ext cx="4572000" cy="5029200"/>
+          </a:xfrm>
+          <a:prstGeom prst="rect">
+            <a:avLst/>
+          </a:prstGeom>
+          <a:solidFill>
+            <a:srgbClr val="F5F5FF"/>
+          </a:solidFill>
+        </p:spPr>
+        <p:style>
+          <a:lnRef idx="1">
+            <a:schemeClr val="accent1"/>
+          </a:lnRef>
+          <a:fillRef idx="3">
+            <a:schemeClr val="accent1"/>
+          </a:fillRef>
+          <a:effectRef idx="2">
+            <a:schemeClr val="accent1"/>
+          </a:effectRef>
+          <a:fontRef idx="minor">
+            <a:schemeClr val="lt1"/>
+          </a:fontRef>
+        </p:style>
+        <p:txBody>
+          <a:bodyPr rtlCol="0" anchor="ctr"/>
+          <a:lstStyle/>
+          <a:p>
+            <a:pPr algn="ctr"/>
+            <a:r>
+              <a:rPr sz="1200">
+                <a:solidFill>
+                  <a:srgbClr val="FFFFFF"/>
+                </a:solidFill>
+              </a:rPr>
+              <a:t>상세 정보 입력 폼 (상세 영역)</a:t>
+            </a:r>
+          </a:p>
+        </p:txBody>
+      </p:sp>
+      <p:sp>
+        <p:nvSpPr>
+          <p:cNvPr id="5" name="Rounded Rectangle 4"/>
+          <p:cNvSpPr/>
+          <p:nvPr/>
+        </p:nvSpPr>
+        <p:spPr>
+          <a:xfrm>
+            <a:off x="4389120" y="1371600"/>
+            <a:ext cx="4023360" cy="365760"/>
+          </a:xfrm>
+          <a:prstGeom prst="roundRect">
+            <a:avLst/>
+          </a:prstGeom>
+        </p:spPr>
+        <p:style>
+          <a:lnRef idx="1">
+            <a:schemeClr val="accent1"/>
+          </a:lnRef>
+          <a:fillRef idx="3">
+            <a:schemeClr val="accent1"/>
+          </a:fillRef>
+          <a:effectRef idx="2">
+            <a:schemeClr val="accent1"/>
+          </a:effectRef>
+          <a:fontRef idx="minor">
+            <a:schemeClr val="lt1"/>
+          </a:fontRef>
+        </p:style>
+        <p:txBody>
+          <a:bodyPr rtlCol="0" anchor="ctr"/>
+          <a:lstStyle/>
+          <a:p>
+            <a:pPr algn="ctr"/>
+            <a:r>
+              <a:rPr sz="1200">
+                <a:solidFill>
+                  <a:srgbClr val="000000"/>
+                </a:solidFill>
+              </a:rPr>
+              <a:t>입력 필드 1 (예: 기본 정보)</a:t>
+            </a:r>
+          </a:p>
+        </p:txBody>
+      </p:sp>
+      <p:sp>
+        <p:nvSpPr>
+          <p:cNvPr id="6" name="Rounded Rectangle 5"/>
+          <p:cNvSpPr/>
+          <p:nvPr/>
+        </p:nvSpPr>
+        <p:spPr>
+          <a:xfrm>
+            <a:off x="4389120" y="1920240"/>
+            <a:ext cx="4023360" cy="365760"/>
+          </a:xfrm>
+          <a:prstGeom prst="roundRect">
+            <a:avLst/>
+          </a:prstGeom>
+        </p:spPr>
+        <p:style>
+          <a:lnRef idx="1">
+            <a:schemeClr val="accent1"/>
+          </a:lnRef>
+          <a:fillRef idx="3">
+            <a:schemeClr val="accent1"/>
+          </a:fillRef>
+          <a:effectRef idx="2">
+            <a:schemeClr val="accent1"/>
+          </a:effectRef>
+          <a:fontRef idx="minor">
+            <a:schemeClr val="lt1"/>
+          </a:fontRef>
+        </p:style>
+        <p:txBody>
+          <a:bodyPr rtlCol="0" anchor="ctr"/>
+          <a:lstStyle/>
+          <a:p>
+            <a:pPr algn="ctr"/>
+            <a:r>
+              <a:rPr sz="1200">
+                <a:solidFill>
+                  <a:srgbClr val="000000"/>
+                </a:solidFill>
+              </a:rPr>
+              <a:t>입력 필드 2 (예: 상세 정보)</a:t>
+            </a:r>
+          </a:p>
+        </p:txBody>
+      </p:sp>
+      <p:sp>
+        <p:nvSpPr>
+          <p:cNvPr id="7" name="Rounded Rectangle 6"/>
+          <p:cNvSpPr/>
+          <p:nvPr/>
+        </p:nvSpPr>
+        <p:spPr>
+          <a:xfrm>
+            <a:off x="4389120" y="2468880"/>
+            <a:ext cx="4023360" cy="365760"/>
+          </a:xfrm>
+          <a:prstGeom prst="roundRect">
+            <a:avLst/>
+          </a:prstGeom>
+        </p:spPr>
+        <p:style>
+          <a:lnRef idx="1">
+            <a:schemeClr val="accent1"/>
+          </a:lnRef>
+          <a:fillRef idx="3">
+            <a:schemeClr val="accent1"/>
+          </a:fillRef>
+          <a:effectRef idx="2">
+            <a:schemeClr val="accent1"/>
+          </a:effectRef>
+          <a:fontRef idx="minor">
+            <a:schemeClr val="lt1"/>
+          </a:fontRef>
+        </p:style>
+        <p:txBody>
+          <a:bodyPr rtlCol="0" anchor="ctr"/>
+          <a:lstStyle/>
+          <a:p>
+            <a:pPr algn="ctr"/>
+            <a:r>
+              <a:rPr sz="1200">
+                <a:solidFill>
+                  <a:srgbClr val="000000"/>
+                </a:solidFill>
+              </a:rPr>
+              <a:t>입력 필드 3 (예: 상태/설정)</a:t>
+            </a:r>
+          </a:p>
+        </p:txBody>
+      </p:sp>
+      <p:sp>
+        <p:nvSpPr>
+          <p:cNvPr id="8" name="Rounded Rectangle 7"/>
+          <p:cNvSpPr/>
+          <p:nvPr/>
+        </p:nvSpPr>
+        <p:spPr>
+          <a:xfrm>
+            <a:off x="5943600" y="365760"/>
+            <a:ext cx="731520" cy="274320"/>
+          </a:xfrm>
+          <a:prstGeom prst="roundRect">
+            <a:avLst/>
+          </a:prstGeom>
+          <a:solidFill>
+            <a:srgbClr val="0070C0"/>
+          </a:solidFill>
+        </p:spPr>
+        <p:style>
+          <a:lnRef idx="1">
+            <a:schemeClr val="accent1"/>
+          </a:lnRef>
+          <a:fillRef idx="3">
+            <a:schemeClr val="accent1"/>
+          </a:fillRef>
+          <a:effectRef idx="2">
+            <a:schemeClr val="accent1"/>
+          </a:effectRef>
+          <a:fontRef idx="minor">
+            <a:schemeClr val="lt1"/>
+          </a:fontRef>
+        </p:style>
+        <p:txBody>
+          <a:bodyPr rtlCol="0" anchor="ctr"/>
+          <a:lstStyle/>
+          <a:p>
+            <a:pPr algn="ctr"/>
+            <a:r>
+              <a:rPr sz="1000">
+                <a:solidFill>
+                  <a:srgbClr val="FFFFFF"/>
+                </a:solidFill>
+              </a:rPr>
+              <a:t>신규</a:t>
+            </a:r>
+          </a:p>
+        </p:txBody>
+      </p:sp>
+      <p:sp>
+        <p:nvSpPr>
+          <p:cNvPr id="9" name="Rounded Rectangle 8"/>
+          <p:cNvSpPr/>
+          <p:nvPr/>
+        </p:nvSpPr>
+        <p:spPr>
+          <a:xfrm>
+            <a:off x="6858000" y="365760"/>
+            <a:ext cx="731520" cy="274320"/>
+          </a:xfrm>
+          <a:prstGeom prst="roundRect">
+            <a:avLst/>
+          </a:prstGeom>
+          <a:solidFill>
+            <a:srgbClr val="00B050"/>
+          </a:solidFill>
+        </p:spPr>
+        <p:style>
+          <a:lnRef idx="1">
+            <a:schemeClr val="accent1"/>
+          </a:lnRef>
+          <a:fillRef idx="3">
+            <a:schemeClr val="accent1"/>
+          </a:fillRef>
+          <a:effectRef idx="2">
+            <a:schemeClr val="accent1"/>
+          </a:effectRef>
+          <a:fontRef idx="minor">
+            <a:schemeClr val="lt1"/>
+          </a:fontRef>
+        </p:style>
+        <p:txBody>
+          <a:bodyPr rtlCol="0" anchor="ctr"/>
+          <a:lstStyle/>
+          <a:p>
+            <a:pPr algn="ctr"/>
+            <a:r>
+              <a:rPr sz="1000">
+                <a:solidFill>
+                  <a:srgbClr val="FFFFFF"/>
+                </a:solidFill>
+              </a:rPr>
+              <a:t>저장</a:t>
+            </a:r>
+          </a:p>
+        </p:txBody>
+      </p:sp>
+      <p:sp>
+        <p:nvSpPr>
+          <p:cNvPr id="10" name="Rounded Rectangle 9"/>
+          <p:cNvSpPr/>
+          <p:nvPr/>
+        </p:nvSpPr>
+        <p:spPr>
+          <a:xfrm>
+            <a:off x="7772400" y="365760"/>
+            <a:ext cx="731520" cy="274320"/>
+          </a:xfrm>
+          <a:prstGeom prst="roundRect">
+            <a:avLst/>
+          </a:prstGeom>
+          <a:solidFill>
+            <a:srgbClr val="FF0000"/>
+          </a:solidFill>
+        </p:spPr>
+        <p:style>
+          <a:lnRef idx="1">
+            <a:schemeClr val="accent1"/>
+          </a:lnRef>
+          <a:fillRef idx="3">
+            <a:schemeClr val="accent1"/>
+          </a:fillRef>
+          <a:effectRef idx="2">
+            <a:schemeClr val="accent1"/>
+          </a:effectRef>
+          <a:fontRef idx="minor">
+            <a:schemeClr val="lt1"/>
+          </a:fontRef>
+        </p:style>
+        <p:txBody>
+          <a:bodyPr rtlCol="0" anchor="ctr"/>
+          <a:lstStyle/>
+          <a:p>
+            <a:pPr algn="ctr"/>
+            <a:r>
+              <a:rPr sz="1000">
+                <a:solidFill>
+                  <a:srgbClr val="FFFFFF"/>
+                </a:solidFill>
+              </a:rPr>
+              <a:t>삭제</a:t>
+            </a:r>
+          </a:p>
+        </p:txBody>
+      </p:sp>
+      <p:sp>
+        <p:nvSpPr>
+          <p:cNvPr id="11" name="TextBox 10"/>
+          <p:cNvSpPr txBox="1"/>
+          <p:nvPr/>
+        </p:nvSpPr>
+        <p:spPr>
+          <a:xfrm>
+            <a:off x="457200" y="548640"/>
+            <a:ext cx="8229600" cy="365760"/>
+          </a:xfrm>
+          <a:prstGeom prst="rect">
+            <a:avLst/>
+          </a:prstGeom>
+          <a:noFill/>
+        </p:spPr>
+        <p:txBody>
+          <a:bodyPr wrap="none">
+            <a:spAutoFit/>
+          </a:bodyPr>
+          <a:lstStyle/>
           <a:p>
             <a:pPr>
-              <a:defRPr b="1" sz="1800"/>
+              <a:defRPr sz="1200">
+                <a:solidFill>
+                  <a:srgbClr val="646464"/>
+                </a:solidFill>
+              </a:defRPr>
             </a:pPr>
             <a:r>
-              <a:t>2.1. 화면 레이아웃</a:t>
-            </a:r>
-          </a:p>
-          <a:p>
-            <a:pPr lvl="1">
-              <a:defRPr sz="1400"/>
-            </a:pPr>
-            <a:r>
-              <a:t>  좌측 (목록 영역): 매출처 검색 조건 및 검색 결과 그리드 리스트</a:t>
-            </a:r>
-          </a:p>
-          <a:p>
-            <a:pPr lvl="1">
-              <a:defRPr sz="1400"/>
-            </a:pPr>
-            <a:r>
-              <a:t>  우측 (상세 영역): 선택된 매출처의 상세 정보 입력 폼</a:t>
-            </a:r>
-          </a:p>
-          <a:p>
-            <a:pPr lvl="1">
-              <a:defRPr sz="1400"/>
-            </a:pPr>
-            <a:r>
-              <a:t>  상단 (버튼 영역): `[신규]`, `[저장]`, `[삭제]`, `[변경이력 조회]`</a:t>
-            </a:r>
-          </a:p>
-          <a:p>
-            <a:pPr>
-              <a:defRPr b="1" sz="1800"/>
-            </a:pPr>
-            <a:r>
-              <a:t>2.2. 입력 항목 (상세 영역)</a:t>
-            </a:r>
-          </a:p>
-          <a:p>
-            <a:pPr lvl="1">
-              <a:defRPr sz="1400"/>
-            </a:pPr>
-            <a:r>
-              <a:t>  기본 정보: 매출처코드(자동생성), 매출처명(필수), 사업자번호(필수, 이력대상, PK사용불가), 지점코드(전자세금계산서 연동용, 4자리 숫자 등 규칙 적용), 면허번호</a:t>
-            </a:r>
-          </a:p>
-          <a:p>
-            <a:pPr lvl="1">
-              <a:defRPr sz="1400"/>
-            </a:pPr>
-            <a:r>
-              <a:t>  연락 정보: 대표자명, 영업담당자(자사 직원 드롭다운), 연락처, 이메일, 주소</a:t>
-            </a:r>
-          </a:p>
-          <a:p>
-            <a:pPr lvl="1">
-              <a:defRPr sz="1400"/>
-            </a:pPr>
-            <a:r>
-              <a:t>  상태: 사용여부 (사용/중지)</a:t>
-            </a:r>
-          </a:p>
-          <a:p>
-            <a:pPr>
-              <a:defRPr b="1" sz="1800"/>
-            </a:pPr>
-            <a:r>
-              <a:t>2.3. 주요 기능/처리 로직</a:t>
-            </a:r>
-          </a:p>
-          <a:p>
-            <a:pPr lvl="1">
-              <a:defRPr sz="1400"/>
-            </a:pPr>
-            <a:r>
-              <a:t>  매입처 등록 화면과 동일한 이력관리 저장 로직 수행.</a:t>
-            </a:r>
-          </a:p>
-          <a:p>
-            <a:pPr lvl="1">
-              <a:defRPr sz="1400"/>
-            </a:pPr>
-            <a:r>
-              <a:t>  전자세금계산서 발행 시 여기서 등록된 '사업자번호 + 지점코드'가 세금계산서 수불부 정보로 자동 맵핑됨.</a:t>
+              <a:t>주요 기능: 설계서 참조</a:t>
             </a:r>
           </a:p>
         </p:txBody>
@@ -3663,19 +4533,29 @@
       <p:grpSpPr/>
       <p:sp>
         <p:nvSpPr>
-          <p:cNvPr id="2" name="Title 1"/>
-          <p:cNvSpPr>
-            <a:spLocks noGrp="1"/>
-          </p:cNvSpPr>
-          <p:nvPr>
-            <p:ph type="title"/>
-          </p:nvPr>
-        </p:nvSpPr>
-        <p:spPr/>
-        <p:txBody>
-          <a:bodyPr/>
-          <a:lstStyle/>
-          <a:p>
+          <p:cNvPr id="2" name="TextBox 1"/>
+          <p:cNvSpPr txBox="1"/>
+          <p:nvPr/>
+        </p:nvSpPr>
+        <p:spPr>
+          <a:xfrm>
+            <a:off x="457200" y="182880"/>
+            <a:ext cx="8229600" cy="457200"/>
+          </a:xfrm>
+          <a:prstGeom prst="rect">
+            <a:avLst/>
+          </a:prstGeom>
+          <a:noFill/>
+        </p:spPr>
+        <p:txBody>
+          <a:bodyPr wrap="none">
+            <a:spAutoFit/>
+          </a:bodyPr>
+          <a:lstStyle/>
+          <a:p>
+            <a:pPr>
+              <a:defRPr b="1" sz="2400"/>
+            </a:pPr>
             <a:r>
               <a:t>3. 상품 등록 및 관리 (`INFO-MNG-0400`)</a:t>
             </a:r>
@@ -3684,153 +4564,379 @@
       </p:sp>
       <p:sp>
         <p:nvSpPr>
-          <p:cNvPr id="3" name="Content Placeholder 2"/>
-          <p:cNvSpPr>
-            <a:spLocks noGrp="1"/>
-          </p:cNvSpPr>
-          <p:nvPr>
-            <p:ph idx="1"/>
-          </p:nvPr>
-        </p:nvSpPr>
-        <p:spPr/>
-        <p:txBody>
-          <a:bodyPr/>
-          <a:lstStyle/>
-          <a:p/>
+          <p:cNvPr id="3" name="Rectangle 2"/>
+          <p:cNvSpPr/>
+          <p:nvPr/>
+        </p:nvSpPr>
+        <p:spPr>
+          <a:xfrm>
+            <a:off x="457200" y="914400"/>
+            <a:ext cx="8229600" cy="1371600"/>
+          </a:xfrm>
+          <a:prstGeom prst="rect">
+            <a:avLst/>
+          </a:prstGeom>
+          <a:solidFill>
+            <a:srgbClr val="F0F0F0"/>
+          </a:solidFill>
+        </p:spPr>
+        <p:style>
+          <a:lnRef idx="1">
+            <a:schemeClr val="accent1"/>
+          </a:lnRef>
+          <a:fillRef idx="3">
+            <a:schemeClr val="accent1"/>
+          </a:fillRef>
+          <a:effectRef idx="2">
+            <a:schemeClr val="accent1"/>
+          </a:effectRef>
+          <a:fontRef idx="minor">
+            <a:schemeClr val="lt1"/>
+          </a:fontRef>
+        </p:style>
+        <p:txBody>
+          <a:bodyPr rtlCol="0" anchor="ctr"/>
+          <a:lstStyle/>
+          <a:p>
+            <a:pPr algn="ctr"/>
+            <a:r>
+              <a:rPr sz="1200">
+                <a:solidFill>
+                  <a:srgbClr val="FFFFFF"/>
+                </a:solidFill>
+              </a:rPr>
+              <a:t>상단 영역 (검색 조건 또는 마스터 폼)</a:t>
+            </a:r>
+          </a:p>
+        </p:txBody>
+      </p:sp>
+      <p:sp>
+        <p:nvSpPr>
+          <p:cNvPr id="4" name="Rounded Rectangle 3"/>
+          <p:cNvSpPr/>
+          <p:nvPr/>
+        </p:nvSpPr>
+        <p:spPr>
+          <a:xfrm>
+            <a:off x="914400" y="1371600"/>
+            <a:ext cx="1828800" cy="274320"/>
+          </a:xfrm>
+          <a:prstGeom prst="roundRect">
+            <a:avLst/>
+          </a:prstGeom>
+        </p:spPr>
+        <p:style>
+          <a:lnRef idx="1">
+            <a:schemeClr val="accent1"/>
+          </a:lnRef>
+          <a:fillRef idx="3">
+            <a:schemeClr val="accent1"/>
+          </a:fillRef>
+          <a:effectRef idx="2">
+            <a:schemeClr val="accent1"/>
+          </a:effectRef>
+          <a:fontRef idx="minor">
+            <a:schemeClr val="lt1"/>
+          </a:fontRef>
+        </p:style>
+        <p:txBody>
+          <a:bodyPr rtlCol="0" anchor="ctr"/>
+          <a:lstStyle/>
+          <a:p>
+            <a:pPr algn="ctr"/>
+            <a:r>
+              <a:rPr sz="1200">
+                <a:solidFill>
+                  <a:srgbClr val="000000"/>
+                </a:solidFill>
+              </a:rPr>
+              <a:t>검색어/입력란 1</a:t>
+            </a:r>
+          </a:p>
+        </p:txBody>
+      </p:sp>
+      <p:sp>
+        <p:nvSpPr>
+          <p:cNvPr id="5" name="Rounded Rectangle 4"/>
+          <p:cNvSpPr/>
+          <p:nvPr/>
+        </p:nvSpPr>
+        <p:spPr>
+          <a:xfrm>
+            <a:off x="3200400" y="1371600"/>
+            <a:ext cx="1828800" cy="274320"/>
+          </a:xfrm>
+          <a:prstGeom prst="roundRect">
+            <a:avLst/>
+          </a:prstGeom>
+        </p:spPr>
+        <p:style>
+          <a:lnRef idx="1">
+            <a:schemeClr val="accent1"/>
+          </a:lnRef>
+          <a:fillRef idx="3">
+            <a:schemeClr val="accent1"/>
+          </a:fillRef>
+          <a:effectRef idx="2">
+            <a:schemeClr val="accent1"/>
+          </a:effectRef>
+          <a:fontRef idx="minor">
+            <a:schemeClr val="lt1"/>
+          </a:fontRef>
+        </p:style>
+        <p:txBody>
+          <a:bodyPr rtlCol="0" anchor="ctr"/>
+          <a:lstStyle/>
+          <a:p>
+            <a:pPr algn="ctr"/>
+            <a:r>
+              <a:rPr sz="1200">
+                <a:solidFill>
+                  <a:srgbClr val="000000"/>
+                </a:solidFill>
+              </a:rPr>
+              <a:t>검색어/입력란 2</a:t>
+            </a:r>
+          </a:p>
+        </p:txBody>
+      </p:sp>
+      <p:sp>
+        <p:nvSpPr>
+          <p:cNvPr id="6" name="Rounded Rectangle 5"/>
+          <p:cNvSpPr/>
+          <p:nvPr/>
+        </p:nvSpPr>
+        <p:spPr>
+          <a:xfrm>
+            <a:off x="6858000" y="365760"/>
+            <a:ext cx="731520" cy="274320"/>
+          </a:xfrm>
+          <a:prstGeom prst="roundRect">
+            <a:avLst/>
+          </a:prstGeom>
+          <a:solidFill>
+            <a:srgbClr val="0070C0"/>
+          </a:solidFill>
+        </p:spPr>
+        <p:style>
+          <a:lnRef idx="1">
+            <a:schemeClr val="accent1"/>
+          </a:lnRef>
+          <a:fillRef idx="3">
+            <a:schemeClr val="accent1"/>
+          </a:fillRef>
+          <a:effectRef idx="2">
+            <a:schemeClr val="accent1"/>
+          </a:effectRef>
+          <a:fontRef idx="minor">
+            <a:schemeClr val="lt1"/>
+          </a:fontRef>
+        </p:style>
+        <p:txBody>
+          <a:bodyPr rtlCol="0" anchor="ctr"/>
+          <a:lstStyle/>
+          <a:p>
+            <a:pPr algn="ctr"/>
+            <a:r>
+              <a:rPr sz="1000">
+                <a:solidFill>
+                  <a:srgbClr val="FFFFFF"/>
+                </a:solidFill>
+              </a:rPr>
+              <a:t>조회/신규</a:t>
+            </a:r>
+          </a:p>
+        </p:txBody>
+      </p:sp>
+      <p:sp>
+        <p:nvSpPr>
+          <p:cNvPr id="7" name="Rounded Rectangle 6"/>
+          <p:cNvSpPr/>
+          <p:nvPr/>
+        </p:nvSpPr>
+        <p:spPr>
+          <a:xfrm>
+            <a:off x="7772400" y="365760"/>
+            <a:ext cx="731520" cy="274320"/>
+          </a:xfrm>
+          <a:prstGeom prst="roundRect">
+            <a:avLst/>
+          </a:prstGeom>
+          <a:solidFill>
+            <a:srgbClr val="00B050"/>
+          </a:solidFill>
+        </p:spPr>
+        <p:style>
+          <a:lnRef idx="1">
+            <a:schemeClr val="accent1"/>
+          </a:lnRef>
+          <a:fillRef idx="3">
+            <a:schemeClr val="accent1"/>
+          </a:fillRef>
+          <a:effectRef idx="2">
+            <a:schemeClr val="accent1"/>
+          </a:effectRef>
+          <a:fontRef idx="minor">
+            <a:schemeClr val="lt1"/>
+          </a:fontRef>
+        </p:style>
+        <p:txBody>
+          <a:bodyPr rtlCol="0" anchor="ctr"/>
+          <a:lstStyle/>
+          <a:p>
+            <a:pPr algn="ctr"/>
+            <a:r>
+              <a:rPr sz="1000">
+                <a:solidFill>
+                  <a:srgbClr val="FFFFFF"/>
+                </a:solidFill>
+              </a:rPr>
+              <a:t>저장/저장</a:t>
+            </a:r>
+          </a:p>
+        </p:txBody>
+      </p:sp>
+      <p:sp>
+        <p:nvSpPr>
+          <p:cNvPr id="8" name="Rectangle 7"/>
+          <p:cNvSpPr/>
+          <p:nvPr/>
+        </p:nvSpPr>
+        <p:spPr>
+          <a:xfrm>
+            <a:off x="457200" y="2743200"/>
+            <a:ext cx="8229600" cy="2286000"/>
+          </a:xfrm>
+          <a:prstGeom prst="rect">
+            <a:avLst/>
+          </a:prstGeom>
+          <a:solidFill>
+            <a:srgbClr val="F5F5FF"/>
+          </a:solidFill>
+        </p:spPr>
+        <p:style>
+          <a:lnRef idx="1">
+            <a:schemeClr val="accent1"/>
+          </a:lnRef>
+          <a:fillRef idx="3">
+            <a:schemeClr val="accent1"/>
+          </a:fillRef>
+          <a:effectRef idx="2">
+            <a:schemeClr val="accent1"/>
+          </a:effectRef>
+          <a:fontRef idx="minor">
+            <a:schemeClr val="lt1"/>
+          </a:fontRef>
+        </p:style>
+        <p:txBody>
+          <a:bodyPr rtlCol="0" anchor="ctr"/>
+          <a:lstStyle/>
+          <a:p>
+            <a:pPr algn="ctr"/>
+            <a:r>
+              <a:rPr sz="1200">
+                <a:solidFill>
+                  <a:srgbClr val="FFFFFF"/>
+                </a:solidFill>
+              </a:rPr>
+              <a:t>중단 영역 (목록 리스트 또는 전표 디테일 라인)</a:t>
+            </a:r>
+          </a:p>
+          <a:p>
+            <a:pPr algn="ctr"/>
+          </a:p>
+          <a:p>
+            <a:pPr algn="ctr"/>
+            <a:r>
+              <a:rPr sz="1200">
+                <a:solidFill>
+                  <a:srgbClr val="FFFFFF"/>
+                </a:solidFill>
+              </a:rPr>
+              <a:t>[ Data Grid ]</a:t>
+            </a:r>
+          </a:p>
+        </p:txBody>
+      </p:sp>
+      <p:sp>
+        <p:nvSpPr>
+          <p:cNvPr id="9" name="Rectangle 8"/>
+          <p:cNvSpPr/>
+          <p:nvPr/>
+        </p:nvSpPr>
+        <p:spPr>
+          <a:xfrm>
+            <a:off x="457200" y="5486400"/>
+            <a:ext cx="8229600" cy="1097280"/>
+          </a:xfrm>
+          <a:prstGeom prst="rect">
+            <a:avLst/>
+          </a:prstGeom>
+          <a:solidFill>
+            <a:srgbClr val="FFF5F5"/>
+          </a:solidFill>
+        </p:spPr>
+        <p:style>
+          <a:lnRef idx="1">
+            <a:schemeClr val="accent1"/>
+          </a:lnRef>
+          <a:fillRef idx="3">
+            <a:schemeClr val="accent1"/>
+          </a:fillRef>
+          <a:effectRef idx="2">
+            <a:schemeClr val="accent1"/>
+          </a:effectRef>
+          <a:fontRef idx="minor">
+            <a:schemeClr val="lt1"/>
+          </a:fontRef>
+        </p:style>
+        <p:txBody>
+          <a:bodyPr rtlCol="0" anchor="ctr"/>
+          <a:lstStyle/>
+          <a:p>
+            <a:pPr algn="ctr"/>
+            <a:r>
+              <a:rPr sz="1200">
+                <a:solidFill>
+                  <a:srgbClr val="FFFFFF"/>
+                </a:solidFill>
+              </a:rPr>
+              <a:t>하단 영역 (상세 정보 탭 또는 합계 영역)</a:t>
+            </a:r>
+          </a:p>
+        </p:txBody>
+      </p:sp>
+      <p:sp>
+        <p:nvSpPr>
+          <p:cNvPr id="10" name="TextBox 9"/>
+          <p:cNvSpPr txBox="1"/>
+          <p:nvPr/>
+        </p:nvSpPr>
+        <p:spPr>
+          <a:xfrm>
+            <a:off x="457200" y="548640"/>
+            <a:ext cx="8229600" cy="365760"/>
+          </a:xfrm>
+          <a:prstGeom prst="rect">
+            <a:avLst/>
+          </a:prstGeom>
+          <a:noFill/>
+        </p:spPr>
+        <p:txBody>
+          <a:bodyPr wrap="none">
+            <a:spAutoFit/>
+          </a:bodyPr>
+          <a:lstStyle/>
           <a:p>
             <a:pPr>
-              <a:defRPr b="1" sz="1800"/>
+              <a:defRPr sz="1200">
+                <a:solidFill>
+                  <a:srgbClr val="646464"/>
+                </a:solidFill>
+              </a:defRPr>
             </a:pPr>
             <a:r>
-              <a:t>3.1. 화면 레이아웃</a:t>
-            </a:r>
-          </a:p>
-          <a:p>
-            <a:pPr lvl="1">
-              <a:defRPr sz="1400"/>
-            </a:pPr>
-            <a:r>
-              <a:t>  상단 (검색 영역): 분류, 상품명, 바코드, 과세여부 검색 조건</a:t>
-            </a:r>
-          </a:p>
-          <a:p>
-            <a:pPr lvl="1">
-              <a:defRPr sz="1400"/>
-            </a:pPr>
-            <a:r>
-              <a:t>  중단 (목록 영역): 검색된 상품 리스트 그리드</a:t>
-            </a:r>
-          </a:p>
-          <a:p>
-            <a:pPr lvl="1">
-              <a:defRPr sz="1400"/>
-            </a:pPr>
-            <a:r>
-              <a:t>  하단 (상세 영역): 선택된 상품의 상세 정보 및 가격 정보 입력 폼 (탭 구조: 기본정보 / 금액정보)</a:t>
-            </a:r>
-          </a:p>
-          <a:p>
-            <a:pPr lvl="1">
-              <a:defRPr sz="1400"/>
-            </a:pPr>
-            <a:r>
-              <a:t>  우측 상단 (버튼 영역): `[신규]`, `[저장]`, `[삭제]`, `[변경이력 조회]`</a:t>
-            </a:r>
-          </a:p>
-          <a:p>
-            <a:pPr>
-              <a:defRPr b="1" sz="1800"/>
-            </a:pPr>
-            <a:r>
-              <a:t>3.2. 입력 항목 (상세 영역)</a:t>
-            </a:r>
-          </a:p>
-          <a:p>
-            <a:pPr lvl="1">
-              <a:defRPr sz="1400"/>
-            </a:pPr>
-            <a:r>
-              <a:t>  [기본정보 탭]</a:t>
-            </a:r>
-          </a:p>
-          <a:p>
-            <a:pPr lvl="2">
-              <a:defRPr sz="1200"/>
-            </a:pPr>
-            <a:r>
-              <a:t>  상품코드(자동/수동), 바코드, 상품명(필수), 분류(소주, 맥주, 양주 등), 용량(ml), 알코올 도수(%)</a:t>
-            </a:r>
-          </a:p>
-          <a:p>
-            <a:pPr lvl="2">
-              <a:defRPr sz="1200"/>
-            </a:pPr>
-            <a:r>
-              <a:t>  단위: BOX, EA, 본 (드롭다운 선택)</a:t>
-            </a:r>
-          </a:p>
-          <a:p>
-            <a:pPr lvl="2">
-              <a:defRPr sz="1200"/>
-            </a:pPr>
-            <a:r>
-              <a:t>  세무 속성: 과세/면세 여부 (라디오 버튼)</a:t>
-            </a:r>
-          </a:p>
-          <a:p>
-            <a:pPr lvl="2">
-              <a:defRPr sz="1200"/>
-            </a:pPr>
-            <a:r>
-              <a:t>  부가세율: 기본값 10% 셋팅, 필요시 수정 가능토록 숫자 입력 필드 (예: 향후 세율 변경 및 특수 주류/비주류 세법 적용 시 대비)</a:t>
-            </a:r>
-          </a:p>
-          <a:p>
-            <a:pPr lvl="1">
-              <a:defRPr sz="1400"/>
-            </a:pPr>
-            <a:r>
-              <a:t>  [금액정보 탭]</a:t>
-            </a:r>
-          </a:p>
-          <a:p>
-            <a:pPr lvl="2">
-              <a:defRPr sz="1200"/>
-            </a:pPr>
-            <a:r>
-              <a:t>  매입 단가: 매입 공급가, 매입 부가세(부가세율에 따라 자동계산 및 수동수정), 매입 합계</a:t>
-            </a:r>
-          </a:p>
-          <a:p>
-            <a:pPr lvl="2">
-              <a:defRPr sz="1200"/>
-            </a:pPr>
-            <a:r>
-              <a:t>  매출 단가: 매출 공급가, 매출 부가세(부가세율에 따라 자동계산 및 수동수정), 매출 합계</a:t>
-            </a:r>
-          </a:p>
-          <a:p>
-            <a:pPr lvl="2">
-              <a:defRPr sz="1200"/>
-            </a:pPr>
-            <a:r>
-              <a:t>  공병 보증금: 1본당 공병 보증금액 입력</a:t>
-            </a:r>
-          </a:p>
-          <a:p>
-            <a:pPr>
-              <a:defRPr b="1" sz="1800"/>
-            </a:pPr>
-            <a:r>
-              <a:t>3.3. 주요 기능/처리 로직</a:t>
-            </a:r>
-          </a:p>
-          <a:p>
-            <a:pPr lvl="1">
-              <a:defRPr sz="1400"/>
-            </a:pPr>
-            <a:r>
-              <a:t>  단가 이력관리: 금액정보 탭의 데이터(매입/매출 공급가, 부가세, 합계, 공병 보증금) 수정 시 적용 시작일을 함께 입력받아, 과거 단가 기록을 보존하고 지정된 날짜부터 새 단가가 전표에 적용되도록 구현. 변경 시 이력 로그 기록.</a:t>
+              <a:t>주요 기능: 설계서 참조</a:t>
             </a:r>
           </a:p>
         </p:txBody>
@@ -3855,19 +4961,29 @@
       <p:grpSpPr/>
       <p:sp>
         <p:nvSpPr>
-          <p:cNvPr id="2" name="Title 1"/>
-          <p:cNvSpPr>
-            <a:spLocks noGrp="1"/>
-          </p:cNvSpPr>
-          <p:nvPr>
-            <p:ph type="title"/>
-          </p:nvPr>
-        </p:nvSpPr>
-        <p:spPr/>
-        <p:txBody>
-          <a:bodyPr/>
-          <a:lstStyle/>
-          <a:p>
+          <p:cNvPr id="2" name="TextBox 1"/>
+          <p:cNvSpPr txBox="1"/>
+          <p:nvPr/>
+        </p:nvSpPr>
+        <p:spPr>
+          <a:xfrm>
+            <a:off x="457200" y="182880"/>
+            <a:ext cx="8229600" cy="457200"/>
+          </a:xfrm>
+          <a:prstGeom prst="rect">
+            <a:avLst/>
+          </a:prstGeom>
+          <a:noFill/>
+        </p:spPr>
+        <p:txBody>
+          <a:bodyPr wrap="none">
+            <a:spAutoFit/>
+          </a:bodyPr>
+          <a:lstStyle/>
+          <a:p>
+            <a:pPr>
+              <a:defRPr b="1" sz="2400"/>
+            </a:pPr>
             <a:r>
               <a:t>4. 매입전표등록 (`PRCHS-SLIP-0100`)</a:t>
             </a:r>
@@ -3876,113 +4992,379 @@
       </p:sp>
       <p:sp>
         <p:nvSpPr>
-          <p:cNvPr id="3" name="Content Placeholder 2"/>
-          <p:cNvSpPr>
-            <a:spLocks noGrp="1"/>
-          </p:cNvSpPr>
-          <p:nvPr>
-            <p:ph idx="1"/>
-          </p:nvPr>
-        </p:nvSpPr>
-        <p:spPr/>
-        <p:txBody>
-          <a:bodyPr/>
-          <a:lstStyle/>
-          <a:p/>
+          <p:cNvPr id="3" name="Rectangle 2"/>
+          <p:cNvSpPr/>
+          <p:nvPr/>
+        </p:nvSpPr>
+        <p:spPr>
+          <a:xfrm>
+            <a:off x="457200" y="914400"/>
+            <a:ext cx="8229600" cy="1371600"/>
+          </a:xfrm>
+          <a:prstGeom prst="rect">
+            <a:avLst/>
+          </a:prstGeom>
+          <a:solidFill>
+            <a:srgbClr val="F0F0F0"/>
+          </a:solidFill>
+        </p:spPr>
+        <p:style>
+          <a:lnRef idx="1">
+            <a:schemeClr val="accent1"/>
+          </a:lnRef>
+          <a:fillRef idx="3">
+            <a:schemeClr val="accent1"/>
+          </a:fillRef>
+          <a:effectRef idx="2">
+            <a:schemeClr val="accent1"/>
+          </a:effectRef>
+          <a:fontRef idx="minor">
+            <a:schemeClr val="lt1"/>
+          </a:fontRef>
+        </p:style>
+        <p:txBody>
+          <a:bodyPr rtlCol="0" anchor="ctr"/>
+          <a:lstStyle/>
+          <a:p>
+            <a:pPr algn="ctr"/>
+            <a:r>
+              <a:rPr sz="1200">
+                <a:solidFill>
+                  <a:srgbClr val="FFFFFF"/>
+                </a:solidFill>
+              </a:rPr>
+              <a:t>상단 영역 (검색 조건 또는 마스터 폼)</a:t>
+            </a:r>
+          </a:p>
+        </p:txBody>
+      </p:sp>
+      <p:sp>
+        <p:nvSpPr>
+          <p:cNvPr id="4" name="Rounded Rectangle 3"/>
+          <p:cNvSpPr/>
+          <p:nvPr/>
+        </p:nvSpPr>
+        <p:spPr>
+          <a:xfrm>
+            <a:off x="914400" y="1371600"/>
+            <a:ext cx="1828800" cy="274320"/>
+          </a:xfrm>
+          <a:prstGeom prst="roundRect">
+            <a:avLst/>
+          </a:prstGeom>
+        </p:spPr>
+        <p:style>
+          <a:lnRef idx="1">
+            <a:schemeClr val="accent1"/>
+          </a:lnRef>
+          <a:fillRef idx="3">
+            <a:schemeClr val="accent1"/>
+          </a:fillRef>
+          <a:effectRef idx="2">
+            <a:schemeClr val="accent1"/>
+          </a:effectRef>
+          <a:fontRef idx="minor">
+            <a:schemeClr val="lt1"/>
+          </a:fontRef>
+        </p:style>
+        <p:txBody>
+          <a:bodyPr rtlCol="0" anchor="ctr"/>
+          <a:lstStyle/>
+          <a:p>
+            <a:pPr algn="ctr"/>
+            <a:r>
+              <a:rPr sz="1200">
+                <a:solidFill>
+                  <a:srgbClr val="000000"/>
+                </a:solidFill>
+              </a:rPr>
+              <a:t>검색어/입력란 1</a:t>
+            </a:r>
+          </a:p>
+        </p:txBody>
+      </p:sp>
+      <p:sp>
+        <p:nvSpPr>
+          <p:cNvPr id="5" name="Rounded Rectangle 4"/>
+          <p:cNvSpPr/>
+          <p:nvPr/>
+        </p:nvSpPr>
+        <p:spPr>
+          <a:xfrm>
+            <a:off x="3200400" y="1371600"/>
+            <a:ext cx="1828800" cy="274320"/>
+          </a:xfrm>
+          <a:prstGeom prst="roundRect">
+            <a:avLst/>
+          </a:prstGeom>
+        </p:spPr>
+        <p:style>
+          <a:lnRef idx="1">
+            <a:schemeClr val="accent1"/>
+          </a:lnRef>
+          <a:fillRef idx="3">
+            <a:schemeClr val="accent1"/>
+          </a:fillRef>
+          <a:effectRef idx="2">
+            <a:schemeClr val="accent1"/>
+          </a:effectRef>
+          <a:fontRef idx="minor">
+            <a:schemeClr val="lt1"/>
+          </a:fontRef>
+        </p:style>
+        <p:txBody>
+          <a:bodyPr rtlCol="0" anchor="ctr"/>
+          <a:lstStyle/>
+          <a:p>
+            <a:pPr algn="ctr"/>
+            <a:r>
+              <a:rPr sz="1200">
+                <a:solidFill>
+                  <a:srgbClr val="000000"/>
+                </a:solidFill>
+              </a:rPr>
+              <a:t>검색어/입력란 2</a:t>
+            </a:r>
+          </a:p>
+        </p:txBody>
+      </p:sp>
+      <p:sp>
+        <p:nvSpPr>
+          <p:cNvPr id="6" name="Rounded Rectangle 5"/>
+          <p:cNvSpPr/>
+          <p:nvPr/>
+        </p:nvSpPr>
+        <p:spPr>
+          <a:xfrm>
+            <a:off x="6858000" y="365760"/>
+            <a:ext cx="731520" cy="274320"/>
+          </a:xfrm>
+          <a:prstGeom prst="roundRect">
+            <a:avLst/>
+          </a:prstGeom>
+          <a:solidFill>
+            <a:srgbClr val="0070C0"/>
+          </a:solidFill>
+        </p:spPr>
+        <p:style>
+          <a:lnRef idx="1">
+            <a:schemeClr val="accent1"/>
+          </a:lnRef>
+          <a:fillRef idx="3">
+            <a:schemeClr val="accent1"/>
+          </a:fillRef>
+          <a:effectRef idx="2">
+            <a:schemeClr val="accent1"/>
+          </a:effectRef>
+          <a:fontRef idx="minor">
+            <a:schemeClr val="lt1"/>
+          </a:fontRef>
+        </p:style>
+        <p:txBody>
+          <a:bodyPr rtlCol="0" anchor="ctr"/>
+          <a:lstStyle/>
+          <a:p>
+            <a:pPr algn="ctr"/>
+            <a:r>
+              <a:rPr sz="1000">
+                <a:solidFill>
+                  <a:srgbClr val="FFFFFF"/>
+                </a:solidFill>
+              </a:rPr>
+              <a:t>조회/신규</a:t>
+            </a:r>
+          </a:p>
+        </p:txBody>
+      </p:sp>
+      <p:sp>
+        <p:nvSpPr>
+          <p:cNvPr id="7" name="Rounded Rectangle 6"/>
+          <p:cNvSpPr/>
+          <p:nvPr/>
+        </p:nvSpPr>
+        <p:spPr>
+          <a:xfrm>
+            <a:off x="7772400" y="365760"/>
+            <a:ext cx="731520" cy="274320"/>
+          </a:xfrm>
+          <a:prstGeom prst="roundRect">
+            <a:avLst/>
+          </a:prstGeom>
+          <a:solidFill>
+            <a:srgbClr val="00B050"/>
+          </a:solidFill>
+        </p:spPr>
+        <p:style>
+          <a:lnRef idx="1">
+            <a:schemeClr val="accent1"/>
+          </a:lnRef>
+          <a:fillRef idx="3">
+            <a:schemeClr val="accent1"/>
+          </a:fillRef>
+          <a:effectRef idx="2">
+            <a:schemeClr val="accent1"/>
+          </a:effectRef>
+          <a:fontRef idx="minor">
+            <a:schemeClr val="lt1"/>
+          </a:fontRef>
+        </p:style>
+        <p:txBody>
+          <a:bodyPr rtlCol="0" anchor="ctr"/>
+          <a:lstStyle/>
+          <a:p>
+            <a:pPr algn="ctr"/>
+            <a:r>
+              <a:rPr sz="1000">
+                <a:solidFill>
+                  <a:srgbClr val="FFFFFF"/>
+                </a:solidFill>
+              </a:rPr>
+              <a:t>저장/저장</a:t>
+            </a:r>
+          </a:p>
+        </p:txBody>
+      </p:sp>
+      <p:sp>
+        <p:nvSpPr>
+          <p:cNvPr id="8" name="Rectangle 7"/>
+          <p:cNvSpPr/>
+          <p:nvPr/>
+        </p:nvSpPr>
+        <p:spPr>
+          <a:xfrm>
+            <a:off x="457200" y="2743200"/>
+            <a:ext cx="8229600" cy="2286000"/>
+          </a:xfrm>
+          <a:prstGeom prst="rect">
+            <a:avLst/>
+          </a:prstGeom>
+          <a:solidFill>
+            <a:srgbClr val="F5F5FF"/>
+          </a:solidFill>
+        </p:spPr>
+        <p:style>
+          <a:lnRef idx="1">
+            <a:schemeClr val="accent1"/>
+          </a:lnRef>
+          <a:fillRef idx="3">
+            <a:schemeClr val="accent1"/>
+          </a:fillRef>
+          <a:effectRef idx="2">
+            <a:schemeClr val="accent1"/>
+          </a:effectRef>
+          <a:fontRef idx="minor">
+            <a:schemeClr val="lt1"/>
+          </a:fontRef>
+        </p:style>
+        <p:txBody>
+          <a:bodyPr rtlCol="0" anchor="ctr"/>
+          <a:lstStyle/>
+          <a:p>
+            <a:pPr algn="ctr"/>
+            <a:r>
+              <a:rPr sz="1200">
+                <a:solidFill>
+                  <a:srgbClr val="FFFFFF"/>
+                </a:solidFill>
+              </a:rPr>
+              <a:t>중단 영역 (목록 리스트 또는 전표 디테일 라인)</a:t>
+            </a:r>
+          </a:p>
+          <a:p>
+            <a:pPr algn="ctr"/>
+          </a:p>
+          <a:p>
+            <a:pPr algn="ctr"/>
+            <a:r>
+              <a:rPr sz="1200">
+                <a:solidFill>
+                  <a:srgbClr val="FFFFFF"/>
+                </a:solidFill>
+              </a:rPr>
+              <a:t>[ Data Grid ]</a:t>
+            </a:r>
+          </a:p>
+        </p:txBody>
+      </p:sp>
+      <p:sp>
+        <p:nvSpPr>
+          <p:cNvPr id="9" name="Rectangle 8"/>
+          <p:cNvSpPr/>
+          <p:nvPr/>
+        </p:nvSpPr>
+        <p:spPr>
+          <a:xfrm>
+            <a:off x="457200" y="5486400"/>
+            <a:ext cx="8229600" cy="1097280"/>
+          </a:xfrm>
+          <a:prstGeom prst="rect">
+            <a:avLst/>
+          </a:prstGeom>
+          <a:solidFill>
+            <a:srgbClr val="FFF5F5"/>
+          </a:solidFill>
+        </p:spPr>
+        <p:style>
+          <a:lnRef idx="1">
+            <a:schemeClr val="accent1"/>
+          </a:lnRef>
+          <a:fillRef idx="3">
+            <a:schemeClr val="accent1"/>
+          </a:fillRef>
+          <a:effectRef idx="2">
+            <a:schemeClr val="accent1"/>
+          </a:effectRef>
+          <a:fontRef idx="minor">
+            <a:schemeClr val="lt1"/>
+          </a:fontRef>
+        </p:style>
+        <p:txBody>
+          <a:bodyPr rtlCol="0" anchor="ctr"/>
+          <a:lstStyle/>
+          <a:p>
+            <a:pPr algn="ctr"/>
+            <a:r>
+              <a:rPr sz="1200">
+                <a:solidFill>
+                  <a:srgbClr val="FFFFFF"/>
+                </a:solidFill>
+              </a:rPr>
+              <a:t>하단 영역 (상세 정보 탭 또는 합계 영역)</a:t>
+            </a:r>
+          </a:p>
+        </p:txBody>
+      </p:sp>
+      <p:sp>
+        <p:nvSpPr>
+          <p:cNvPr id="10" name="TextBox 9"/>
+          <p:cNvSpPr txBox="1"/>
+          <p:nvPr/>
+        </p:nvSpPr>
+        <p:spPr>
+          <a:xfrm>
+            <a:off x="457200" y="548640"/>
+            <a:ext cx="8229600" cy="365760"/>
+          </a:xfrm>
+          <a:prstGeom prst="rect">
+            <a:avLst/>
+          </a:prstGeom>
+          <a:noFill/>
+        </p:spPr>
+        <p:txBody>
+          <a:bodyPr wrap="none">
+            <a:spAutoFit/>
+          </a:bodyPr>
+          <a:lstStyle/>
           <a:p>
             <a:pPr>
-              <a:defRPr b="1" sz="1800"/>
+              <a:defRPr sz="1200">
+                <a:solidFill>
+                  <a:srgbClr val="646464"/>
+                </a:solidFill>
+              </a:defRPr>
             </a:pPr>
             <a:r>
-              <a:t>4.1. 화면 레이아웃</a:t>
-            </a:r>
-          </a:p>
-          <a:p>
-            <a:pPr lvl="1">
-              <a:defRPr sz="1400"/>
-            </a:pPr>
-            <a:r>
-              <a:t>  상단 (마스터 영역): 전표일자(필수), 매입처 선택(팝업/자동완성), 담당자, 비고</a:t>
-            </a:r>
-          </a:p>
-          <a:p>
-            <a:pPr lvl="1">
-              <a:defRPr sz="1400"/>
-            </a:pPr>
-            <a:r>
-              <a:t>  중단 (디테일 영역): 입고 대상 상품 리스트 그리드 (행 추가/삭제 기능)</a:t>
-            </a:r>
-          </a:p>
-          <a:p>
-            <a:pPr lvl="1">
-              <a:defRPr sz="1400"/>
-            </a:pPr>
-            <a:r>
-              <a:t>  하단 (합계 영역): 총 매입 공급가, 총 부가세, 총 합계 금액, 할인 금액 등 계산 결과 표시</a:t>
-            </a:r>
-          </a:p>
-          <a:p>
-            <a:pPr lvl="1">
-              <a:defRPr sz="1400"/>
-            </a:pPr>
-            <a:r>
-              <a:t>  최하단 (버튼 영역): `[전표 저장]`, `[결재 상신]`</a:t>
-            </a:r>
-          </a:p>
-          <a:p>
-            <a:pPr>
-              <a:defRPr b="1" sz="1800"/>
-            </a:pPr>
-            <a:r>
-              <a:t>4.2. 주요 기능/처리 로직</a:t>
-            </a:r>
-          </a:p>
-          <a:p>
-            <a:pPr lvl="1">
-              <a:defRPr sz="1400"/>
-            </a:pPr>
-            <a:r>
-              <a:t>  상품 바코드 스캔 또는 검색을 통해 디테일 그리드에 상품 추가.</a:t>
-            </a:r>
-          </a:p>
-          <a:p>
-            <a:pPr lvl="1">
-              <a:defRPr sz="1400"/>
-            </a:pPr>
-            <a:r>
-              <a:t>  수량 입력 시 상품에 등록된 '매입 단가'를 불러와 라인별 금액 계산.</a:t>
-            </a:r>
-          </a:p>
-          <a:p>
-            <a:pPr lvl="1">
-              <a:defRPr sz="1400"/>
-            </a:pPr>
-            <a:r>
-              <a:t>  환경설정 연동 로직:</a:t>
-            </a:r>
-          </a:p>
-          <a:p>
-            <a:pPr lvl="2">
-              <a:defRPr sz="1200"/>
-            </a:pPr>
-            <a:r>
-              <a:t>  단위 부가세 계산: `STNG-MNG-0200`(매입처설정) 또는 `STNG-COM-0100`(공통설정)에 정의된 룰(절삭/절상/반올림)에 따라 계산.</a:t>
-            </a:r>
-          </a:p>
-          <a:p>
-            <a:pPr lvl="2">
-              <a:defRPr sz="1200"/>
-            </a:pPr>
-            <a:r>
-              <a:t>  상품 가격 부가세 적용 여부: 환경설정에서 지정한 '매입가격에 대한 부가세 적용' 룰을 따라 단가를 우선할지, 총액을 우선할지 연산.</a:t>
-            </a:r>
-          </a:p>
-          <a:p>
-            <a:pPr lvl="1">
-              <a:defRPr sz="1400"/>
-            </a:pPr>
-            <a:r>
-              <a:t>  저장 시 '재고 관리'에 즉시 입고(+) 반영, '채무 관리'에 해당 매입처의 외상매입금 잔액 증가 반영.</a:t>
+              <a:t>주요 기능: 입고 대상 상품 리스트 그리드 (행 추가/삭제 기능)</a:t>
             </a:r>
           </a:p>
         </p:txBody>
@@ -4007,19 +5389,29 @@
       <p:grpSpPr/>
       <p:sp>
         <p:nvSpPr>
-          <p:cNvPr id="2" name="Title 1"/>
-          <p:cNvSpPr>
-            <a:spLocks noGrp="1"/>
-          </p:cNvSpPr>
-          <p:nvPr>
-            <p:ph type="title"/>
-          </p:nvPr>
-        </p:nvSpPr>
-        <p:spPr/>
-        <p:txBody>
-          <a:bodyPr/>
-          <a:lstStyle/>
-          <a:p>
+          <p:cNvPr id="2" name="TextBox 1"/>
+          <p:cNvSpPr txBox="1"/>
+          <p:nvPr/>
+        </p:nvSpPr>
+        <p:spPr>
+          <a:xfrm>
+            <a:off x="457200" y="182880"/>
+            <a:ext cx="8229600" cy="457200"/>
+          </a:xfrm>
+          <a:prstGeom prst="rect">
+            <a:avLst/>
+          </a:prstGeom>
+          <a:noFill/>
+        </p:spPr>
+        <p:txBody>
+          <a:bodyPr wrap="none">
+            <a:spAutoFit/>
+          </a:bodyPr>
+          <a:lstStyle/>
+          <a:p>
+            <a:pPr>
+              <a:defRPr b="1" sz="2400"/>
+            </a:pPr>
             <a:r>
               <a:t>5. 매출전표등록 (`SLS-SLIP-0100`)</a:t>
             </a:r>
@@ -4028,105 +5420,379 @@
       </p:sp>
       <p:sp>
         <p:nvSpPr>
-          <p:cNvPr id="3" name="Content Placeholder 2"/>
-          <p:cNvSpPr>
-            <a:spLocks noGrp="1"/>
-          </p:cNvSpPr>
-          <p:nvPr>
-            <p:ph idx="1"/>
-          </p:nvPr>
-        </p:nvSpPr>
-        <p:spPr/>
-        <p:txBody>
-          <a:bodyPr/>
-          <a:lstStyle/>
-          <a:p/>
+          <p:cNvPr id="3" name="Rectangle 2"/>
+          <p:cNvSpPr/>
+          <p:nvPr/>
+        </p:nvSpPr>
+        <p:spPr>
+          <a:xfrm>
+            <a:off x="457200" y="914400"/>
+            <a:ext cx="8229600" cy="1371600"/>
+          </a:xfrm>
+          <a:prstGeom prst="rect">
+            <a:avLst/>
+          </a:prstGeom>
+          <a:solidFill>
+            <a:srgbClr val="F0F0F0"/>
+          </a:solidFill>
+        </p:spPr>
+        <p:style>
+          <a:lnRef idx="1">
+            <a:schemeClr val="accent1"/>
+          </a:lnRef>
+          <a:fillRef idx="3">
+            <a:schemeClr val="accent1"/>
+          </a:fillRef>
+          <a:effectRef idx="2">
+            <a:schemeClr val="accent1"/>
+          </a:effectRef>
+          <a:fontRef idx="minor">
+            <a:schemeClr val="lt1"/>
+          </a:fontRef>
+        </p:style>
+        <p:txBody>
+          <a:bodyPr rtlCol="0" anchor="ctr"/>
+          <a:lstStyle/>
+          <a:p>
+            <a:pPr algn="ctr"/>
+            <a:r>
+              <a:rPr sz="1200">
+                <a:solidFill>
+                  <a:srgbClr val="FFFFFF"/>
+                </a:solidFill>
+              </a:rPr>
+              <a:t>상단 영역 (검색 조건 또는 마스터 폼)</a:t>
+            </a:r>
+          </a:p>
+        </p:txBody>
+      </p:sp>
+      <p:sp>
+        <p:nvSpPr>
+          <p:cNvPr id="4" name="Rounded Rectangle 3"/>
+          <p:cNvSpPr/>
+          <p:nvPr/>
+        </p:nvSpPr>
+        <p:spPr>
+          <a:xfrm>
+            <a:off x="914400" y="1371600"/>
+            <a:ext cx="1828800" cy="274320"/>
+          </a:xfrm>
+          <a:prstGeom prst="roundRect">
+            <a:avLst/>
+          </a:prstGeom>
+        </p:spPr>
+        <p:style>
+          <a:lnRef idx="1">
+            <a:schemeClr val="accent1"/>
+          </a:lnRef>
+          <a:fillRef idx="3">
+            <a:schemeClr val="accent1"/>
+          </a:fillRef>
+          <a:effectRef idx="2">
+            <a:schemeClr val="accent1"/>
+          </a:effectRef>
+          <a:fontRef idx="minor">
+            <a:schemeClr val="lt1"/>
+          </a:fontRef>
+        </p:style>
+        <p:txBody>
+          <a:bodyPr rtlCol="0" anchor="ctr"/>
+          <a:lstStyle/>
+          <a:p>
+            <a:pPr algn="ctr"/>
+            <a:r>
+              <a:rPr sz="1200">
+                <a:solidFill>
+                  <a:srgbClr val="000000"/>
+                </a:solidFill>
+              </a:rPr>
+              <a:t>검색어/입력란 1</a:t>
+            </a:r>
+          </a:p>
+        </p:txBody>
+      </p:sp>
+      <p:sp>
+        <p:nvSpPr>
+          <p:cNvPr id="5" name="Rounded Rectangle 4"/>
+          <p:cNvSpPr/>
+          <p:nvPr/>
+        </p:nvSpPr>
+        <p:spPr>
+          <a:xfrm>
+            <a:off x="3200400" y="1371600"/>
+            <a:ext cx="1828800" cy="274320"/>
+          </a:xfrm>
+          <a:prstGeom prst="roundRect">
+            <a:avLst/>
+          </a:prstGeom>
+        </p:spPr>
+        <p:style>
+          <a:lnRef idx="1">
+            <a:schemeClr val="accent1"/>
+          </a:lnRef>
+          <a:fillRef idx="3">
+            <a:schemeClr val="accent1"/>
+          </a:fillRef>
+          <a:effectRef idx="2">
+            <a:schemeClr val="accent1"/>
+          </a:effectRef>
+          <a:fontRef idx="minor">
+            <a:schemeClr val="lt1"/>
+          </a:fontRef>
+        </p:style>
+        <p:txBody>
+          <a:bodyPr rtlCol="0" anchor="ctr"/>
+          <a:lstStyle/>
+          <a:p>
+            <a:pPr algn="ctr"/>
+            <a:r>
+              <a:rPr sz="1200">
+                <a:solidFill>
+                  <a:srgbClr val="000000"/>
+                </a:solidFill>
+              </a:rPr>
+              <a:t>검색어/입력란 2</a:t>
+            </a:r>
+          </a:p>
+        </p:txBody>
+      </p:sp>
+      <p:sp>
+        <p:nvSpPr>
+          <p:cNvPr id="6" name="Rounded Rectangle 5"/>
+          <p:cNvSpPr/>
+          <p:nvPr/>
+        </p:nvSpPr>
+        <p:spPr>
+          <a:xfrm>
+            <a:off x="6858000" y="365760"/>
+            <a:ext cx="731520" cy="274320"/>
+          </a:xfrm>
+          <a:prstGeom prst="roundRect">
+            <a:avLst/>
+          </a:prstGeom>
+          <a:solidFill>
+            <a:srgbClr val="0070C0"/>
+          </a:solidFill>
+        </p:spPr>
+        <p:style>
+          <a:lnRef idx="1">
+            <a:schemeClr val="accent1"/>
+          </a:lnRef>
+          <a:fillRef idx="3">
+            <a:schemeClr val="accent1"/>
+          </a:fillRef>
+          <a:effectRef idx="2">
+            <a:schemeClr val="accent1"/>
+          </a:effectRef>
+          <a:fontRef idx="minor">
+            <a:schemeClr val="lt1"/>
+          </a:fontRef>
+        </p:style>
+        <p:txBody>
+          <a:bodyPr rtlCol="0" anchor="ctr"/>
+          <a:lstStyle/>
+          <a:p>
+            <a:pPr algn="ctr"/>
+            <a:r>
+              <a:rPr sz="1000">
+                <a:solidFill>
+                  <a:srgbClr val="FFFFFF"/>
+                </a:solidFill>
+              </a:rPr>
+              <a:t>조회/신규</a:t>
+            </a:r>
+          </a:p>
+        </p:txBody>
+      </p:sp>
+      <p:sp>
+        <p:nvSpPr>
+          <p:cNvPr id="7" name="Rounded Rectangle 6"/>
+          <p:cNvSpPr/>
+          <p:nvPr/>
+        </p:nvSpPr>
+        <p:spPr>
+          <a:xfrm>
+            <a:off x="7772400" y="365760"/>
+            <a:ext cx="731520" cy="274320"/>
+          </a:xfrm>
+          <a:prstGeom prst="roundRect">
+            <a:avLst/>
+          </a:prstGeom>
+          <a:solidFill>
+            <a:srgbClr val="00B050"/>
+          </a:solidFill>
+        </p:spPr>
+        <p:style>
+          <a:lnRef idx="1">
+            <a:schemeClr val="accent1"/>
+          </a:lnRef>
+          <a:fillRef idx="3">
+            <a:schemeClr val="accent1"/>
+          </a:fillRef>
+          <a:effectRef idx="2">
+            <a:schemeClr val="accent1"/>
+          </a:effectRef>
+          <a:fontRef idx="minor">
+            <a:schemeClr val="lt1"/>
+          </a:fontRef>
+        </p:style>
+        <p:txBody>
+          <a:bodyPr rtlCol="0" anchor="ctr"/>
+          <a:lstStyle/>
+          <a:p>
+            <a:pPr algn="ctr"/>
+            <a:r>
+              <a:rPr sz="1000">
+                <a:solidFill>
+                  <a:srgbClr val="FFFFFF"/>
+                </a:solidFill>
+              </a:rPr>
+              <a:t>저장/저장</a:t>
+            </a:r>
+          </a:p>
+        </p:txBody>
+      </p:sp>
+      <p:sp>
+        <p:nvSpPr>
+          <p:cNvPr id="8" name="Rectangle 7"/>
+          <p:cNvSpPr/>
+          <p:nvPr/>
+        </p:nvSpPr>
+        <p:spPr>
+          <a:xfrm>
+            <a:off x="457200" y="2743200"/>
+            <a:ext cx="8229600" cy="2286000"/>
+          </a:xfrm>
+          <a:prstGeom prst="rect">
+            <a:avLst/>
+          </a:prstGeom>
+          <a:solidFill>
+            <a:srgbClr val="F5F5FF"/>
+          </a:solidFill>
+        </p:spPr>
+        <p:style>
+          <a:lnRef idx="1">
+            <a:schemeClr val="accent1"/>
+          </a:lnRef>
+          <a:fillRef idx="3">
+            <a:schemeClr val="accent1"/>
+          </a:fillRef>
+          <a:effectRef idx="2">
+            <a:schemeClr val="accent1"/>
+          </a:effectRef>
+          <a:fontRef idx="minor">
+            <a:schemeClr val="lt1"/>
+          </a:fontRef>
+        </p:style>
+        <p:txBody>
+          <a:bodyPr rtlCol="0" anchor="ctr"/>
+          <a:lstStyle/>
+          <a:p>
+            <a:pPr algn="ctr"/>
+            <a:r>
+              <a:rPr sz="1200">
+                <a:solidFill>
+                  <a:srgbClr val="FFFFFF"/>
+                </a:solidFill>
+              </a:rPr>
+              <a:t>중단 영역 (목록 리스트 또는 전표 디테일 라인)</a:t>
+            </a:r>
+          </a:p>
+          <a:p>
+            <a:pPr algn="ctr"/>
+          </a:p>
+          <a:p>
+            <a:pPr algn="ctr"/>
+            <a:r>
+              <a:rPr sz="1200">
+                <a:solidFill>
+                  <a:srgbClr val="FFFFFF"/>
+                </a:solidFill>
+              </a:rPr>
+              <a:t>[ Data Grid ]</a:t>
+            </a:r>
+          </a:p>
+        </p:txBody>
+      </p:sp>
+      <p:sp>
+        <p:nvSpPr>
+          <p:cNvPr id="9" name="Rectangle 8"/>
+          <p:cNvSpPr/>
+          <p:nvPr/>
+        </p:nvSpPr>
+        <p:spPr>
+          <a:xfrm>
+            <a:off x="457200" y="5486400"/>
+            <a:ext cx="8229600" cy="1097280"/>
+          </a:xfrm>
+          <a:prstGeom prst="rect">
+            <a:avLst/>
+          </a:prstGeom>
+          <a:solidFill>
+            <a:srgbClr val="FFF5F5"/>
+          </a:solidFill>
+        </p:spPr>
+        <p:style>
+          <a:lnRef idx="1">
+            <a:schemeClr val="accent1"/>
+          </a:lnRef>
+          <a:fillRef idx="3">
+            <a:schemeClr val="accent1"/>
+          </a:fillRef>
+          <a:effectRef idx="2">
+            <a:schemeClr val="accent1"/>
+          </a:effectRef>
+          <a:fontRef idx="minor">
+            <a:schemeClr val="lt1"/>
+          </a:fontRef>
+        </p:style>
+        <p:txBody>
+          <a:bodyPr rtlCol="0" anchor="ctr"/>
+          <a:lstStyle/>
+          <a:p>
+            <a:pPr algn="ctr"/>
+            <a:r>
+              <a:rPr sz="1200">
+                <a:solidFill>
+                  <a:srgbClr val="FFFFFF"/>
+                </a:solidFill>
+              </a:rPr>
+              <a:t>하단 영역 (상세 정보 탭 또는 합계 영역)</a:t>
+            </a:r>
+          </a:p>
+        </p:txBody>
+      </p:sp>
+      <p:sp>
+        <p:nvSpPr>
+          <p:cNvPr id="10" name="TextBox 9"/>
+          <p:cNvSpPr txBox="1"/>
+          <p:nvPr/>
+        </p:nvSpPr>
+        <p:spPr>
+          <a:xfrm>
+            <a:off x="457200" y="548640"/>
+            <a:ext cx="8229600" cy="365760"/>
+          </a:xfrm>
+          <a:prstGeom prst="rect">
+            <a:avLst/>
+          </a:prstGeom>
+          <a:noFill/>
+        </p:spPr>
+        <p:txBody>
+          <a:bodyPr wrap="none">
+            <a:spAutoFit/>
+          </a:bodyPr>
+          <a:lstStyle/>
           <a:p>
             <a:pPr>
-              <a:defRPr b="1" sz="1800"/>
+              <a:defRPr sz="1200">
+                <a:solidFill>
+                  <a:srgbClr val="646464"/>
+                </a:solidFill>
+              </a:defRPr>
             </a:pPr>
             <a:r>
-              <a:t>5.1. 화면 레이아웃</a:t>
-            </a:r>
-          </a:p>
-          <a:p>
-            <a:pPr lvl="1">
-              <a:defRPr sz="1400"/>
-            </a:pPr>
-            <a:r>
-              <a:t>  상단 (마스터 영역): 전표일자(필수), 거래유형(`일반매출` / `자사소비` 라디오버튼 선택), 매출처 선택, 영업담당자, 비고</a:t>
-            </a:r>
-          </a:p>
-          <a:p>
-            <a:pPr lvl="1">
-              <a:defRPr sz="1400"/>
-            </a:pPr>
-            <a:r>
-              <a:t>  중단 (디테일 영역): 출고/소비 대상 상품 리스트 그리드 (행 추가/삭제 기능)</a:t>
-            </a:r>
-          </a:p>
-          <a:p>
-            <a:pPr lvl="1">
-              <a:defRPr sz="1400"/>
-            </a:pPr>
-            <a:r>
-              <a:t>  하단 (합계 영역): 총 매출 공급가, 총 부가세, 공병 보증금 합계, 총 합계 금액 표시</a:t>
-            </a:r>
-          </a:p>
-          <a:p>
-            <a:pPr lvl="1">
-              <a:defRPr sz="1400"/>
-            </a:pPr>
-            <a:r>
-              <a:t>  최하단 (버튼 영역): `[전표 저장]`, `[명세서 인쇄]`</a:t>
-            </a:r>
-          </a:p>
-          <a:p>
-            <a:pPr>
-              <a:defRPr b="1" sz="1800"/>
-            </a:pPr>
-            <a:r>
-              <a:t>5.2. 주요 기능/처리 로직</a:t>
-            </a:r>
-          </a:p>
-          <a:p>
-            <a:pPr lvl="1">
-              <a:defRPr sz="1400"/>
-            </a:pPr>
-            <a:r>
-              <a:t>  거래유형별 분기 처리:</a:t>
-            </a:r>
-          </a:p>
-          <a:p>
-            <a:pPr lvl="2">
-              <a:defRPr sz="1200"/>
-            </a:pPr>
-            <a:r>
-              <a:t>  일반매출: 매출 수익 인식. 단가는 상품의 '매출 단가' 적용. 저장 시 매출처 미수금(+) 증가 반영.</a:t>
-            </a:r>
-          </a:p>
-          <a:p>
-            <a:pPr lvl="2">
-              <a:defRPr sz="1200"/>
-            </a:pPr>
-            <a:r>
-              <a:t>  자사소비: 사내 행사, 접대, 시음용 등 내부 소비 목적. 매출처 선택 비활성화(자사로 고정). 미수금을 발생시키지 않고(회계상 비용/잡손실 처리), 재고만 출고(-) 차감 처리함.</a:t>
-            </a:r>
-          </a:p>
-          <a:p>
-            <a:pPr lvl="1">
-              <a:defRPr sz="1400"/>
-            </a:pPr>
-            <a:r>
-              <a:t>  선입선출(FIFO) 로직: 환경설정의 선입선출 여부가 '사용'일 경우, 저장 시 출고 수량만큼 오래된 매입단가(재고 Lot)부터 순차적으로 차감하여 매출 원가 계산 및 이력 반영.</a:t>
-            </a:r>
-          </a:p>
-          <a:p>
-            <a:pPr lvl="1">
-              <a:defRPr sz="1400"/>
-            </a:pPr>
-            <a:r>
-              <a:t>  환경설정 연동 로직: `STNG-MNG-0300` 또는 `STNG-COM-0100`에 정의된 단위 부가세 및 합계 금액 라운딩 룰(절삭/절상/반올림) 적용.</a:t>
+              <a:t>주요 기능: 출고/소비 대상 상품 리스트 그리드 (행 추가/삭제 기능)</a:t>
             </a:r>
           </a:p>
         </p:txBody>
@@ -4151,19 +5817,29 @@
       <p:grpSpPr/>
       <p:sp>
         <p:nvSpPr>
-          <p:cNvPr id="2" name="Title 1"/>
-          <p:cNvSpPr>
-            <a:spLocks noGrp="1"/>
-          </p:cNvSpPr>
-          <p:nvPr>
-            <p:ph type="title"/>
-          </p:nvPr>
-        </p:nvSpPr>
-        <p:spPr/>
-        <p:txBody>
-          <a:bodyPr/>
-          <a:lstStyle/>
-          <a:p>
+          <p:cNvPr id="2" name="TextBox 1"/>
+          <p:cNvSpPr txBox="1"/>
+          <p:nvPr/>
+        </p:nvSpPr>
+        <p:spPr>
+          <a:xfrm>
+            <a:off x="457200" y="182880"/>
+            <a:ext cx="8229600" cy="457200"/>
+          </a:xfrm>
+          <a:prstGeom prst="rect">
+            <a:avLst/>
+          </a:prstGeom>
+          <a:noFill/>
+        </p:spPr>
+        <p:txBody>
+          <a:bodyPr wrap="none">
+            <a:spAutoFit/>
+          </a:bodyPr>
+          <a:lstStyle/>
+          <a:p>
+            <a:pPr>
+              <a:defRPr b="1" sz="2400"/>
+            </a:pPr>
             <a:r>
               <a:t>6. 일/월 마감 관리 (`DDLN-MNG-0100`)</a:t>
             </a:r>
@@ -4172,89 +5848,379 @@
       </p:sp>
       <p:sp>
         <p:nvSpPr>
-          <p:cNvPr id="3" name="Content Placeholder 2"/>
-          <p:cNvSpPr>
-            <a:spLocks noGrp="1"/>
-          </p:cNvSpPr>
-          <p:nvPr>
-            <p:ph idx="1"/>
-          </p:nvPr>
-        </p:nvSpPr>
-        <p:spPr/>
-        <p:txBody>
-          <a:bodyPr/>
-          <a:lstStyle/>
-          <a:p/>
+          <p:cNvPr id="3" name="Rectangle 2"/>
+          <p:cNvSpPr/>
+          <p:nvPr/>
+        </p:nvSpPr>
+        <p:spPr>
+          <a:xfrm>
+            <a:off x="457200" y="914400"/>
+            <a:ext cx="8229600" cy="1371600"/>
+          </a:xfrm>
+          <a:prstGeom prst="rect">
+            <a:avLst/>
+          </a:prstGeom>
+          <a:solidFill>
+            <a:srgbClr val="F0F0F0"/>
+          </a:solidFill>
+        </p:spPr>
+        <p:style>
+          <a:lnRef idx="1">
+            <a:schemeClr val="accent1"/>
+          </a:lnRef>
+          <a:fillRef idx="3">
+            <a:schemeClr val="accent1"/>
+          </a:fillRef>
+          <a:effectRef idx="2">
+            <a:schemeClr val="accent1"/>
+          </a:effectRef>
+          <a:fontRef idx="minor">
+            <a:schemeClr val="lt1"/>
+          </a:fontRef>
+        </p:style>
+        <p:txBody>
+          <a:bodyPr rtlCol="0" anchor="ctr"/>
+          <a:lstStyle/>
+          <a:p>
+            <a:pPr algn="ctr"/>
+            <a:r>
+              <a:rPr sz="1200">
+                <a:solidFill>
+                  <a:srgbClr val="FFFFFF"/>
+                </a:solidFill>
+              </a:rPr>
+              <a:t>상단 영역 (검색 조건 또는 마스터 폼)</a:t>
+            </a:r>
+          </a:p>
+        </p:txBody>
+      </p:sp>
+      <p:sp>
+        <p:nvSpPr>
+          <p:cNvPr id="4" name="Rounded Rectangle 3"/>
+          <p:cNvSpPr/>
+          <p:nvPr/>
+        </p:nvSpPr>
+        <p:spPr>
+          <a:xfrm>
+            <a:off x="914400" y="1371600"/>
+            <a:ext cx="1828800" cy="274320"/>
+          </a:xfrm>
+          <a:prstGeom prst="roundRect">
+            <a:avLst/>
+          </a:prstGeom>
+        </p:spPr>
+        <p:style>
+          <a:lnRef idx="1">
+            <a:schemeClr val="accent1"/>
+          </a:lnRef>
+          <a:fillRef idx="3">
+            <a:schemeClr val="accent1"/>
+          </a:fillRef>
+          <a:effectRef idx="2">
+            <a:schemeClr val="accent1"/>
+          </a:effectRef>
+          <a:fontRef idx="minor">
+            <a:schemeClr val="lt1"/>
+          </a:fontRef>
+        </p:style>
+        <p:txBody>
+          <a:bodyPr rtlCol="0" anchor="ctr"/>
+          <a:lstStyle/>
+          <a:p>
+            <a:pPr algn="ctr"/>
+            <a:r>
+              <a:rPr sz="1200">
+                <a:solidFill>
+                  <a:srgbClr val="000000"/>
+                </a:solidFill>
+              </a:rPr>
+              <a:t>검색어/입력란 1</a:t>
+            </a:r>
+          </a:p>
+        </p:txBody>
+      </p:sp>
+      <p:sp>
+        <p:nvSpPr>
+          <p:cNvPr id="5" name="Rounded Rectangle 4"/>
+          <p:cNvSpPr/>
+          <p:nvPr/>
+        </p:nvSpPr>
+        <p:spPr>
+          <a:xfrm>
+            <a:off x="3200400" y="1371600"/>
+            <a:ext cx="1828800" cy="274320"/>
+          </a:xfrm>
+          <a:prstGeom prst="roundRect">
+            <a:avLst/>
+          </a:prstGeom>
+        </p:spPr>
+        <p:style>
+          <a:lnRef idx="1">
+            <a:schemeClr val="accent1"/>
+          </a:lnRef>
+          <a:fillRef idx="3">
+            <a:schemeClr val="accent1"/>
+          </a:fillRef>
+          <a:effectRef idx="2">
+            <a:schemeClr val="accent1"/>
+          </a:effectRef>
+          <a:fontRef idx="minor">
+            <a:schemeClr val="lt1"/>
+          </a:fontRef>
+        </p:style>
+        <p:txBody>
+          <a:bodyPr rtlCol="0" anchor="ctr"/>
+          <a:lstStyle/>
+          <a:p>
+            <a:pPr algn="ctr"/>
+            <a:r>
+              <a:rPr sz="1200">
+                <a:solidFill>
+                  <a:srgbClr val="000000"/>
+                </a:solidFill>
+              </a:rPr>
+              <a:t>검색어/입력란 2</a:t>
+            </a:r>
+          </a:p>
+        </p:txBody>
+      </p:sp>
+      <p:sp>
+        <p:nvSpPr>
+          <p:cNvPr id="6" name="Rounded Rectangle 5"/>
+          <p:cNvSpPr/>
+          <p:nvPr/>
+        </p:nvSpPr>
+        <p:spPr>
+          <a:xfrm>
+            <a:off x="6858000" y="365760"/>
+            <a:ext cx="731520" cy="274320"/>
+          </a:xfrm>
+          <a:prstGeom prst="roundRect">
+            <a:avLst/>
+          </a:prstGeom>
+          <a:solidFill>
+            <a:srgbClr val="0070C0"/>
+          </a:solidFill>
+        </p:spPr>
+        <p:style>
+          <a:lnRef idx="1">
+            <a:schemeClr val="accent1"/>
+          </a:lnRef>
+          <a:fillRef idx="3">
+            <a:schemeClr val="accent1"/>
+          </a:fillRef>
+          <a:effectRef idx="2">
+            <a:schemeClr val="accent1"/>
+          </a:effectRef>
+          <a:fontRef idx="minor">
+            <a:schemeClr val="lt1"/>
+          </a:fontRef>
+        </p:style>
+        <p:txBody>
+          <a:bodyPr rtlCol="0" anchor="ctr"/>
+          <a:lstStyle/>
+          <a:p>
+            <a:pPr algn="ctr"/>
+            <a:r>
+              <a:rPr sz="1000">
+                <a:solidFill>
+                  <a:srgbClr val="FFFFFF"/>
+                </a:solidFill>
+              </a:rPr>
+              <a:t>조회/신규</a:t>
+            </a:r>
+          </a:p>
+        </p:txBody>
+      </p:sp>
+      <p:sp>
+        <p:nvSpPr>
+          <p:cNvPr id="7" name="Rounded Rectangle 6"/>
+          <p:cNvSpPr/>
+          <p:nvPr/>
+        </p:nvSpPr>
+        <p:spPr>
+          <a:xfrm>
+            <a:off x="7772400" y="365760"/>
+            <a:ext cx="731520" cy="274320"/>
+          </a:xfrm>
+          <a:prstGeom prst="roundRect">
+            <a:avLst/>
+          </a:prstGeom>
+          <a:solidFill>
+            <a:srgbClr val="00B050"/>
+          </a:solidFill>
+        </p:spPr>
+        <p:style>
+          <a:lnRef idx="1">
+            <a:schemeClr val="accent1"/>
+          </a:lnRef>
+          <a:fillRef idx="3">
+            <a:schemeClr val="accent1"/>
+          </a:fillRef>
+          <a:effectRef idx="2">
+            <a:schemeClr val="accent1"/>
+          </a:effectRef>
+          <a:fontRef idx="minor">
+            <a:schemeClr val="lt1"/>
+          </a:fontRef>
+        </p:style>
+        <p:txBody>
+          <a:bodyPr rtlCol="0" anchor="ctr"/>
+          <a:lstStyle/>
+          <a:p>
+            <a:pPr algn="ctr"/>
+            <a:r>
+              <a:rPr sz="1000">
+                <a:solidFill>
+                  <a:srgbClr val="FFFFFF"/>
+                </a:solidFill>
+              </a:rPr>
+              <a:t>저장/저장</a:t>
+            </a:r>
+          </a:p>
+        </p:txBody>
+      </p:sp>
+      <p:sp>
+        <p:nvSpPr>
+          <p:cNvPr id="8" name="Rectangle 7"/>
+          <p:cNvSpPr/>
+          <p:nvPr/>
+        </p:nvSpPr>
+        <p:spPr>
+          <a:xfrm>
+            <a:off x="457200" y="2743200"/>
+            <a:ext cx="8229600" cy="2286000"/>
+          </a:xfrm>
+          <a:prstGeom prst="rect">
+            <a:avLst/>
+          </a:prstGeom>
+          <a:solidFill>
+            <a:srgbClr val="F5F5FF"/>
+          </a:solidFill>
+        </p:spPr>
+        <p:style>
+          <a:lnRef idx="1">
+            <a:schemeClr val="accent1"/>
+          </a:lnRef>
+          <a:fillRef idx="3">
+            <a:schemeClr val="accent1"/>
+          </a:fillRef>
+          <a:effectRef idx="2">
+            <a:schemeClr val="accent1"/>
+          </a:effectRef>
+          <a:fontRef idx="minor">
+            <a:schemeClr val="lt1"/>
+          </a:fontRef>
+        </p:style>
+        <p:txBody>
+          <a:bodyPr rtlCol="0" anchor="ctr"/>
+          <a:lstStyle/>
+          <a:p>
+            <a:pPr algn="ctr"/>
+            <a:r>
+              <a:rPr sz="1200">
+                <a:solidFill>
+                  <a:srgbClr val="FFFFFF"/>
+                </a:solidFill>
+              </a:rPr>
+              <a:t>중단 영역 (목록 리스트 또는 전표 디테일 라인)</a:t>
+            </a:r>
+          </a:p>
+          <a:p>
+            <a:pPr algn="ctr"/>
+          </a:p>
+          <a:p>
+            <a:pPr algn="ctr"/>
+            <a:r>
+              <a:rPr sz="1200">
+                <a:solidFill>
+                  <a:srgbClr val="FFFFFF"/>
+                </a:solidFill>
+              </a:rPr>
+              <a:t>[ Data Grid ]</a:t>
+            </a:r>
+          </a:p>
+        </p:txBody>
+      </p:sp>
+      <p:sp>
+        <p:nvSpPr>
+          <p:cNvPr id="9" name="Rectangle 8"/>
+          <p:cNvSpPr/>
+          <p:nvPr/>
+        </p:nvSpPr>
+        <p:spPr>
+          <a:xfrm>
+            <a:off x="457200" y="5486400"/>
+            <a:ext cx="8229600" cy="1097280"/>
+          </a:xfrm>
+          <a:prstGeom prst="rect">
+            <a:avLst/>
+          </a:prstGeom>
+          <a:solidFill>
+            <a:srgbClr val="FFF5F5"/>
+          </a:solidFill>
+        </p:spPr>
+        <p:style>
+          <a:lnRef idx="1">
+            <a:schemeClr val="accent1"/>
+          </a:lnRef>
+          <a:fillRef idx="3">
+            <a:schemeClr val="accent1"/>
+          </a:fillRef>
+          <a:effectRef idx="2">
+            <a:schemeClr val="accent1"/>
+          </a:effectRef>
+          <a:fontRef idx="minor">
+            <a:schemeClr val="lt1"/>
+          </a:fontRef>
+        </p:style>
+        <p:txBody>
+          <a:bodyPr rtlCol="0" anchor="ctr"/>
+          <a:lstStyle/>
+          <a:p>
+            <a:pPr algn="ctr"/>
+            <a:r>
+              <a:rPr sz="1200">
+                <a:solidFill>
+                  <a:srgbClr val="FFFFFF"/>
+                </a:solidFill>
+              </a:rPr>
+              <a:t>하단 영역 (상세 정보 탭 또는 합계 영역)</a:t>
+            </a:r>
+          </a:p>
+        </p:txBody>
+      </p:sp>
+      <p:sp>
+        <p:nvSpPr>
+          <p:cNvPr id="10" name="TextBox 9"/>
+          <p:cNvSpPr txBox="1"/>
+          <p:nvPr/>
+        </p:nvSpPr>
+        <p:spPr>
+          <a:xfrm>
+            <a:off x="457200" y="548640"/>
+            <a:ext cx="8229600" cy="365760"/>
+          </a:xfrm>
+          <a:prstGeom prst="rect">
+            <a:avLst/>
+          </a:prstGeom>
+          <a:noFill/>
+        </p:spPr>
+        <p:txBody>
+          <a:bodyPr wrap="none">
+            <a:spAutoFit/>
+          </a:bodyPr>
+          <a:lstStyle/>
           <a:p>
             <a:pPr>
-              <a:defRPr b="1" sz="1800"/>
+              <a:defRPr sz="1200">
+                <a:solidFill>
+                  <a:srgbClr val="646464"/>
+                </a:solidFill>
+              </a:defRPr>
             </a:pPr>
             <a:r>
-              <a:t>6.1. 화면 레이아웃</a:t>
-            </a:r>
-          </a:p>
-          <a:p>
-            <a:pPr lvl="1">
-              <a:defRPr sz="1400"/>
-            </a:pPr>
-            <a:r>
-              <a:t>  상단 (마스터 영역): 마감 연월(혹은 일자) 선택, 마감 대상 모듈(전체/매입/매출/수불 등) 선택, 조회 버튼</a:t>
-            </a:r>
-          </a:p>
-          <a:p>
-            <a:pPr lvl="1">
-              <a:defRPr sz="1400"/>
-            </a:pPr>
-            <a:r>
-              <a:t>  중단 (현황 그리드): 해당 기간의 처리 건수 및 금액(총 매입, 총 매출, 미수금, 미지급금 등) 요약 정보</a:t>
-            </a:r>
-          </a:p>
-          <a:p>
-            <a:pPr lvl="1">
-              <a:defRPr sz="1400"/>
-            </a:pPr>
-            <a:r>
-              <a:t>  하단 (버튼 영역): `[마감 처리]`, `[마감 취소]`</a:t>
-            </a:r>
-          </a:p>
-          <a:p>
-            <a:pPr>
-              <a:defRPr b="1" sz="1800"/>
-            </a:pPr>
-            <a:r>
-              <a:t>6.2. 주요 기능/처리 로직</a:t>
-            </a:r>
-          </a:p>
-          <a:p>
-            <a:pPr lvl="1">
-              <a:defRPr sz="1400"/>
-            </a:pPr>
-            <a:r>
-              <a:t>  마감 처리(Locking): </a:t>
-            </a:r>
-          </a:p>
-          <a:p>
-            <a:pPr lvl="2">
-              <a:defRPr sz="1200"/>
-            </a:pPr>
-            <a:r>
-              <a:t>  마감이 실행되면, 선택된 기준일자(마감일) 이전의 모든 매입전표, 매출전표, 채무/채권 발생 및 물류 수불 데이터의 상태가 '마감'으로 변경됨.</a:t>
-            </a:r>
-          </a:p>
-          <a:p>
-            <a:pPr lvl="2">
-              <a:defRPr sz="1200"/>
-            </a:pPr>
-            <a:r>
-              <a:t>  마감된 일자에 대해서는 어떠한 화면에서도 신규 등록, 데이터 수정, 삭제 작업이 원천 차단됨.</a:t>
-            </a:r>
-          </a:p>
-          <a:p>
-            <a:pPr lvl="1">
-              <a:defRPr sz="1400"/>
-            </a:pPr>
-            <a:r>
-              <a:t>  무결성 검증: 마감 실행 전 처리되지 않은 임시 전표나 수불 데이터의 에러(예: 재고 마이너스 상태 등)가 있는지 사전 검증하여 경고창 표출.</a:t>
+              <a:t>주요 기능: 설계서 참조</a:t>
             </a:r>
           </a:p>
         </p:txBody>
@@ -4279,19 +6245,29 @@
       <p:grpSpPr/>
       <p:sp>
         <p:nvSpPr>
-          <p:cNvPr id="2" name="Title 1"/>
-          <p:cNvSpPr>
-            <a:spLocks noGrp="1"/>
-          </p:cNvSpPr>
-          <p:nvPr>
-            <p:ph type="title"/>
-          </p:nvPr>
-        </p:nvSpPr>
-        <p:spPr/>
-        <p:txBody>
-          <a:bodyPr/>
-          <a:lstStyle/>
-          <a:p>
+          <p:cNvPr id="2" name="TextBox 1"/>
+          <p:cNvSpPr txBox="1"/>
+          <p:nvPr/>
+        </p:nvSpPr>
+        <p:spPr>
+          <a:xfrm>
+            <a:off x="457200" y="182880"/>
+            <a:ext cx="8229600" cy="457200"/>
+          </a:xfrm>
+          <a:prstGeom prst="rect">
+            <a:avLst/>
+          </a:prstGeom>
+          <a:noFill/>
+        </p:spPr>
+        <p:txBody>
+          <a:bodyPr wrap="none">
+            <a:spAutoFit/>
+          </a:bodyPr>
+          <a:lstStyle/>
+          <a:p>
+            <a:pPr>
+              <a:defRPr b="1" sz="2400"/>
+            </a:pPr>
             <a:r>
               <a:t>7. 메뉴 등록 및 관리 (`SYS-MENU-0200`)</a:t>
             </a:r>
@@ -4300,105 +6276,83 @@
       </p:sp>
       <p:sp>
         <p:nvSpPr>
-          <p:cNvPr id="3" name="Content Placeholder 2"/>
-          <p:cNvSpPr>
-            <a:spLocks noGrp="1"/>
-          </p:cNvSpPr>
-          <p:nvPr>
-            <p:ph idx="1"/>
-          </p:nvPr>
-        </p:nvSpPr>
-        <p:spPr/>
-        <p:txBody>
-          <a:bodyPr/>
-          <a:lstStyle/>
-          <a:p/>
+          <p:cNvPr id="3" name="Rectangle 2"/>
+          <p:cNvSpPr/>
+          <p:nvPr/>
+        </p:nvSpPr>
+        <p:spPr>
+          <a:xfrm>
+            <a:off x="457200" y="914400"/>
+            <a:ext cx="8229600" cy="5486400"/>
+          </a:xfrm>
+          <a:prstGeom prst="rect">
+            <a:avLst/>
+          </a:prstGeom>
+          <a:solidFill>
+            <a:srgbClr val="F0F0F0"/>
+          </a:solidFill>
+        </p:spPr>
+        <p:style>
+          <a:lnRef idx="1">
+            <a:schemeClr val="accent1"/>
+          </a:lnRef>
+          <a:fillRef idx="3">
+            <a:schemeClr val="accent1"/>
+          </a:fillRef>
+          <a:effectRef idx="2">
+            <a:schemeClr val="accent1"/>
+          </a:effectRef>
+          <a:fontRef idx="minor">
+            <a:schemeClr val="lt1"/>
+          </a:fontRef>
+        </p:style>
+        <p:txBody>
+          <a:bodyPr rtlCol="0" anchor="ctr"/>
+          <a:lstStyle/>
+          <a:p>
+            <a:pPr algn="ctr"/>
+            <a:r>
+              <a:rPr sz="1200">
+                <a:solidFill>
+                  <a:srgbClr val="FFFFFF"/>
+                </a:solidFill>
+              </a:rPr>
+              <a:t>화면 구성 영역 (상세 내용은 설계서 참조)</a:t>
+            </a:r>
+          </a:p>
+        </p:txBody>
+      </p:sp>
+      <p:sp>
+        <p:nvSpPr>
+          <p:cNvPr id="4" name="TextBox 3"/>
+          <p:cNvSpPr txBox="1"/>
+          <p:nvPr/>
+        </p:nvSpPr>
+        <p:spPr>
+          <a:xfrm>
+            <a:off x="457200" y="548640"/>
+            <a:ext cx="8229600" cy="365760"/>
+          </a:xfrm>
+          <a:prstGeom prst="rect">
+            <a:avLst/>
+          </a:prstGeom>
+          <a:noFill/>
+        </p:spPr>
+        <p:txBody>
+          <a:bodyPr wrap="none">
+            <a:spAutoFit/>
+          </a:bodyPr>
+          <a:lstStyle/>
           <a:p>
             <a:pPr>
-              <a:defRPr b="1" sz="1800"/>
+              <a:defRPr sz="1200">
+                <a:solidFill>
+                  <a:srgbClr val="646464"/>
+                </a:solidFill>
+              </a:defRPr>
             </a:pPr>
             <a:r>
-              <a:t>7.1. 화면 레이아웃</a:t>
-            </a:r>
-          </a:p>
-          <a:p>
-            <a:pPr lvl="1">
-              <a:defRPr sz="1400"/>
-            </a:pPr>
-            <a:r>
-              <a:t>  좌측 (메뉴 트리 영역): 등록된 전체 시스템 메뉴를 대/중/소분류의 트리(Tree) 구조로 표시 (Drag &amp; Drop으로 순서 변경 지원).</a:t>
-            </a:r>
-          </a:p>
-          <a:p>
-            <a:pPr lvl="1">
-              <a:defRPr sz="1400"/>
-            </a:pPr>
-            <a:r>
-              <a:t>  우측 (상세 영역): 좌측 트리에서 선택된 특정 메뉴 노드의 상세 정보 입력 폼</a:t>
-            </a:r>
-          </a:p>
-          <a:p>
-            <a:pPr lvl="1">
-              <a:defRPr sz="1400"/>
-            </a:pPr>
-            <a:r>
-              <a:t>  상단 (버튼 영역): `[하위메뉴 추가]`, `[저장]`, `[삭제]`</a:t>
-            </a:r>
-          </a:p>
-          <a:p>
-            <a:pPr>
-              <a:defRPr b="1" sz="1800"/>
-            </a:pPr>
-            <a:r>
-              <a:t>7.2. 입력 항목 (상세 영역)</a:t>
-            </a:r>
-          </a:p>
-          <a:p>
-            <a:pPr lvl="1">
-              <a:defRPr sz="1400"/>
-            </a:pPr>
-            <a:r>
-              <a:t>  기본 정보: 상위 메뉴명(읽기전용), 메뉴 ID(자동생성 또는 수동입력), 메뉴명(필수)</a:t>
-            </a:r>
-          </a:p>
-          <a:p>
-            <a:pPr lvl="1">
-              <a:defRPr sz="1400"/>
-            </a:pPr>
-            <a:r>
-              <a:t>  속성 정보: 메뉴 URL (화면 경로), 정렬 순서(숫자), 아이콘(클래스명)</a:t>
-            </a:r>
-          </a:p>
-          <a:p>
-            <a:pPr lvl="1">
-              <a:defRPr sz="1400"/>
-            </a:pPr>
-            <a:r>
-              <a:t>  상태: 사용 여부 (사용/미사용 - 미사용 시 메뉴 바 및 권한 설정 화면에서 숨김 처리)</a:t>
-            </a:r>
-          </a:p>
-          <a:p>
-            <a:pPr>
-              <a:defRPr b="1" sz="1800"/>
-            </a:pPr>
-            <a:r>
-              <a:t>7.3. 주요 기능/처리 로직</a:t>
-            </a:r>
-          </a:p>
-          <a:p>
-            <a:pPr lvl="1">
-              <a:defRPr sz="1400"/>
-            </a:pPr>
-            <a:r>
-              <a:t>  계층 구조 관리: 1Depth(대분류), 2Depth(중분류), 3Depth(화면)까지의 계층을 무한 또는 제한적으로 생성 가능.</a:t>
-            </a:r>
-          </a:p>
-          <a:p>
-            <a:pPr lvl="1">
-              <a:defRPr sz="1400"/>
-            </a:pPr>
-            <a:r>
-              <a:t>  권한 화면 연동: 본 화면에서 등록/수정된 메뉴 트리 정보는 `SYS-AUTHRT-0300`(권한 관리) 화면의 권한 부여 대상 메뉴 트리로 실시간 동기화됨.</a:t>
+              <a:t>주요 기능: 설계서 참조</a:t>
             </a:r>
           </a:p>
         </p:txBody>
@@ -4423,19 +6377,29 @@
       <p:grpSpPr/>
       <p:sp>
         <p:nvSpPr>
-          <p:cNvPr id="2" name="Title 1"/>
-          <p:cNvSpPr>
-            <a:spLocks noGrp="1"/>
-          </p:cNvSpPr>
-          <p:nvPr>
-            <p:ph type="title"/>
-          </p:nvPr>
-        </p:nvSpPr>
-        <p:spPr/>
-        <p:txBody>
-          <a:bodyPr/>
-          <a:lstStyle/>
-          <a:p>
+          <p:cNvPr id="2" name="TextBox 1"/>
+          <p:cNvSpPr txBox="1"/>
+          <p:nvPr/>
+        </p:nvSpPr>
+        <p:spPr>
+          <a:xfrm>
+            <a:off x="457200" y="182880"/>
+            <a:ext cx="8229600" cy="457200"/>
+          </a:xfrm>
+          <a:prstGeom prst="rect">
+            <a:avLst/>
+          </a:prstGeom>
+          <a:noFill/>
+        </p:spPr>
+        <p:txBody>
+          <a:bodyPr wrap="none">
+            <a:spAutoFit/>
+          </a:bodyPr>
+          <a:lstStyle/>
+          <a:p>
+            <a:pPr>
+              <a:defRPr b="1" sz="2400"/>
+            </a:pPr>
             <a:r>
               <a:t>8. 메뉴 및 버튼 권한 관리 (`SYS-AUTHRT-0300`)</a:t>
             </a:r>
@@ -4444,81 +6408,83 @@
       </p:sp>
       <p:sp>
         <p:nvSpPr>
-          <p:cNvPr id="3" name="Content Placeholder 2"/>
-          <p:cNvSpPr>
-            <a:spLocks noGrp="1"/>
-          </p:cNvSpPr>
-          <p:nvPr>
-            <p:ph idx="1"/>
-          </p:nvPr>
-        </p:nvSpPr>
-        <p:spPr/>
-        <p:txBody>
-          <a:bodyPr/>
-          <a:lstStyle/>
-          <a:p/>
+          <p:cNvPr id="3" name="Rectangle 2"/>
+          <p:cNvSpPr/>
+          <p:nvPr/>
+        </p:nvSpPr>
+        <p:spPr>
+          <a:xfrm>
+            <a:off x="457200" y="914400"/>
+            <a:ext cx="8229600" cy="5486400"/>
+          </a:xfrm>
+          <a:prstGeom prst="rect">
+            <a:avLst/>
+          </a:prstGeom>
+          <a:solidFill>
+            <a:srgbClr val="F0F0F0"/>
+          </a:solidFill>
+        </p:spPr>
+        <p:style>
+          <a:lnRef idx="1">
+            <a:schemeClr val="accent1"/>
+          </a:lnRef>
+          <a:fillRef idx="3">
+            <a:schemeClr val="accent1"/>
+          </a:fillRef>
+          <a:effectRef idx="2">
+            <a:schemeClr val="accent1"/>
+          </a:effectRef>
+          <a:fontRef idx="minor">
+            <a:schemeClr val="lt1"/>
+          </a:fontRef>
+        </p:style>
+        <p:txBody>
+          <a:bodyPr rtlCol="0" anchor="ctr"/>
+          <a:lstStyle/>
+          <a:p>
+            <a:pPr algn="ctr"/>
+            <a:r>
+              <a:rPr sz="1200">
+                <a:solidFill>
+                  <a:srgbClr val="FFFFFF"/>
+                </a:solidFill>
+              </a:rPr>
+              <a:t>화면 구성 영역 (상세 내용은 설계서 참조)</a:t>
+            </a:r>
+          </a:p>
+        </p:txBody>
+      </p:sp>
+      <p:sp>
+        <p:nvSpPr>
+          <p:cNvPr id="4" name="TextBox 3"/>
+          <p:cNvSpPr txBox="1"/>
+          <p:nvPr/>
+        </p:nvSpPr>
+        <p:spPr>
+          <a:xfrm>
+            <a:off x="457200" y="548640"/>
+            <a:ext cx="8229600" cy="365760"/>
+          </a:xfrm>
+          <a:prstGeom prst="rect">
+            <a:avLst/>
+          </a:prstGeom>
+          <a:noFill/>
+        </p:spPr>
+        <p:txBody>
+          <a:bodyPr wrap="none">
+            <a:spAutoFit/>
+          </a:bodyPr>
+          <a:lstStyle/>
           <a:p>
             <a:pPr>
-              <a:defRPr b="1" sz="1800"/>
+              <a:defRPr sz="1200">
+                <a:solidFill>
+                  <a:srgbClr val="646464"/>
+                </a:solidFill>
+              </a:defRPr>
             </a:pPr>
             <a:r>
-              <a:t>8.1. 화면 레이아웃</a:t>
-            </a:r>
-          </a:p>
-          <a:p>
-            <a:pPr lvl="1">
-              <a:defRPr sz="1400"/>
-            </a:pPr>
-            <a:r>
-              <a:t>  좌측 (그룹/사용자 영역): 권한을 부여할 대상(사용자 그룹 또는 특정 사용자) 리스트 트리/그리드</a:t>
-            </a:r>
-          </a:p>
-          <a:p>
-            <a:pPr lvl="1">
-              <a:defRPr sz="1400"/>
-            </a:pPr>
-            <a:r>
-              <a:t>  우측 상단 (메뉴 권한 영역): 전체 시스템 메뉴 트리 및 체크박스 (접근 권한 부여)</a:t>
-            </a:r>
-          </a:p>
-          <a:p>
-            <a:pPr lvl="1">
-              <a:defRPr sz="1400"/>
-            </a:pPr>
-            <a:r>
-              <a:t>  우측 하단 (버튼 권한 영역): 우측 상단에서 선택된 특정 메뉴(화면) 내의 개별 기능 버튼(조회, 신규, 저장, 삭제, 인쇄, 엑셀다운 등) 리스트 및 체크박스</a:t>
-            </a:r>
-          </a:p>
-          <a:p>
-            <a:pPr lvl="1">
-              <a:defRPr sz="1400"/>
-            </a:pPr>
-            <a:r>
-              <a:t>  상단 (버튼 영역): `[저장]`, `[초기화]`</a:t>
-            </a:r>
-          </a:p>
-          <a:p>
-            <a:pPr>
-              <a:defRPr b="1" sz="1800"/>
-            </a:pPr>
-            <a:r>
-              <a:t>8.2. 주요 기능/처리 로직</a:t>
-            </a:r>
-          </a:p>
-          <a:p>
-            <a:pPr lvl="1">
-              <a:defRPr sz="1400"/>
-            </a:pPr>
-            <a:r>
-              <a:t>  권한 상속 및 예외 처리: 기본적으로 '사용자 그룹(예: 영업부, 회계부)' 단위로 메뉴 및 버튼 권한을 일괄 부여하고, 필요 시 개별 사용자 단위로 예외 권한을 설정하는 로직 구현.</a:t>
-            </a:r>
-          </a:p>
-          <a:p>
-            <a:pPr lvl="1">
-              <a:defRPr sz="1400"/>
-            </a:pPr>
-            <a:r>
-              <a:t>  동적 UI 렌더링: 사용자가 시스템 로그인 시, 본 화면에서 설정된 권한 데이터를 바탕으로 좌측 LNB(메뉴바) 및 각 화면의 기능 버튼 렌더링을 동적으로 제어(권한 없는 버튼은 숨김 또는 비활성화 처리).</a:t>
+              <a:t>주요 기능: 우측 상단에서 선택된 특정 메뉴(화면) 내의 개별 기능 버튼(조회, 신규, 저장, 삭제, 인쇄, 엑셀다운 등) 리스트 및 체크박스</a:t>
             </a:r>
           </a:p>
         </p:txBody>

--- a/02_설계/화면정의서.pptx
+++ b/02_설계/화면정의서.pptx
@@ -3869,14 +3869,14 @@
         </p:nvSpPr>
         <p:spPr>
           <a:xfrm>
-            <a:off x="5943600" y="365760"/>
-            <a:ext cx="731520" cy="274320"/>
+            <a:off x="4389120" y="3017520"/>
+            <a:ext cx="4023360" cy="365760"/>
           </a:xfrm>
           <a:prstGeom prst="roundRect">
             <a:avLst/>
           </a:prstGeom>
           <a:solidFill>
-            <a:srgbClr val="0070C0"/>
+            <a:srgbClr val="FFE6CC"/>
           </a:solidFill>
         </p:spPr>
         <p:style>
@@ -3899,12 +3899,12 @@
           <a:p>
             <a:pPr algn="ctr"/>
             <a:r>
-              <a:rPr sz="1000">
+              <a:rPr sz="1200">
                 <a:solidFill>
                   <a:srgbClr val="FFFFFF"/>
                 </a:solidFill>
               </a:rPr>
-              <a:t>신규</a:t>
+              <a:t>적용 시작일 (날짜별 이력관리 필드)</a:t>
             </a:r>
           </a:p>
         </p:txBody>
@@ -3917,14 +3917,14 @@
         </p:nvSpPr>
         <p:spPr>
           <a:xfrm>
-            <a:off x="6858000" y="365760"/>
+            <a:off x="5943600" y="365760"/>
             <a:ext cx="731520" cy="274320"/>
           </a:xfrm>
           <a:prstGeom prst="roundRect">
             <a:avLst/>
           </a:prstGeom>
           <a:solidFill>
-            <a:srgbClr val="00B050"/>
+            <a:srgbClr val="0070C0"/>
           </a:solidFill>
         </p:spPr>
         <p:style>
@@ -3952,7 +3952,7 @@
                   <a:srgbClr val="FFFFFF"/>
                 </a:solidFill>
               </a:rPr>
-              <a:t>저장</a:t>
+              <a:t>신규</a:t>
             </a:r>
           </a:p>
         </p:txBody>
@@ -3965,14 +3965,14 @@
         </p:nvSpPr>
         <p:spPr>
           <a:xfrm>
-            <a:off x="7772400" y="365760"/>
+            <a:off x="6858000" y="365760"/>
             <a:ext cx="731520" cy="274320"/>
           </a:xfrm>
           <a:prstGeom prst="roundRect">
             <a:avLst/>
           </a:prstGeom>
           <a:solidFill>
-            <a:srgbClr val="FF0000"/>
+            <a:srgbClr val="00B050"/>
           </a:solidFill>
         </p:spPr>
         <p:style>
@@ -4000,6 +4000,54 @@
                   <a:srgbClr val="FFFFFF"/>
                 </a:solidFill>
               </a:rPr>
+              <a:t>저장</a:t>
+            </a:r>
+          </a:p>
+        </p:txBody>
+      </p:sp>
+      <p:sp>
+        <p:nvSpPr>
+          <p:cNvPr id="11" name="Rounded Rectangle 10"/>
+          <p:cNvSpPr/>
+          <p:nvPr/>
+        </p:nvSpPr>
+        <p:spPr>
+          <a:xfrm>
+            <a:off x="7772400" y="365760"/>
+            <a:ext cx="731520" cy="274320"/>
+          </a:xfrm>
+          <a:prstGeom prst="roundRect">
+            <a:avLst/>
+          </a:prstGeom>
+          <a:solidFill>
+            <a:srgbClr val="FF0000"/>
+          </a:solidFill>
+        </p:spPr>
+        <p:style>
+          <a:lnRef idx="1">
+            <a:schemeClr val="accent1"/>
+          </a:lnRef>
+          <a:fillRef idx="3">
+            <a:schemeClr val="accent1"/>
+          </a:fillRef>
+          <a:effectRef idx="2">
+            <a:schemeClr val="accent1"/>
+          </a:effectRef>
+          <a:fontRef idx="minor">
+            <a:schemeClr val="lt1"/>
+          </a:fontRef>
+        </p:style>
+        <p:txBody>
+          <a:bodyPr rtlCol="0" anchor="ctr"/>
+          <a:lstStyle/>
+          <a:p>
+            <a:pPr algn="ctr"/>
+            <a:r>
+              <a:rPr sz="1000">
+                <a:solidFill>
+                  <a:srgbClr val="FFFFFF"/>
+                </a:solidFill>
+              </a:rPr>
               <a:t>삭제</a:t>
             </a:r>
           </a:p>
@@ -4007,7 +4055,7 @@
       </p:sp>
       <p:sp>
         <p:nvSpPr>
-          <p:cNvPr id="11" name="TextBox 10"/>
+          <p:cNvPr id="12" name="TextBox 11"/>
           <p:cNvSpPr txBox="1"/>
           <p:nvPr/>
         </p:nvSpPr>
@@ -4342,14 +4390,14 @@
         </p:nvSpPr>
         <p:spPr>
           <a:xfrm>
-            <a:off x="5943600" y="365760"/>
-            <a:ext cx="731520" cy="274320"/>
+            <a:off x="4389120" y="3017520"/>
+            <a:ext cx="4023360" cy="365760"/>
           </a:xfrm>
           <a:prstGeom prst="roundRect">
             <a:avLst/>
           </a:prstGeom>
           <a:solidFill>
-            <a:srgbClr val="0070C0"/>
+            <a:srgbClr val="FFE6CC"/>
           </a:solidFill>
         </p:spPr>
         <p:style>
@@ -4372,12 +4420,12 @@
           <a:p>
             <a:pPr algn="ctr"/>
             <a:r>
-              <a:rPr sz="1000">
+              <a:rPr sz="1200">
                 <a:solidFill>
                   <a:srgbClr val="FFFFFF"/>
                 </a:solidFill>
               </a:rPr>
-              <a:t>신규</a:t>
+              <a:t>적용 시작일 (날짜별 이력관리 필드)</a:t>
             </a:r>
           </a:p>
         </p:txBody>
@@ -4390,14 +4438,14 @@
         </p:nvSpPr>
         <p:spPr>
           <a:xfrm>
-            <a:off x="6858000" y="365760"/>
+            <a:off x="5943600" y="365760"/>
             <a:ext cx="731520" cy="274320"/>
           </a:xfrm>
           <a:prstGeom prst="roundRect">
             <a:avLst/>
           </a:prstGeom>
           <a:solidFill>
-            <a:srgbClr val="00B050"/>
+            <a:srgbClr val="0070C0"/>
           </a:solidFill>
         </p:spPr>
         <p:style>
@@ -4425,7 +4473,7 @@
                   <a:srgbClr val="FFFFFF"/>
                 </a:solidFill>
               </a:rPr>
-              <a:t>저장</a:t>
+              <a:t>신규</a:t>
             </a:r>
           </a:p>
         </p:txBody>
@@ -4438,14 +4486,14 @@
         </p:nvSpPr>
         <p:spPr>
           <a:xfrm>
-            <a:off x="7772400" y="365760"/>
+            <a:off x="6858000" y="365760"/>
             <a:ext cx="731520" cy="274320"/>
           </a:xfrm>
           <a:prstGeom prst="roundRect">
             <a:avLst/>
           </a:prstGeom>
           <a:solidFill>
-            <a:srgbClr val="FF0000"/>
+            <a:srgbClr val="00B050"/>
           </a:solidFill>
         </p:spPr>
         <p:style>
@@ -4473,6 +4521,54 @@
                   <a:srgbClr val="FFFFFF"/>
                 </a:solidFill>
               </a:rPr>
+              <a:t>저장</a:t>
+            </a:r>
+          </a:p>
+        </p:txBody>
+      </p:sp>
+      <p:sp>
+        <p:nvSpPr>
+          <p:cNvPr id="11" name="Rounded Rectangle 10"/>
+          <p:cNvSpPr/>
+          <p:nvPr/>
+        </p:nvSpPr>
+        <p:spPr>
+          <a:xfrm>
+            <a:off x="7772400" y="365760"/>
+            <a:ext cx="731520" cy="274320"/>
+          </a:xfrm>
+          <a:prstGeom prst="roundRect">
+            <a:avLst/>
+          </a:prstGeom>
+          <a:solidFill>
+            <a:srgbClr val="FF0000"/>
+          </a:solidFill>
+        </p:spPr>
+        <p:style>
+          <a:lnRef idx="1">
+            <a:schemeClr val="accent1"/>
+          </a:lnRef>
+          <a:fillRef idx="3">
+            <a:schemeClr val="accent1"/>
+          </a:fillRef>
+          <a:effectRef idx="2">
+            <a:schemeClr val="accent1"/>
+          </a:effectRef>
+          <a:fontRef idx="minor">
+            <a:schemeClr val="lt1"/>
+          </a:fontRef>
+        </p:style>
+        <p:txBody>
+          <a:bodyPr rtlCol="0" anchor="ctr"/>
+          <a:lstStyle/>
+          <a:p>
+            <a:pPr algn="ctr"/>
+            <a:r>
+              <a:rPr sz="1000">
+                <a:solidFill>
+                  <a:srgbClr val="FFFFFF"/>
+                </a:solidFill>
+              </a:rPr>
               <a:t>삭제</a:t>
             </a:r>
           </a:p>
@@ -4480,7 +4576,7 @@
       </p:sp>
       <p:sp>
         <p:nvSpPr>
-          <p:cNvPr id="11" name="TextBox 10"/>
+          <p:cNvPr id="12" name="TextBox 11"/>
           <p:cNvSpPr txBox="1"/>
           <p:nvPr/>
         </p:nvSpPr>

--- a/02_설계/화면정의서.pptx
+++ b/02_설계/화면정의서.pptx
@@ -3289,12 +3289,15 @@
         </p:nvSpPr>
         <p:spPr>
           <a:xfrm>
-            <a:off x="3200400" y="1371600"/>
-            <a:ext cx="1828800" cy="274320"/>
+            <a:off x="6858000" y="365760"/>
+            <a:ext cx="731520" cy="274320"/>
           </a:xfrm>
           <a:prstGeom prst="roundRect">
             <a:avLst/>
           </a:prstGeom>
+          <a:solidFill>
+            <a:srgbClr val="0070C0"/>
+          </a:solidFill>
         </p:spPr>
         <p:style>
           <a:lnRef idx="1">
@@ -3316,12 +3319,12 @@
           <a:p>
             <a:pPr algn="ctr"/>
             <a:r>
-              <a:rPr sz="1200">
-                <a:solidFill>
-                  <a:srgbClr val="000000"/>
+              <a:rPr sz="1000">
+                <a:solidFill>
+                  <a:srgbClr val="FFFFFF"/>
                 </a:solidFill>
               </a:rPr>
-              <a:t>검색어/입력란 2</a:t>
+              <a:t>조회/신규</a:t>
             </a:r>
           </a:p>
         </p:txBody>
@@ -3334,14 +3337,14 @@
         </p:nvSpPr>
         <p:spPr>
           <a:xfrm>
-            <a:off x="6858000" y="365760"/>
+            <a:off x="7772400" y="365760"/>
             <a:ext cx="731520" cy="274320"/>
           </a:xfrm>
           <a:prstGeom prst="roundRect">
             <a:avLst/>
           </a:prstGeom>
           <a:solidFill>
-            <a:srgbClr val="0070C0"/>
+            <a:srgbClr val="00B050"/>
           </a:solidFill>
         </p:spPr>
         <p:style>
@@ -3369,27 +3372,27 @@
                   <a:srgbClr val="FFFFFF"/>
                 </a:solidFill>
               </a:rPr>
-              <a:t>조회/신규</a:t>
-            </a:r>
-          </a:p>
-        </p:txBody>
-      </p:sp>
-      <p:sp>
-        <p:nvSpPr>
-          <p:cNvPr id="7" name="Rounded Rectangle 6"/>
+              <a:t>저장/저장</a:t>
+            </a:r>
+          </a:p>
+        </p:txBody>
+      </p:sp>
+      <p:sp>
+        <p:nvSpPr>
+          <p:cNvPr id="7" name="Rectangle 6"/>
           <p:cNvSpPr/>
           <p:nvPr/>
         </p:nvSpPr>
         <p:spPr>
           <a:xfrm>
-            <a:off x="7772400" y="365760"/>
-            <a:ext cx="731520" cy="274320"/>
-          </a:xfrm>
-          <a:prstGeom prst="roundRect">
+            <a:off x="457200" y="2743200"/>
+            <a:ext cx="8229600" cy="2286000"/>
+          </a:xfrm>
+          <a:prstGeom prst="rect">
             <a:avLst/>
           </a:prstGeom>
           <a:solidFill>
-            <a:srgbClr val="00B050"/>
+            <a:srgbClr val="F5F5FF"/>
           </a:solidFill>
         </p:spPr>
         <p:style>
@@ -3412,12 +3415,26 @@
           <a:p>
             <a:pPr algn="ctr"/>
             <a:r>
-              <a:rPr sz="1000">
+              <a:rPr sz="1200">
                 <a:solidFill>
                   <a:srgbClr val="FFFFFF"/>
                 </a:solidFill>
               </a:rPr>
-              <a:t>저장/저장</a:t>
+              <a:t>중단 영역 (목록 리스트 또는 전표 디테일 라인)</a:t>
+            </a:r>
+          </a:p>
+          <a:p>
+            <a:pPr algn="ctr"/>
+          </a:p>
+          <a:p>
+            <a:pPr algn="ctr"/>
+            <a:r>
+              <a:rPr sz="1200">
+                <a:solidFill>
+                  <a:srgbClr val="FFFFFF"/>
+                </a:solidFill>
+              </a:rPr>
+              <a:t>[ Data Grid ]</a:t>
             </a:r>
           </a:p>
         </p:txBody>
@@ -3430,14 +3447,14 @@
         </p:nvSpPr>
         <p:spPr>
           <a:xfrm>
-            <a:off x="457200" y="2743200"/>
-            <a:ext cx="8229600" cy="2286000"/>
+            <a:off x="457200" y="5486400"/>
+            <a:ext cx="8229600" cy="1097280"/>
           </a:xfrm>
           <a:prstGeom prst="rect">
             <a:avLst/>
           </a:prstGeom>
           <a:solidFill>
-            <a:srgbClr val="F5F5FF"/>
+            <a:srgbClr val="FFF5F5"/>
           </a:solidFill>
         </p:spPr>
         <p:style>
@@ -3465,68 +3482,6 @@
                   <a:srgbClr val="FFFFFF"/>
                 </a:solidFill>
               </a:rPr>
-              <a:t>중단 영역 (목록 리스트 또는 전표 디테일 라인)</a:t>
-            </a:r>
-          </a:p>
-          <a:p>
-            <a:pPr algn="ctr"/>
-          </a:p>
-          <a:p>
-            <a:pPr algn="ctr"/>
-            <a:r>
-              <a:rPr sz="1200">
-                <a:solidFill>
-                  <a:srgbClr val="FFFFFF"/>
-                </a:solidFill>
-              </a:rPr>
-              <a:t>[ Data Grid ]</a:t>
-            </a:r>
-          </a:p>
-        </p:txBody>
-      </p:sp>
-      <p:sp>
-        <p:nvSpPr>
-          <p:cNvPr id="9" name="Rectangle 8"/>
-          <p:cNvSpPr/>
-          <p:nvPr/>
-        </p:nvSpPr>
-        <p:spPr>
-          <a:xfrm>
-            <a:off x="457200" y="5486400"/>
-            <a:ext cx="8229600" cy="1097280"/>
-          </a:xfrm>
-          <a:prstGeom prst="rect">
-            <a:avLst/>
-          </a:prstGeom>
-          <a:solidFill>
-            <a:srgbClr val="FFF5F5"/>
-          </a:solidFill>
-        </p:spPr>
-        <p:style>
-          <a:lnRef idx="1">
-            <a:schemeClr val="accent1"/>
-          </a:lnRef>
-          <a:fillRef idx="3">
-            <a:schemeClr val="accent1"/>
-          </a:fillRef>
-          <a:effectRef idx="2">
-            <a:schemeClr val="accent1"/>
-          </a:effectRef>
-          <a:fontRef idx="minor">
-            <a:schemeClr val="lt1"/>
-          </a:fontRef>
-        </p:style>
-        <p:txBody>
-          <a:bodyPr rtlCol="0" anchor="ctr"/>
-          <a:lstStyle/>
-          <a:p>
-            <a:pPr algn="ctr"/>
-            <a:r>
-              <a:rPr sz="1200">
-                <a:solidFill>
-                  <a:srgbClr val="FFFFFF"/>
-                </a:solidFill>
-              </a:rPr>
               <a:t>하단 영역 (상세 정보 탭 또는 합계 영역)</a:t>
             </a:r>
           </a:p>
@@ -3534,7 +3489,7 @@
       </p:sp>
       <p:sp>
         <p:nvSpPr>
-          <p:cNvPr id="10" name="TextBox 9"/>
+          <p:cNvPr id="9" name="TextBox 8"/>
           <p:cNvSpPr txBox="1"/>
           <p:nvPr/>
         </p:nvSpPr>
@@ -3811,7 +3766,7 @@
                   <a:srgbClr val="000000"/>
                 </a:solidFill>
               </a:rPr>
-              <a:t>입력 필드 2 (예: 상세 정보)</a:t>
+              <a:t>입력 필드 2</a:t>
             </a:r>
           </a:p>
         </p:txBody>
@@ -3856,7 +3811,7 @@
                   <a:srgbClr val="000000"/>
                 </a:solidFill>
               </a:rPr>
-              <a:t>입력 필드 3 (예: 상태/설정)</a:t>
+              <a:t>입력 필드 3</a:t>
             </a:r>
           </a:p>
         </p:txBody>
@@ -4332,7 +4287,7 @@
                   <a:srgbClr val="000000"/>
                 </a:solidFill>
               </a:rPr>
-              <a:t>입력 필드 2 (예: 상세 정보)</a:t>
+              <a:t>입력 필드 2</a:t>
             </a:r>
           </a:p>
         </p:txBody>
@@ -4377,7 +4332,7 @@
                   <a:srgbClr val="000000"/>
                 </a:solidFill>
               </a:rPr>
-              <a:t>입력 필드 3 (예: 상태/설정)</a:t>
+              <a:t>입력 필드 3</a:t>
             </a:r>
           </a:p>
         </p:txBody>
@@ -4759,12 +4714,15 @@
         </p:nvSpPr>
         <p:spPr>
           <a:xfrm>
-            <a:off x="3200400" y="1371600"/>
-            <a:ext cx="1828800" cy="274320"/>
+            <a:off x="6858000" y="365760"/>
+            <a:ext cx="731520" cy="274320"/>
           </a:xfrm>
           <a:prstGeom prst="roundRect">
             <a:avLst/>
           </a:prstGeom>
+          <a:solidFill>
+            <a:srgbClr val="0070C0"/>
+          </a:solidFill>
         </p:spPr>
         <p:style>
           <a:lnRef idx="1">
@@ -4786,12 +4744,12 @@
           <a:p>
             <a:pPr algn="ctr"/>
             <a:r>
-              <a:rPr sz="1200">
-                <a:solidFill>
-                  <a:srgbClr val="000000"/>
+              <a:rPr sz="1000">
+                <a:solidFill>
+                  <a:srgbClr val="FFFFFF"/>
                 </a:solidFill>
               </a:rPr>
-              <a:t>검색어/입력란 2</a:t>
+              <a:t>조회/신규</a:t>
             </a:r>
           </a:p>
         </p:txBody>
@@ -4804,14 +4762,14 @@
         </p:nvSpPr>
         <p:spPr>
           <a:xfrm>
-            <a:off x="6858000" y="365760"/>
+            <a:off x="7772400" y="365760"/>
             <a:ext cx="731520" cy="274320"/>
           </a:xfrm>
           <a:prstGeom prst="roundRect">
             <a:avLst/>
           </a:prstGeom>
           <a:solidFill>
-            <a:srgbClr val="0070C0"/>
+            <a:srgbClr val="00B050"/>
           </a:solidFill>
         </p:spPr>
         <p:style>
@@ -4839,27 +4797,27 @@
                   <a:srgbClr val="FFFFFF"/>
                 </a:solidFill>
               </a:rPr>
-              <a:t>조회/신규</a:t>
-            </a:r>
-          </a:p>
-        </p:txBody>
-      </p:sp>
-      <p:sp>
-        <p:nvSpPr>
-          <p:cNvPr id="7" name="Rounded Rectangle 6"/>
+              <a:t>저장/저장</a:t>
+            </a:r>
+          </a:p>
+        </p:txBody>
+      </p:sp>
+      <p:sp>
+        <p:nvSpPr>
+          <p:cNvPr id="7" name="Rectangle 6"/>
           <p:cNvSpPr/>
           <p:nvPr/>
         </p:nvSpPr>
         <p:spPr>
           <a:xfrm>
-            <a:off x="7772400" y="365760"/>
-            <a:ext cx="731520" cy="274320"/>
-          </a:xfrm>
-          <a:prstGeom prst="roundRect">
+            <a:off x="457200" y="2743200"/>
+            <a:ext cx="8229600" cy="2286000"/>
+          </a:xfrm>
+          <a:prstGeom prst="rect">
             <a:avLst/>
           </a:prstGeom>
           <a:solidFill>
-            <a:srgbClr val="00B050"/>
+            <a:srgbClr val="F5F5FF"/>
           </a:solidFill>
         </p:spPr>
         <p:style>
@@ -4882,12 +4840,26 @@
           <a:p>
             <a:pPr algn="ctr"/>
             <a:r>
-              <a:rPr sz="1000">
+              <a:rPr sz="1200">
                 <a:solidFill>
                   <a:srgbClr val="FFFFFF"/>
                 </a:solidFill>
               </a:rPr>
-              <a:t>저장/저장</a:t>
+              <a:t>중단 영역 (목록 리스트 또는 전표 디테일 라인)</a:t>
+            </a:r>
+          </a:p>
+          <a:p>
+            <a:pPr algn="ctr"/>
+          </a:p>
+          <a:p>
+            <a:pPr algn="ctr"/>
+            <a:r>
+              <a:rPr sz="1200">
+                <a:solidFill>
+                  <a:srgbClr val="FFFFFF"/>
+                </a:solidFill>
+              </a:rPr>
+              <a:t>[ Data Grid ]</a:t>
             </a:r>
           </a:p>
         </p:txBody>
@@ -4900,14 +4872,14 @@
         </p:nvSpPr>
         <p:spPr>
           <a:xfrm>
-            <a:off x="457200" y="2743200"/>
-            <a:ext cx="8229600" cy="2286000"/>
+            <a:off x="457200" y="5486400"/>
+            <a:ext cx="8229600" cy="1097280"/>
           </a:xfrm>
           <a:prstGeom prst="rect">
             <a:avLst/>
           </a:prstGeom>
           <a:solidFill>
-            <a:srgbClr val="F5F5FF"/>
+            <a:srgbClr val="FFF5F5"/>
           </a:solidFill>
         </p:spPr>
         <p:style>
@@ -4935,68 +4907,6 @@
                   <a:srgbClr val="FFFFFF"/>
                 </a:solidFill>
               </a:rPr>
-              <a:t>중단 영역 (목록 리스트 또는 전표 디테일 라인)</a:t>
-            </a:r>
-          </a:p>
-          <a:p>
-            <a:pPr algn="ctr"/>
-          </a:p>
-          <a:p>
-            <a:pPr algn="ctr"/>
-            <a:r>
-              <a:rPr sz="1200">
-                <a:solidFill>
-                  <a:srgbClr val="FFFFFF"/>
-                </a:solidFill>
-              </a:rPr>
-              <a:t>[ Data Grid ]</a:t>
-            </a:r>
-          </a:p>
-        </p:txBody>
-      </p:sp>
-      <p:sp>
-        <p:nvSpPr>
-          <p:cNvPr id="9" name="Rectangle 8"/>
-          <p:cNvSpPr/>
-          <p:nvPr/>
-        </p:nvSpPr>
-        <p:spPr>
-          <a:xfrm>
-            <a:off x="457200" y="5486400"/>
-            <a:ext cx="8229600" cy="1097280"/>
-          </a:xfrm>
-          <a:prstGeom prst="rect">
-            <a:avLst/>
-          </a:prstGeom>
-          <a:solidFill>
-            <a:srgbClr val="FFF5F5"/>
-          </a:solidFill>
-        </p:spPr>
-        <p:style>
-          <a:lnRef idx="1">
-            <a:schemeClr val="accent1"/>
-          </a:lnRef>
-          <a:fillRef idx="3">
-            <a:schemeClr val="accent1"/>
-          </a:fillRef>
-          <a:effectRef idx="2">
-            <a:schemeClr val="accent1"/>
-          </a:effectRef>
-          <a:fontRef idx="minor">
-            <a:schemeClr val="lt1"/>
-          </a:fontRef>
-        </p:style>
-        <p:txBody>
-          <a:bodyPr rtlCol="0" anchor="ctr"/>
-          <a:lstStyle/>
-          <a:p>
-            <a:pPr algn="ctr"/>
-            <a:r>
-              <a:rPr sz="1200">
-                <a:solidFill>
-                  <a:srgbClr val="FFFFFF"/>
-                </a:solidFill>
-              </a:rPr>
               <a:t>하단 영역 (상세 정보 탭 또는 합계 영역)</a:t>
             </a:r>
           </a:p>
@@ -5004,7 +4914,7 @@
       </p:sp>
       <p:sp>
         <p:nvSpPr>
-          <p:cNvPr id="10" name="TextBox 9"/>
+          <p:cNvPr id="9" name="TextBox 8"/>
           <p:cNvSpPr txBox="1"/>
           <p:nvPr/>
         </p:nvSpPr>
@@ -5095,7 +5005,7 @@
         <p:spPr>
           <a:xfrm>
             <a:off x="457200" y="914400"/>
-            <a:ext cx="8229600" cy="1371600"/>
+            <a:ext cx="8229600" cy="914400"/>
           </a:xfrm>
           <a:prstGeom prst="rect">
             <a:avLst/>
@@ -5129,25 +5039,28 @@
                   <a:srgbClr val="FFFFFF"/>
                 </a:solidFill>
               </a:rPr>
-              <a:t>상단 영역 (검색 조건 또는 마스터 폼)</a:t>
-            </a:r>
-          </a:p>
-        </p:txBody>
-      </p:sp>
-      <p:sp>
-        <p:nvSpPr>
-          <p:cNvPr id="4" name="Rounded Rectangle 3"/>
+              <a:t>마스터 정보: 전표일자 | 거래처 선택 | 담당자 | 거래유형(공통코드)</a:t>
+            </a:r>
+          </a:p>
+        </p:txBody>
+      </p:sp>
+      <p:sp>
+        <p:nvSpPr>
+          <p:cNvPr id="4" name="Rectangle 3"/>
           <p:cNvSpPr/>
           <p:nvPr/>
         </p:nvSpPr>
         <p:spPr>
           <a:xfrm>
-            <a:off x="914400" y="1371600"/>
-            <a:ext cx="1828800" cy="274320"/>
-          </a:xfrm>
-          <a:prstGeom prst="roundRect">
-            <a:avLst/>
-          </a:prstGeom>
+            <a:off x="457200" y="2011680"/>
+            <a:ext cx="8229600" cy="731520"/>
+          </a:xfrm>
+          <a:prstGeom prst="rect">
+            <a:avLst/>
+          </a:prstGeom>
+          <a:solidFill>
+            <a:srgbClr val="FFF0C8"/>
+          </a:solidFill>
         </p:spPr>
         <p:style>
           <a:lnRef idx="1">
@@ -5171,10 +5084,10 @@
             <a:r>
               <a:rPr sz="1200">
                 <a:solidFill>
-                  <a:srgbClr val="000000"/>
+                  <a:srgbClr val="FFFFFF"/>
                 </a:solidFill>
               </a:rPr>
-              <a:t>검색어/입력란 1</a:t>
+              <a:t>빠른 입력: [상품코드/명 검색]  [수량(박스/본)]</a:t>
             </a:r>
           </a:p>
         </p:txBody>
@@ -5187,12 +5100,15 @@
         </p:nvSpPr>
         <p:spPr>
           <a:xfrm>
-            <a:off x="3200400" y="1371600"/>
-            <a:ext cx="1828800" cy="274320"/>
+            <a:off x="6858000" y="2194560"/>
+            <a:ext cx="1645920" cy="365760"/>
           </a:xfrm>
           <a:prstGeom prst="roundRect">
             <a:avLst/>
           </a:prstGeom>
+          <a:solidFill>
+            <a:srgbClr val="0070C0"/>
+          </a:solidFill>
         </p:spPr>
         <p:style>
           <a:lnRef idx="1">
@@ -5216,30 +5132,30 @@
             <a:r>
               <a:rPr sz="1200">
                 <a:solidFill>
-                  <a:srgbClr val="000000"/>
+                  <a:srgbClr val="FFFFFF"/>
                 </a:solidFill>
               </a:rPr>
-              <a:t>검색어/입력란 2</a:t>
-            </a:r>
-          </a:p>
-        </p:txBody>
-      </p:sp>
-      <p:sp>
-        <p:nvSpPr>
-          <p:cNvPr id="6" name="Rounded Rectangle 5"/>
+              <a:t>엔터(Enter)/저장</a:t>
+            </a:r>
+          </a:p>
+        </p:txBody>
+      </p:sp>
+      <p:sp>
+        <p:nvSpPr>
+          <p:cNvPr id="6" name="Rectangle 5"/>
           <p:cNvSpPr/>
           <p:nvPr/>
         </p:nvSpPr>
         <p:spPr>
           <a:xfrm>
-            <a:off x="6858000" y="365760"/>
-            <a:ext cx="731520" cy="274320"/>
-          </a:xfrm>
-          <a:prstGeom prst="roundRect">
+            <a:off x="457200" y="2926080"/>
+            <a:ext cx="8229600" cy="2286000"/>
+          </a:xfrm>
+          <a:prstGeom prst="rect">
             <a:avLst/>
           </a:prstGeom>
           <a:solidFill>
-            <a:srgbClr val="0070C0"/>
+            <a:srgbClr val="F5F5FF"/>
           </a:solidFill>
         </p:spPr>
         <p:style>
@@ -5262,32 +5178,68 @@
           <a:p>
             <a:pPr algn="ctr"/>
             <a:r>
-              <a:rPr sz="1000">
+              <a:rPr sz="1200">
                 <a:solidFill>
                   <a:srgbClr val="FFFFFF"/>
                 </a:solidFill>
               </a:rPr>
-              <a:t>조회/신규</a:t>
-            </a:r>
-          </a:p>
-        </p:txBody>
-      </p:sp>
-      <p:sp>
-        <p:nvSpPr>
-          <p:cNvPr id="7" name="Rounded Rectangle 6"/>
+              <a:t>전표 라인 리스트 (Data Grid)</a:t>
+            </a:r>
+          </a:p>
+          <a:p>
+            <a:pPr algn="ctr"/>
+            <a:r>
+              <a:rPr sz="1200">
+                <a:solidFill>
+                  <a:srgbClr val="FFFFFF"/>
+                </a:solidFill>
+              </a:rPr>
+              <a:t>(수정 후 엔터 시 즉시 반영)</a:t>
+            </a:r>
+          </a:p>
+          <a:p>
+            <a:pPr algn="ctr"/>
+          </a:p>
+          <a:p>
+            <a:pPr algn="ctr"/>
+            <a:r>
+              <a:rPr sz="1200">
+                <a:solidFill>
+                  <a:srgbClr val="FFFFFF"/>
+                </a:solidFill>
+              </a:rPr>
+              <a:t>라인1: 상품A | 수량 | 단가 | [삭제 버튼]</a:t>
+            </a:r>
+          </a:p>
+          <a:p>
+            <a:pPr algn="ctr"/>
+            <a:r>
+              <a:rPr sz="1200">
+                <a:solidFill>
+                  <a:srgbClr val="FFFFFF"/>
+                </a:solidFill>
+              </a:rPr>
+              <a:t>라인2: 상품B | 수량 | 단가 | [삭제 버튼]</a:t>
+            </a:r>
+          </a:p>
+        </p:txBody>
+      </p:sp>
+      <p:sp>
+        <p:nvSpPr>
+          <p:cNvPr id="7" name="Rectangle 6"/>
           <p:cNvSpPr/>
           <p:nvPr/>
         </p:nvSpPr>
         <p:spPr>
           <a:xfrm>
-            <a:off x="7772400" y="365760"/>
-            <a:ext cx="731520" cy="274320"/>
-          </a:xfrm>
-          <a:prstGeom prst="roundRect">
+            <a:off x="457200" y="5394960"/>
+            <a:ext cx="8229600" cy="731520"/>
+          </a:xfrm>
+          <a:prstGeom prst="rect">
             <a:avLst/>
           </a:prstGeom>
           <a:solidFill>
-            <a:srgbClr val="00B050"/>
+            <a:srgbClr val="DCDCDC"/>
           </a:solidFill>
         </p:spPr>
         <p:style>
@@ -5310,129 +5262,19 @@
           <a:p>
             <a:pPr algn="ctr"/>
             <a:r>
-              <a:rPr sz="1000">
+              <a:rPr sz="1200">
                 <a:solidFill>
                   <a:srgbClr val="FFFFFF"/>
                 </a:solidFill>
               </a:rPr>
-              <a:t>저장/저장</a:t>
-            </a:r>
-          </a:p>
-        </p:txBody>
-      </p:sp>
-      <p:sp>
-        <p:nvSpPr>
-          <p:cNvPr id="8" name="Rectangle 7"/>
-          <p:cNvSpPr/>
-          <p:nvPr/>
-        </p:nvSpPr>
-        <p:spPr>
-          <a:xfrm>
-            <a:off x="457200" y="2743200"/>
-            <a:ext cx="8229600" cy="2286000"/>
-          </a:xfrm>
-          <a:prstGeom prst="rect">
-            <a:avLst/>
-          </a:prstGeom>
-          <a:solidFill>
-            <a:srgbClr val="F5F5FF"/>
-          </a:solidFill>
-        </p:spPr>
-        <p:style>
-          <a:lnRef idx="1">
-            <a:schemeClr val="accent1"/>
-          </a:lnRef>
-          <a:fillRef idx="3">
-            <a:schemeClr val="accent1"/>
-          </a:fillRef>
-          <a:effectRef idx="2">
-            <a:schemeClr val="accent1"/>
-          </a:effectRef>
-          <a:fontRef idx="minor">
-            <a:schemeClr val="lt1"/>
-          </a:fontRef>
-        </p:style>
-        <p:txBody>
-          <a:bodyPr rtlCol="0" anchor="ctr"/>
-          <a:lstStyle/>
-          <a:p>
-            <a:pPr algn="ctr"/>
-            <a:r>
-              <a:rPr sz="1200">
-                <a:solidFill>
-                  <a:srgbClr val="FFFFFF"/>
-                </a:solidFill>
-              </a:rPr>
-              <a:t>중단 영역 (목록 리스트 또는 전표 디테일 라인)</a:t>
-            </a:r>
-          </a:p>
-          <a:p>
-            <a:pPr algn="ctr"/>
-          </a:p>
-          <a:p>
-            <a:pPr algn="ctr"/>
-            <a:r>
-              <a:rPr sz="1200">
-                <a:solidFill>
-                  <a:srgbClr val="FFFFFF"/>
-                </a:solidFill>
-              </a:rPr>
-              <a:t>[ Data Grid ]</a:t>
-            </a:r>
-          </a:p>
-        </p:txBody>
-      </p:sp>
-      <p:sp>
-        <p:nvSpPr>
-          <p:cNvPr id="9" name="Rectangle 8"/>
-          <p:cNvSpPr/>
-          <p:nvPr/>
-        </p:nvSpPr>
-        <p:spPr>
-          <a:xfrm>
-            <a:off x="457200" y="5486400"/>
-            <a:ext cx="8229600" cy="1097280"/>
-          </a:xfrm>
-          <a:prstGeom prst="rect">
-            <a:avLst/>
-          </a:prstGeom>
-          <a:solidFill>
-            <a:srgbClr val="FFF5F5"/>
-          </a:solidFill>
-        </p:spPr>
-        <p:style>
-          <a:lnRef idx="1">
-            <a:schemeClr val="accent1"/>
-          </a:lnRef>
-          <a:fillRef idx="3">
-            <a:schemeClr val="accent1"/>
-          </a:fillRef>
-          <a:effectRef idx="2">
-            <a:schemeClr val="accent1"/>
-          </a:effectRef>
-          <a:fontRef idx="minor">
-            <a:schemeClr val="lt1"/>
-          </a:fontRef>
-        </p:style>
-        <p:txBody>
-          <a:bodyPr rtlCol="0" anchor="ctr"/>
-          <a:lstStyle/>
-          <a:p>
-            <a:pPr algn="ctr"/>
-            <a:r>
-              <a:rPr sz="1200">
-                <a:solidFill>
-                  <a:srgbClr val="FFFFFF"/>
-                </a:solidFill>
-              </a:rPr>
-              <a:t>하단 영역 (상세 정보 탭 또는 합계 영역)</a:t>
-            </a:r>
-          </a:p>
-        </p:txBody>
-      </p:sp>
-      <p:sp>
-        <p:nvSpPr>
-          <p:cNvPr id="10" name="TextBox 9"/>
+              <a:t>총 합계: 000,000 원</a:t>
+            </a:r>
+          </a:p>
+        </p:txBody>
+      </p:sp>
+      <p:sp>
+        <p:nvSpPr>
+          <p:cNvPr id="8" name="TextBox 7"/>
           <p:cNvSpPr txBox="1"/>
           <p:nvPr/>
         </p:nvSpPr>
@@ -5460,7 +5302,7 @@
               </a:defRPr>
             </a:pPr>
             <a:r>
-              <a:t>주요 기능: 입고 대상 상품 리스트 그리드 (행 추가/삭제 기능)</a:t>
+              <a:t>주요 기능: 설계서 참조</a:t>
             </a:r>
           </a:p>
         </p:txBody>
@@ -5523,7 +5365,7 @@
         <p:spPr>
           <a:xfrm>
             <a:off x="457200" y="914400"/>
-            <a:ext cx="8229600" cy="1371600"/>
+            <a:ext cx="8229600" cy="914400"/>
           </a:xfrm>
           <a:prstGeom prst="rect">
             <a:avLst/>
@@ -5557,25 +5399,28 @@
                   <a:srgbClr val="FFFFFF"/>
                 </a:solidFill>
               </a:rPr>
-              <a:t>상단 영역 (검색 조건 또는 마스터 폼)</a:t>
-            </a:r>
-          </a:p>
-        </p:txBody>
-      </p:sp>
-      <p:sp>
-        <p:nvSpPr>
-          <p:cNvPr id="4" name="Rounded Rectangle 3"/>
+              <a:t>마스터 정보: 전표일자 | 거래처 선택 | 담당자 | 거래유형(공통코드)</a:t>
+            </a:r>
+          </a:p>
+        </p:txBody>
+      </p:sp>
+      <p:sp>
+        <p:nvSpPr>
+          <p:cNvPr id="4" name="Rectangle 3"/>
           <p:cNvSpPr/>
           <p:nvPr/>
         </p:nvSpPr>
         <p:spPr>
           <a:xfrm>
-            <a:off x="914400" y="1371600"/>
-            <a:ext cx="1828800" cy="274320"/>
-          </a:xfrm>
-          <a:prstGeom prst="roundRect">
-            <a:avLst/>
-          </a:prstGeom>
+            <a:off x="457200" y="2011680"/>
+            <a:ext cx="8229600" cy="731520"/>
+          </a:xfrm>
+          <a:prstGeom prst="rect">
+            <a:avLst/>
+          </a:prstGeom>
+          <a:solidFill>
+            <a:srgbClr val="FFF0C8"/>
+          </a:solidFill>
         </p:spPr>
         <p:style>
           <a:lnRef idx="1">
@@ -5599,10 +5444,10 @@
             <a:r>
               <a:rPr sz="1200">
                 <a:solidFill>
-                  <a:srgbClr val="000000"/>
+                  <a:srgbClr val="FFFFFF"/>
                 </a:solidFill>
               </a:rPr>
-              <a:t>검색어/입력란 1</a:t>
+              <a:t>빠른 입력: [상품코드/명 검색]  [수량(박스/본)]</a:t>
             </a:r>
           </a:p>
         </p:txBody>
@@ -5615,12 +5460,15 @@
         </p:nvSpPr>
         <p:spPr>
           <a:xfrm>
-            <a:off x="3200400" y="1371600"/>
-            <a:ext cx="1828800" cy="274320"/>
+            <a:off x="6858000" y="2194560"/>
+            <a:ext cx="1645920" cy="365760"/>
           </a:xfrm>
           <a:prstGeom prst="roundRect">
             <a:avLst/>
           </a:prstGeom>
+          <a:solidFill>
+            <a:srgbClr val="0070C0"/>
+          </a:solidFill>
         </p:spPr>
         <p:style>
           <a:lnRef idx="1">
@@ -5644,30 +5492,30 @@
             <a:r>
               <a:rPr sz="1200">
                 <a:solidFill>
-                  <a:srgbClr val="000000"/>
+                  <a:srgbClr val="FFFFFF"/>
                 </a:solidFill>
               </a:rPr>
-              <a:t>검색어/입력란 2</a:t>
-            </a:r>
-          </a:p>
-        </p:txBody>
-      </p:sp>
-      <p:sp>
-        <p:nvSpPr>
-          <p:cNvPr id="6" name="Rounded Rectangle 5"/>
+              <a:t>엔터(Enter)/저장</a:t>
+            </a:r>
+          </a:p>
+        </p:txBody>
+      </p:sp>
+      <p:sp>
+        <p:nvSpPr>
+          <p:cNvPr id="6" name="Rectangle 5"/>
           <p:cNvSpPr/>
           <p:nvPr/>
         </p:nvSpPr>
         <p:spPr>
           <a:xfrm>
-            <a:off x="6858000" y="365760"/>
-            <a:ext cx="731520" cy="274320"/>
-          </a:xfrm>
-          <a:prstGeom prst="roundRect">
+            <a:off x="457200" y="2926080"/>
+            <a:ext cx="8229600" cy="2286000"/>
+          </a:xfrm>
+          <a:prstGeom prst="rect">
             <a:avLst/>
           </a:prstGeom>
           <a:solidFill>
-            <a:srgbClr val="0070C0"/>
+            <a:srgbClr val="F5F5FF"/>
           </a:solidFill>
         </p:spPr>
         <p:style>
@@ -5690,32 +5538,68 @@
           <a:p>
             <a:pPr algn="ctr"/>
             <a:r>
-              <a:rPr sz="1000">
+              <a:rPr sz="1200">
                 <a:solidFill>
                   <a:srgbClr val="FFFFFF"/>
                 </a:solidFill>
               </a:rPr>
-              <a:t>조회/신규</a:t>
-            </a:r>
-          </a:p>
-        </p:txBody>
-      </p:sp>
-      <p:sp>
-        <p:nvSpPr>
-          <p:cNvPr id="7" name="Rounded Rectangle 6"/>
+              <a:t>전표 라인 리스트 (Data Grid)</a:t>
+            </a:r>
+          </a:p>
+          <a:p>
+            <a:pPr algn="ctr"/>
+            <a:r>
+              <a:rPr sz="1200">
+                <a:solidFill>
+                  <a:srgbClr val="FFFFFF"/>
+                </a:solidFill>
+              </a:rPr>
+              <a:t>(수정 후 엔터 시 즉시 반영)</a:t>
+            </a:r>
+          </a:p>
+          <a:p>
+            <a:pPr algn="ctr"/>
+          </a:p>
+          <a:p>
+            <a:pPr algn="ctr"/>
+            <a:r>
+              <a:rPr sz="1200">
+                <a:solidFill>
+                  <a:srgbClr val="FFFFFF"/>
+                </a:solidFill>
+              </a:rPr>
+              <a:t>라인1: 상품A | 수량 | 단가 | [삭제 버튼]</a:t>
+            </a:r>
+          </a:p>
+          <a:p>
+            <a:pPr algn="ctr"/>
+            <a:r>
+              <a:rPr sz="1200">
+                <a:solidFill>
+                  <a:srgbClr val="FFFFFF"/>
+                </a:solidFill>
+              </a:rPr>
+              <a:t>라인2: 상품B | 수량 | 단가 | [삭제 버튼]</a:t>
+            </a:r>
+          </a:p>
+        </p:txBody>
+      </p:sp>
+      <p:sp>
+        <p:nvSpPr>
+          <p:cNvPr id="7" name="Rectangle 6"/>
           <p:cNvSpPr/>
           <p:nvPr/>
         </p:nvSpPr>
         <p:spPr>
           <a:xfrm>
-            <a:off x="7772400" y="365760"/>
-            <a:ext cx="731520" cy="274320"/>
-          </a:xfrm>
-          <a:prstGeom prst="roundRect">
+            <a:off x="457200" y="5394960"/>
+            <a:ext cx="8229600" cy="731520"/>
+          </a:xfrm>
+          <a:prstGeom prst="rect">
             <a:avLst/>
           </a:prstGeom>
           <a:solidFill>
-            <a:srgbClr val="00B050"/>
+            <a:srgbClr val="DCDCDC"/>
           </a:solidFill>
         </p:spPr>
         <p:style>
@@ -5738,129 +5622,19 @@
           <a:p>
             <a:pPr algn="ctr"/>
             <a:r>
-              <a:rPr sz="1000">
+              <a:rPr sz="1200">
                 <a:solidFill>
                   <a:srgbClr val="FFFFFF"/>
                 </a:solidFill>
               </a:rPr>
-              <a:t>저장/저장</a:t>
-            </a:r>
-          </a:p>
-        </p:txBody>
-      </p:sp>
-      <p:sp>
-        <p:nvSpPr>
-          <p:cNvPr id="8" name="Rectangle 7"/>
-          <p:cNvSpPr/>
-          <p:nvPr/>
-        </p:nvSpPr>
-        <p:spPr>
-          <a:xfrm>
-            <a:off x="457200" y="2743200"/>
-            <a:ext cx="8229600" cy="2286000"/>
-          </a:xfrm>
-          <a:prstGeom prst="rect">
-            <a:avLst/>
-          </a:prstGeom>
-          <a:solidFill>
-            <a:srgbClr val="F5F5FF"/>
-          </a:solidFill>
-        </p:spPr>
-        <p:style>
-          <a:lnRef idx="1">
-            <a:schemeClr val="accent1"/>
-          </a:lnRef>
-          <a:fillRef idx="3">
-            <a:schemeClr val="accent1"/>
-          </a:fillRef>
-          <a:effectRef idx="2">
-            <a:schemeClr val="accent1"/>
-          </a:effectRef>
-          <a:fontRef idx="minor">
-            <a:schemeClr val="lt1"/>
-          </a:fontRef>
-        </p:style>
-        <p:txBody>
-          <a:bodyPr rtlCol="0" anchor="ctr"/>
-          <a:lstStyle/>
-          <a:p>
-            <a:pPr algn="ctr"/>
-            <a:r>
-              <a:rPr sz="1200">
-                <a:solidFill>
-                  <a:srgbClr val="FFFFFF"/>
-                </a:solidFill>
-              </a:rPr>
-              <a:t>중단 영역 (목록 리스트 또는 전표 디테일 라인)</a:t>
-            </a:r>
-          </a:p>
-          <a:p>
-            <a:pPr algn="ctr"/>
-          </a:p>
-          <a:p>
-            <a:pPr algn="ctr"/>
-            <a:r>
-              <a:rPr sz="1200">
-                <a:solidFill>
-                  <a:srgbClr val="FFFFFF"/>
-                </a:solidFill>
-              </a:rPr>
-              <a:t>[ Data Grid ]</a:t>
-            </a:r>
-          </a:p>
-        </p:txBody>
-      </p:sp>
-      <p:sp>
-        <p:nvSpPr>
-          <p:cNvPr id="9" name="Rectangle 8"/>
-          <p:cNvSpPr/>
-          <p:nvPr/>
-        </p:nvSpPr>
-        <p:spPr>
-          <a:xfrm>
-            <a:off x="457200" y="5486400"/>
-            <a:ext cx="8229600" cy="1097280"/>
-          </a:xfrm>
-          <a:prstGeom prst="rect">
-            <a:avLst/>
-          </a:prstGeom>
-          <a:solidFill>
-            <a:srgbClr val="FFF5F5"/>
-          </a:solidFill>
-        </p:spPr>
-        <p:style>
-          <a:lnRef idx="1">
-            <a:schemeClr val="accent1"/>
-          </a:lnRef>
-          <a:fillRef idx="3">
-            <a:schemeClr val="accent1"/>
-          </a:fillRef>
-          <a:effectRef idx="2">
-            <a:schemeClr val="accent1"/>
-          </a:effectRef>
-          <a:fontRef idx="minor">
-            <a:schemeClr val="lt1"/>
-          </a:fontRef>
-        </p:style>
-        <p:txBody>
-          <a:bodyPr rtlCol="0" anchor="ctr"/>
-          <a:lstStyle/>
-          <a:p>
-            <a:pPr algn="ctr"/>
-            <a:r>
-              <a:rPr sz="1200">
-                <a:solidFill>
-                  <a:srgbClr val="FFFFFF"/>
-                </a:solidFill>
-              </a:rPr>
-              <a:t>하단 영역 (상세 정보 탭 또는 합계 영역)</a:t>
-            </a:r>
-          </a:p>
-        </p:txBody>
-      </p:sp>
-      <p:sp>
-        <p:nvSpPr>
-          <p:cNvPr id="10" name="TextBox 9"/>
+              <a:t>총 합계: 000,000 원</a:t>
+            </a:r>
+          </a:p>
+        </p:txBody>
+      </p:sp>
+      <p:sp>
+        <p:nvSpPr>
+          <p:cNvPr id="8" name="TextBox 7"/>
           <p:cNvSpPr txBox="1"/>
           <p:nvPr/>
         </p:nvSpPr>
@@ -5888,7 +5662,7 @@
               </a:defRPr>
             </a:pPr>
             <a:r>
-              <a:t>주요 기능: 출고/소비 대상 상품 리스트 그리드 (행 추가/삭제 기능)</a:t>
+              <a:t>주요 기능: 설계서 참조</a:t>
             </a:r>
           </a:p>
         </p:txBody>
@@ -5944,20 +5718,20 @@
       </p:sp>
       <p:sp>
         <p:nvSpPr>
-          <p:cNvPr id="3" name="Rectangle 2"/>
+          <p:cNvPr id="3" name="Rounded Rectangle 2"/>
           <p:cNvSpPr/>
           <p:nvPr/>
         </p:nvSpPr>
         <p:spPr>
           <a:xfrm>
             <a:off x="457200" y="914400"/>
-            <a:ext cx="8229600" cy="1371600"/>
-          </a:xfrm>
-          <a:prstGeom prst="rect">
+            <a:ext cx="1371600" cy="365760"/>
+          </a:xfrm>
+          <a:prstGeom prst="roundRect">
             <a:avLst/>
           </a:prstGeom>
           <a:solidFill>
-            <a:srgbClr val="F0F0F0"/>
+            <a:srgbClr val="0070C0"/>
           </a:solidFill>
         </p:spPr>
         <p:style>
@@ -5985,7 +5759,7 @@
                   <a:srgbClr val="FFFFFF"/>
                 </a:solidFill>
               </a:rPr>
-              <a:t>상단 영역 (검색 조건 또는 마스터 폼)</a:t>
+              <a:t>일마감 탭</a:t>
             </a:r>
           </a:p>
         </p:txBody>
@@ -5998,12 +5772,15 @@
         </p:nvSpPr>
         <p:spPr>
           <a:xfrm>
-            <a:off x="914400" y="1371600"/>
-            <a:ext cx="1828800" cy="274320"/>
+            <a:off x="1920240" y="914400"/>
+            <a:ext cx="1371600" cy="365760"/>
           </a:xfrm>
           <a:prstGeom prst="roundRect">
             <a:avLst/>
           </a:prstGeom>
+          <a:solidFill>
+            <a:srgbClr val="C8C8C8"/>
+          </a:solidFill>
         </p:spPr>
         <p:style>
           <a:lnRef idx="1">
@@ -6030,25 +5807,28 @@
                   <a:srgbClr val="000000"/>
                 </a:solidFill>
               </a:rPr>
-              <a:t>검색어/입력란 1</a:t>
-            </a:r>
-          </a:p>
-        </p:txBody>
-      </p:sp>
-      <p:sp>
-        <p:nvSpPr>
-          <p:cNvPr id="5" name="Rounded Rectangle 4"/>
+              <a:t>월마감 탭</a:t>
+            </a:r>
+          </a:p>
+        </p:txBody>
+      </p:sp>
+      <p:sp>
+        <p:nvSpPr>
+          <p:cNvPr id="5" name="Rectangle 4"/>
           <p:cNvSpPr/>
           <p:nvPr/>
         </p:nvSpPr>
         <p:spPr>
           <a:xfrm>
-            <a:off x="3200400" y="1371600"/>
-            <a:ext cx="1828800" cy="274320"/>
-          </a:xfrm>
-          <a:prstGeom prst="roundRect">
-            <a:avLst/>
-          </a:prstGeom>
+            <a:off x="457200" y="1371600"/>
+            <a:ext cx="5486400" cy="4114800"/>
+          </a:xfrm>
+          <a:prstGeom prst="rect">
+            <a:avLst/>
+          </a:prstGeom>
+          <a:solidFill>
+            <a:srgbClr val="F0F0F0"/>
+          </a:solidFill>
         </p:spPr>
         <p:style>
           <a:lnRef idx="1">
@@ -6072,30 +5852,69 @@
             <a:r>
               <a:rPr sz="1200">
                 <a:solidFill>
-                  <a:srgbClr val="000000"/>
+                  <a:srgbClr val="FFFFFF"/>
                 </a:solidFill>
               </a:rPr>
-              <a:t>검색어/입력란 2</a:t>
-            </a:r>
-          </a:p>
-        </p:txBody>
-      </p:sp>
-      <p:sp>
-        <p:nvSpPr>
-          <p:cNvPr id="6" name="Rounded Rectangle 5"/>
+              <a:t>[ 달력 (Calendar) UI ]</a:t>
+            </a:r>
+          </a:p>
+          <a:p>
+            <a:pPr algn="ctr"/>
+          </a:p>
+          <a:p>
+            <a:pPr algn="ctr"/>
+            <a:r>
+              <a:rPr sz="1200">
+                <a:solidFill>
+                  <a:srgbClr val="FFFFFF"/>
+                </a:solidFill>
+              </a:rPr>
+              <a:t>1  2  3  4  5  6  7</a:t>
+            </a:r>
+          </a:p>
+          <a:p>
+            <a:pPr algn="ctr"/>
+            <a:r>
+              <a:rPr sz="1200">
+                <a:solidFill>
+                  <a:srgbClr val="FFFFFF"/>
+                </a:solidFill>
+              </a:rPr>
+              <a:t>...</a:t>
+            </a:r>
+          </a:p>
+          <a:p>
+            <a:pPr algn="ctr"/>
+          </a:p>
+          <a:p>
+            <a:pPr algn="ctr"/>
+            <a:r>
+              <a:rPr sz="1200">
+                <a:solidFill>
+                  <a:srgbClr val="FFFFFF"/>
+                </a:solidFill>
+              </a:rPr>
+              <a:t>마감된 일자는 색상/스탬프 표시</a:t>
+            </a:r>
+          </a:p>
+        </p:txBody>
+      </p:sp>
+      <p:sp>
+        <p:nvSpPr>
+          <p:cNvPr id="6" name="Rectangle 5"/>
           <p:cNvSpPr/>
           <p:nvPr/>
         </p:nvSpPr>
         <p:spPr>
           <a:xfrm>
-            <a:off x="6858000" y="365760"/>
-            <a:ext cx="731520" cy="274320"/>
-          </a:xfrm>
-          <a:prstGeom prst="roundRect">
+            <a:off x="6126480" y="1371600"/>
+            <a:ext cx="2560320" cy="4114800"/>
+          </a:xfrm>
+          <a:prstGeom prst="rect">
             <a:avLst/>
           </a:prstGeom>
           <a:solidFill>
-            <a:srgbClr val="0070C0"/>
+            <a:srgbClr val="F5F5FF"/>
           </a:solidFill>
         </p:spPr>
         <p:style>
@@ -6118,12 +5937,48 @@
           <a:p>
             <a:pPr algn="ctr"/>
             <a:r>
-              <a:rPr sz="1000">
+              <a:rPr sz="1200">
                 <a:solidFill>
                   <a:srgbClr val="FFFFFF"/>
                 </a:solidFill>
               </a:rPr>
-              <a:t>조회/신규</a:t>
+              <a:t>선택 일자 현황</a:t>
+            </a:r>
+          </a:p>
+          <a:p>
+            <a:pPr algn="ctr"/>
+          </a:p>
+          <a:p>
+            <a:pPr algn="ctr"/>
+            <a:r>
+              <a:rPr sz="1200">
+                <a:solidFill>
+                  <a:srgbClr val="FFFFFF"/>
+                </a:solidFill>
+              </a:rPr>
+              <a:t>총 매입: 000</a:t>
+            </a:r>
+          </a:p>
+          <a:p>
+            <a:pPr algn="ctr"/>
+            <a:r>
+              <a:rPr sz="1200">
+                <a:solidFill>
+                  <a:srgbClr val="FFFFFF"/>
+                </a:solidFill>
+              </a:rPr>
+              <a:t>총 매출: 000</a:t>
+            </a:r>
+          </a:p>
+          <a:p>
+            <a:pPr algn="ctr"/>
+            <a:r>
+              <a:rPr sz="1200">
+                <a:solidFill>
+                  <a:srgbClr val="FFFFFF"/>
+                </a:solidFill>
+              </a:rPr>
+              <a:t>미수금: 000</a:t>
             </a:r>
           </a:p>
         </p:txBody>
@@ -6136,8 +5991,8 @@
         </p:nvSpPr>
         <p:spPr>
           <a:xfrm>
-            <a:off x="7772400" y="365760"/>
-            <a:ext cx="731520" cy="274320"/>
+            <a:off x="6400800" y="5669280"/>
+            <a:ext cx="1097280" cy="365760"/>
           </a:xfrm>
           <a:prstGeom prst="roundRect">
             <a:avLst/>
@@ -6166,32 +6021,32 @@
           <a:p>
             <a:pPr algn="ctr"/>
             <a:r>
-              <a:rPr sz="1000">
+              <a:rPr sz="1200">
                 <a:solidFill>
                   <a:srgbClr val="FFFFFF"/>
                 </a:solidFill>
               </a:rPr>
-              <a:t>저장/저장</a:t>
-            </a:r>
-          </a:p>
-        </p:txBody>
-      </p:sp>
-      <p:sp>
-        <p:nvSpPr>
-          <p:cNvPr id="8" name="Rectangle 7"/>
+              <a:t>마감 처리</a:t>
+            </a:r>
+          </a:p>
+        </p:txBody>
+      </p:sp>
+      <p:sp>
+        <p:nvSpPr>
+          <p:cNvPr id="8" name="Rounded Rectangle 7"/>
           <p:cNvSpPr/>
           <p:nvPr/>
         </p:nvSpPr>
         <p:spPr>
           <a:xfrm>
-            <a:off x="457200" y="2743200"/>
-            <a:ext cx="8229600" cy="2286000"/>
-          </a:xfrm>
-          <a:prstGeom prst="rect">
+            <a:off x="7589520" y="5669280"/>
+            <a:ext cx="1097280" cy="365760"/>
+          </a:xfrm>
+          <a:prstGeom prst="roundRect">
             <a:avLst/>
           </a:prstGeom>
           <a:solidFill>
-            <a:srgbClr val="F5F5FF"/>
+            <a:srgbClr val="FF0000"/>
           </a:solidFill>
         </p:spPr>
         <p:style>
@@ -6219,76 +6074,14 @@
                   <a:srgbClr val="FFFFFF"/>
                 </a:solidFill>
               </a:rPr>
-              <a:t>중단 영역 (목록 리스트 또는 전표 디테일 라인)</a:t>
-            </a:r>
-          </a:p>
-          <a:p>
-            <a:pPr algn="ctr"/>
-          </a:p>
-          <a:p>
-            <a:pPr algn="ctr"/>
-            <a:r>
-              <a:rPr sz="1200">
-                <a:solidFill>
-                  <a:srgbClr val="FFFFFF"/>
-                </a:solidFill>
-              </a:rPr>
-              <a:t>[ Data Grid ]</a:t>
-            </a:r>
-          </a:p>
-        </p:txBody>
-      </p:sp>
-      <p:sp>
-        <p:nvSpPr>
-          <p:cNvPr id="9" name="Rectangle 8"/>
-          <p:cNvSpPr/>
-          <p:nvPr/>
-        </p:nvSpPr>
-        <p:spPr>
-          <a:xfrm>
-            <a:off x="457200" y="5486400"/>
-            <a:ext cx="8229600" cy="1097280"/>
-          </a:xfrm>
-          <a:prstGeom prst="rect">
-            <a:avLst/>
-          </a:prstGeom>
-          <a:solidFill>
-            <a:srgbClr val="FFF5F5"/>
-          </a:solidFill>
-        </p:spPr>
-        <p:style>
-          <a:lnRef idx="1">
-            <a:schemeClr val="accent1"/>
-          </a:lnRef>
-          <a:fillRef idx="3">
-            <a:schemeClr val="accent1"/>
-          </a:fillRef>
-          <a:effectRef idx="2">
-            <a:schemeClr val="accent1"/>
-          </a:effectRef>
-          <a:fontRef idx="minor">
-            <a:schemeClr val="lt1"/>
-          </a:fontRef>
-        </p:style>
-        <p:txBody>
-          <a:bodyPr rtlCol="0" anchor="ctr"/>
-          <a:lstStyle/>
-          <a:p>
-            <a:pPr algn="ctr"/>
-            <a:r>
-              <a:rPr sz="1200">
-                <a:solidFill>
-                  <a:srgbClr val="FFFFFF"/>
-                </a:solidFill>
-              </a:rPr>
-              <a:t>하단 영역 (상세 정보 탭 또는 합계 영역)</a:t>
-            </a:r>
-          </a:p>
-        </p:txBody>
-      </p:sp>
-      <p:sp>
-        <p:nvSpPr>
-          <p:cNvPr id="10" name="TextBox 9"/>
+              <a:t>마감 취소</a:t>
+            </a:r>
+          </a:p>
+        </p:txBody>
+      </p:sp>
+      <p:sp>
+        <p:nvSpPr>
+          <p:cNvPr id="9" name="TextBox 8"/>
           <p:cNvSpPr txBox="1"/>
           <p:nvPr/>
         </p:nvSpPr>
@@ -6511,7 +6304,7 @@
         <p:spPr>
           <a:xfrm>
             <a:off x="457200" y="914400"/>
-            <a:ext cx="8229600" cy="5486400"/>
+            <a:ext cx="8229600" cy="1371600"/>
           </a:xfrm>
           <a:prstGeom prst="rect">
             <a:avLst/>
@@ -6545,14 +6338,265 @@
                   <a:srgbClr val="FFFFFF"/>
                 </a:solidFill>
               </a:rPr>
-              <a:t>화면 구성 영역 (상세 내용은 설계서 참조)</a:t>
-            </a:r>
-          </a:p>
-        </p:txBody>
-      </p:sp>
-      <p:sp>
-        <p:nvSpPr>
-          <p:cNvPr id="4" name="TextBox 3"/>
+              <a:t>상단 영역 (검색 조건 또는 마스터 폼)</a:t>
+            </a:r>
+          </a:p>
+        </p:txBody>
+      </p:sp>
+      <p:sp>
+        <p:nvSpPr>
+          <p:cNvPr id="4" name="Rounded Rectangle 3"/>
+          <p:cNvSpPr/>
+          <p:nvPr/>
+        </p:nvSpPr>
+        <p:spPr>
+          <a:xfrm>
+            <a:off x="914400" y="1371600"/>
+            <a:ext cx="1828800" cy="274320"/>
+          </a:xfrm>
+          <a:prstGeom prst="roundRect">
+            <a:avLst/>
+          </a:prstGeom>
+        </p:spPr>
+        <p:style>
+          <a:lnRef idx="1">
+            <a:schemeClr val="accent1"/>
+          </a:lnRef>
+          <a:fillRef idx="3">
+            <a:schemeClr val="accent1"/>
+          </a:fillRef>
+          <a:effectRef idx="2">
+            <a:schemeClr val="accent1"/>
+          </a:effectRef>
+          <a:fontRef idx="minor">
+            <a:schemeClr val="lt1"/>
+          </a:fontRef>
+        </p:style>
+        <p:txBody>
+          <a:bodyPr rtlCol="0" anchor="ctr"/>
+          <a:lstStyle/>
+          <a:p>
+            <a:pPr algn="ctr"/>
+            <a:r>
+              <a:rPr sz="1200">
+                <a:solidFill>
+                  <a:srgbClr val="000000"/>
+                </a:solidFill>
+              </a:rPr>
+              <a:t>검색어/입력란 1</a:t>
+            </a:r>
+          </a:p>
+        </p:txBody>
+      </p:sp>
+      <p:sp>
+        <p:nvSpPr>
+          <p:cNvPr id="5" name="Rounded Rectangle 4"/>
+          <p:cNvSpPr/>
+          <p:nvPr/>
+        </p:nvSpPr>
+        <p:spPr>
+          <a:xfrm>
+            <a:off x="6858000" y="365760"/>
+            <a:ext cx="731520" cy="274320"/>
+          </a:xfrm>
+          <a:prstGeom prst="roundRect">
+            <a:avLst/>
+          </a:prstGeom>
+          <a:solidFill>
+            <a:srgbClr val="0070C0"/>
+          </a:solidFill>
+        </p:spPr>
+        <p:style>
+          <a:lnRef idx="1">
+            <a:schemeClr val="accent1"/>
+          </a:lnRef>
+          <a:fillRef idx="3">
+            <a:schemeClr val="accent1"/>
+          </a:fillRef>
+          <a:effectRef idx="2">
+            <a:schemeClr val="accent1"/>
+          </a:effectRef>
+          <a:fontRef idx="minor">
+            <a:schemeClr val="lt1"/>
+          </a:fontRef>
+        </p:style>
+        <p:txBody>
+          <a:bodyPr rtlCol="0" anchor="ctr"/>
+          <a:lstStyle/>
+          <a:p>
+            <a:pPr algn="ctr"/>
+            <a:r>
+              <a:rPr sz="1000">
+                <a:solidFill>
+                  <a:srgbClr val="FFFFFF"/>
+                </a:solidFill>
+              </a:rPr>
+              <a:t>조회/신규</a:t>
+            </a:r>
+          </a:p>
+        </p:txBody>
+      </p:sp>
+      <p:sp>
+        <p:nvSpPr>
+          <p:cNvPr id="6" name="Rounded Rectangle 5"/>
+          <p:cNvSpPr/>
+          <p:nvPr/>
+        </p:nvSpPr>
+        <p:spPr>
+          <a:xfrm>
+            <a:off x="7772400" y="365760"/>
+            <a:ext cx="731520" cy="274320"/>
+          </a:xfrm>
+          <a:prstGeom prst="roundRect">
+            <a:avLst/>
+          </a:prstGeom>
+          <a:solidFill>
+            <a:srgbClr val="00B050"/>
+          </a:solidFill>
+        </p:spPr>
+        <p:style>
+          <a:lnRef idx="1">
+            <a:schemeClr val="accent1"/>
+          </a:lnRef>
+          <a:fillRef idx="3">
+            <a:schemeClr val="accent1"/>
+          </a:fillRef>
+          <a:effectRef idx="2">
+            <a:schemeClr val="accent1"/>
+          </a:effectRef>
+          <a:fontRef idx="minor">
+            <a:schemeClr val="lt1"/>
+          </a:fontRef>
+        </p:style>
+        <p:txBody>
+          <a:bodyPr rtlCol="0" anchor="ctr"/>
+          <a:lstStyle/>
+          <a:p>
+            <a:pPr algn="ctr"/>
+            <a:r>
+              <a:rPr sz="1000">
+                <a:solidFill>
+                  <a:srgbClr val="FFFFFF"/>
+                </a:solidFill>
+              </a:rPr>
+              <a:t>저장/저장</a:t>
+            </a:r>
+          </a:p>
+        </p:txBody>
+      </p:sp>
+      <p:sp>
+        <p:nvSpPr>
+          <p:cNvPr id="7" name="Rectangle 6"/>
+          <p:cNvSpPr/>
+          <p:nvPr/>
+        </p:nvSpPr>
+        <p:spPr>
+          <a:xfrm>
+            <a:off x="457200" y="2743200"/>
+            <a:ext cx="8229600" cy="2286000"/>
+          </a:xfrm>
+          <a:prstGeom prst="rect">
+            <a:avLst/>
+          </a:prstGeom>
+          <a:solidFill>
+            <a:srgbClr val="F5F5FF"/>
+          </a:solidFill>
+        </p:spPr>
+        <p:style>
+          <a:lnRef idx="1">
+            <a:schemeClr val="accent1"/>
+          </a:lnRef>
+          <a:fillRef idx="3">
+            <a:schemeClr val="accent1"/>
+          </a:fillRef>
+          <a:effectRef idx="2">
+            <a:schemeClr val="accent1"/>
+          </a:effectRef>
+          <a:fontRef idx="minor">
+            <a:schemeClr val="lt1"/>
+          </a:fontRef>
+        </p:style>
+        <p:txBody>
+          <a:bodyPr rtlCol="0" anchor="ctr"/>
+          <a:lstStyle/>
+          <a:p>
+            <a:pPr algn="ctr"/>
+            <a:r>
+              <a:rPr sz="1200">
+                <a:solidFill>
+                  <a:srgbClr val="FFFFFF"/>
+                </a:solidFill>
+              </a:rPr>
+              <a:t>중단 영역 (목록 리스트 또는 전표 디테일 라인)</a:t>
+            </a:r>
+          </a:p>
+          <a:p>
+            <a:pPr algn="ctr"/>
+          </a:p>
+          <a:p>
+            <a:pPr algn="ctr"/>
+            <a:r>
+              <a:rPr sz="1200">
+                <a:solidFill>
+                  <a:srgbClr val="FFFFFF"/>
+                </a:solidFill>
+              </a:rPr>
+              <a:t>[ Data Grid ]</a:t>
+            </a:r>
+          </a:p>
+        </p:txBody>
+      </p:sp>
+      <p:sp>
+        <p:nvSpPr>
+          <p:cNvPr id="8" name="Rectangle 7"/>
+          <p:cNvSpPr/>
+          <p:nvPr/>
+        </p:nvSpPr>
+        <p:spPr>
+          <a:xfrm>
+            <a:off x="457200" y="5486400"/>
+            <a:ext cx="8229600" cy="1097280"/>
+          </a:xfrm>
+          <a:prstGeom prst="rect">
+            <a:avLst/>
+          </a:prstGeom>
+          <a:solidFill>
+            <a:srgbClr val="FFF5F5"/>
+          </a:solidFill>
+        </p:spPr>
+        <p:style>
+          <a:lnRef idx="1">
+            <a:schemeClr val="accent1"/>
+          </a:lnRef>
+          <a:fillRef idx="3">
+            <a:schemeClr val="accent1"/>
+          </a:fillRef>
+          <a:effectRef idx="2">
+            <a:schemeClr val="accent1"/>
+          </a:effectRef>
+          <a:fontRef idx="minor">
+            <a:schemeClr val="lt1"/>
+          </a:fontRef>
+        </p:style>
+        <p:txBody>
+          <a:bodyPr rtlCol="0" anchor="ctr"/>
+          <a:lstStyle/>
+          <a:p>
+            <a:pPr algn="ctr"/>
+            <a:r>
+              <a:rPr sz="1200">
+                <a:solidFill>
+                  <a:srgbClr val="FFFFFF"/>
+                </a:solidFill>
+              </a:rPr>
+              <a:t>하단 영역 (상세 정보 탭 또는 합계 영역)</a:t>
+            </a:r>
+          </a:p>
+        </p:txBody>
+      </p:sp>
+      <p:sp>
+        <p:nvSpPr>
+          <p:cNvPr id="9" name="TextBox 8"/>
           <p:cNvSpPr txBox="1"/>
           <p:nvPr/>
         </p:nvSpPr>

--- a/02_설계/화면정의서.pptx
+++ b/02_설계/화면정의서.pptx
@@ -3721,7 +3721,7 @@
                   <a:srgbClr val="000000"/>
                 </a:solidFill>
               </a:rPr>
-              <a:t>입력 필드 1 (예: 기본 정보)</a:t>
+              <a:t>입력 필드 1 (기본 정보)</a:t>
             </a:r>
           </a:p>
         </p:txBody>
@@ -4242,7 +4242,7 @@
                   <a:srgbClr val="000000"/>
                 </a:solidFill>
               </a:rPr>
-              <a:t>입력 필드 1 (예: 기본 정보)</a:t>
+              <a:t>입력 필드 1 (기본 정보)</a:t>
             </a:r>
           </a:p>
         </p:txBody>
